--- a/docs/ppt/ask-dao-biomed-deck.pptx
+++ b/docs/ppt/ask-dao-biomed-deck.pptx
@@ -10553,7 +10553,7 @@
                 <a:ea typeface="SimSun"/>
                 <a:cs typeface="SimSun"/>
               </a:rPr>
-              <a:t>经验检索桥</a:t>
+              <a:t>经验检索桥（可选）</a:t>
             </a:r>
           </a:p>
           <a:p>
@@ -10563,37 +10563,48 @@
               </a:spcAft>
             </a:pPr>
             <a:r>
-              <a:rPr sz="1150" b="0">
-                <a:solidFill>
-                  <a:srgbClr val="4A4F57"/>
+              <a:rPr sz="1150" b="1">
+                <a:solidFill>
+                  <a:srgbClr val="2F6B6B"/>
                 </a:solidFill>
                 <a:latin typeface="Segoe UI"/>
                 <a:ea typeface="Microsoft YaHei"/>
                 <a:cs typeface="Microsoft YaHei"/>
               </a:rPr>
-              <a:t>想象路可接现实经验（维基双通道 + arXiv 回退 → 经验锚点），但只做</a:t>
-            </a:r>
-            <a:r>
-              <a:rPr sz="1150" b="1">
-                <a:solidFill>
-                  <a:srgbClr val="2F6B6B"/>
+              <a:t>两条路可以各自单独跑，也可以选择过桥</a:t>
+            </a:r>
+            <a:r>
+              <a:rPr sz="1150" b="0">
+                <a:solidFill>
+                  <a:srgbClr val="4A4F57"/>
                 </a:solidFill>
                 <a:latin typeface="Segoe UI"/>
                 <a:ea typeface="Microsoft YaHei"/>
                 <a:cs typeface="Microsoft YaHei"/>
               </a:rPr>
-              <a:t>脚手架</a:t>
-            </a:r>
-            <a:r>
-              <a:rPr sz="1150" b="0">
-                <a:solidFill>
-                  <a:srgbClr val="4A4F57"/>
+              <a:t>。过桥把组合词接到现实经验（维基双通道 + arXiv 回退 → 经验锚点），只做</a:t>
+            </a:r>
+            <a:r>
+              <a:rPr sz="1150" b="1">
+                <a:solidFill>
+                  <a:srgbClr val="2F6B6B"/>
                 </a:solidFill>
                 <a:latin typeface="Segoe UI"/>
                 <a:ea typeface="Microsoft YaHei"/>
                 <a:cs typeface="Microsoft YaHei"/>
               </a:rPr>
-              <a:t>，不做裁判。</a:t>
+              <a:t>脚手架</a:t>
+            </a:r>
+            <a:r>
+              <a:rPr sz="1150" b="0">
+                <a:solidFill>
+                  <a:srgbClr val="4A4F57"/>
+                </a:solidFill>
+                <a:latin typeface="Segoe UI"/>
+                <a:ea typeface="Microsoft YaHei"/>
+                <a:cs typeface="Microsoft YaHei"/>
+              </a:rPr>
+              <a:t>，不做裁判；过桥不改变任何判定，检索失败即退化为无锚点。</a:t>
             </a:r>
           </a:p>
         </p:txBody>
@@ -16114,7 +16125,7 @@
                           <a:ea typeface="Microsoft YaHei"/>
                           <a:cs typeface="Microsoft YaHei"/>
                         </a:rPr>
-                        <a:t> 一个命令九个动作（paper/ask/imagine/perceive/all/report/doctor/data/mcp）</a:t>
+                        <a:t> 一个命令十个动作（paper/ask/imagine/bridge/perceive/all/report/doctor/data/mcp）</a:t>
                       </a:r>
                     </a:p>
                   </a:txBody>

--- a/docs/ppt/ask-dao-biomed-deck.pptx
+++ b/docs/ppt/ask-dao-biomed-deck.pptx
@@ -29,6 +29,8 @@
     <p:sldId id="277" r:id="rId28"/>
     <p:sldId id="278" r:id="rId29"/>
     <p:sldId id="279" r:id="rId30"/>
+    <p:sldId id="280" r:id="rId31"/>
+    <p:sldId id="281" r:id="rId32"/>
   </p:sldIdLst>
   <p:sldSz cx="12191695" cy="6858000" type="screen4x3"/>
   <p:notesSz cx="6858000" cy="9144000"/>
@@ -3409,7 +3411,7 @@
                 <a:ea typeface="Microsoft YaHei"/>
                 <a:cs typeface="Microsoft YaHei"/>
               </a:rPr>
-              <a:t>01 / 24</a:t>
+              <a:t>01 / 26</a:t>
             </a:r>
           </a:p>
         </p:txBody>
@@ -3476,7 +3478,7 @@
                 <a:ea typeface="Microsoft YaHei"/>
                 <a:cs typeface="Microsoft YaHei"/>
               </a:rPr>
-              <a:t>二、在生物医学的实践 · 真实使用</a:t>
+              <a:t>二、在生物医学的实践 · 结果 ④</a:t>
             </a:r>
           </a:p>
         </p:txBody>
@@ -3517,7 +3519,7 @@
                 <a:ea typeface="SimSun"/>
                 <a:cs typeface="SimSun"/>
               </a:rPr>
-              <a:t>真实跑一遍：命令与产物</a:t>
+              <a:t>④ 方法学追问 29 条：10 类缺口各列 1 条（原句）</a:t>
             </a:r>
           </a:p>
         </p:txBody>
@@ -3558,7 +3560,7 @@
                 <a:ea typeface="Microsoft YaHei"/>
                 <a:cs typeface="Microsoft YaHei"/>
               </a:rPr>
-              <a:t>下面是</a:t>
+              <a:t>领域包按 </a:t>
             </a:r>
             <a:r>
               <a:rPr sz="1200" b="1">
@@ -3569,7 +3571,7 @@
                 <a:ea typeface="Microsoft YaHei"/>
                 <a:cs typeface="Microsoft YaHei"/>
               </a:rPr>
-              <a:t>真实命令序列与未删改的输出</a:t>
+              <a:t>10 类方法学缺口</a:t>
             </a:r>
             <a:r>
               <a:rPr sz="1200" b="0">
@@ -3580,7 +3582,7 @@
                 <a:ea typeface="Microsoft YaHei"/>
                 <a:cs typeface="Microsoft YaHei"/>
               </a:rPr>
-              <a:t>（不是示意）。产物固定落在 </a:t>
+              <a:t>逐条追问；每条都写成</a:t>
             </a:r>
             <a:r>
               <a:rPr sz="1200" b="1">
@@ -3591,7 +3593,7 @@
                 <a:ea typeface="Microsoft YaHei"/>
                 <a:cs typeface="Microsoft YaHei"/>
               </a:rPr>
-              <a:t>--out</a:t>
+              <a:t>可判形式</a:t>
             </a:r>
             <a:r>
               <a:rPr sz="1200" b="0">
@@ -3602,7 +3604,7 @@
                 <a:ea typeface="Microsoft YaHei"/>
                 <a:cs typeface="Microsoft YaHei"/>
               </a:rPr>
-              <a:t> 目录：</a:t>
+              <a:t>，并标明</a:t>
             </a:r>
             <a:r>
               <a:rPr sz="1200" b="1">
@@ -3613,7 +3615,7 @@
                 <a:ea typeface="Microsoft YaHei"/>
                 <a:cs typeface="Microsoft YaHei"/>
               </a:rPr>
-              <a:t>problems_*.json</a:t>
+              <a:t>主题作者是否已在文中论及</a:t>
             </a:r>
             <a:r>
               <a:rPr sz="1200" b="0">
@@ -3624,67 +3626,21 @@
                 <a:ea typeface="Microsoft YaHei"/>
                 <a:cs typeface="Microsoft YaHei"/>
               </a:rPr>
-              <a:t> + </a:t>
-            </a:r>
-            <a:r>
-              <a:rPr sz="1200" b="1">
-                <a:solidFill>
-                  <a:srgbClr val="2F6B6B"/>
-                </a:solidFill>
-                <a:latin typeface="Segoe UI"/>
-                <a:ea typeface="Microsoft YaHei"/>
-                <a:cs typeface="Microsoft YaHei"/>
-              </a:rPr>
-              <a:t>REPORT.md</a:t>
-            </a:r>
-            <a:r>
-              <a:rPr sz="1200" b="0">
-                <a:solidFill>
-                  <a:srgbClr val="4A4F57"/>
-                </a:solidFill>
-                <a:latin typeface="Segoe UI"/>
-                <a:ea typeface="Microsoft YaHei"/>
-                <a:cs typeface="Microsoft YaHei"/>
-              </a:rPr>
               <a:t>。</a:t>
             </a:r>
           </a:p>
         </p:txBody>
       </p:sp>
-      <p:pic>
-        <p:nvPicPr>
-          <p:cNvPr id="5" name="Picture 4" descr="t1-fetch.png"/>
-          <p:cNvPicPr>
-            <a:picLocks noChangeAspect="1"/>
-          </p:cNvPicPr>
-          <p:nvPr/>
-        </p:nvPicPr>
-        <p:blipFill>
-          <a:blip r:embed="rId2"/>
-          <a:stretch>
-            <a:fillRect/>
-          </a:stretch>
-        </p:blipFill>
-        <p:spPr>
-          <a:xfrm>
-            <a:off x="685800" y="2670048"/>
-            <a:ext cx="2553462" cy="785514"/>
-          </a:xfrm>
-          <a:prstGeom prst="rect">
-            <a:avLst/>
-          </a:prstGeom>
-        </p:spPr>
-      </p:pic>
-      <p:sp>
-        <p:nvSpPr>
-          <p:cNvPr id="6" name="TextBox 5"/>
+      <p:sp>
+        <p:nvSpPr>
+          <p:cNvPr id="5" name="TextBox 4"/>
           <p:cNvSpPr txBox="1"/>
           <p:nvPr/>
         </p:nvSpPr>
         <p:spPr>
           <a:xfrm>
-            <a:off x="685800" y="3510426"/>
-            <a:ext cx="2553462" cy="457200"/>
+            <a:off x="685800" y="2578608"/>
+            <a:ext cx="5285232" cy="4023360"/>
           </a:xfrm>
           <a:prstGeom prst="rect">
             <a:avLst/>
@@ -3699,79 +3655,294 @@
           <a:p>
             <a:pPr>
               <a:spcAft>
-                <a:spcPts val="0"/>
-              </a:spcAft>
-            </a:pPr>
-            <a:r>
-              <a:rPr sz="850" b="0">
-                <a:solidFill>
-                  <a:srgbClr val="6B7078"/>
-                </a:solidFill>
-                <a:latin typeface="Segoe UI"/>
-                <a:ea typeface="Microsoft YaHei"/>
-                <a:cs typeface="Microsoft YaHei"/>
-              </a:rPr>
-              <a:t>① 取论文：</a:t>
-            </a:r>
+                <a:spcPts val="700"/>
+              </a:spcAft>
+            </a:pPr>
             <a:r>
               <a:rPr sz="850" b="1">
                 <a:solidFill>
-                  <a:srgbClr val="2F6B6B"/>
-                </a:solidFill>
-                <a:latin typeface="Segoe UI"/>
-                <a:ea typeface="Microsoft YaHei"/>
-                <a:cs typeface="Microsoft YaHei"/>
-              </a:rPr>
-              <a:t>data fetch</a:t>
-            </a:r>
-            <a:r>
-              <a:rPr sz="850" b="0">
-                <a:solidFill>
-                  <a:srgbClr val="6B7078"/>
-                </a:solidFill>
-                <a:latin typeface="Segoe UI"/>
-                <a:ea typeface="Microsoft YaHei"/>
-                <a:cs typeface="Microsoft YaHei"/>
-              </a:rPr>
-              <a:t> 从 Europe PMC 拉开放获取全文</a:t>
-            </a:r>
-          </a:p>
-        </p:txBody>
-      </p:sp>
-      <p:pic>
-        <p:nvPicPr>
-          <p:cNvPr id="7" name="Picture 6" descr="t2-run.png"/>
-          <p:cNvPicPr>
-            <a:picLocks noChangeAspect="1"/>
-          </p:cNvPicPr>
-          <p:nvPr/>
-        </p:nvPicPr>
-        <p:blipFill>
-          <a:blip r:embed="rId3"/>
-          <a:stretch>
-            <a:fillRect/>
-          </a:stretch>
-        </p:blipFill>
-        <p:spPr>
-          <a:xfrm>
-            <a:off x="3440430" y="2670048"/>
-            <a:ext cx="2553462" cy="445773"/>
-          </a:xfrm>
-          <a:prstGeom prst="rect">
-            <a:avLst/>
-          </a:prstGeom>
-        </p:spPr>
-      </p:pic>
-      <p:sp>
-        <p:nvSpPr>
-          <p:cNvPr id="8" name="TextBox 7"/>
+                  <a:srgbClr val="B03A2E"/>
+                </a:solidFill>
+                <a:latin typeface="Segoe UI"/>
+                <a:ea typeface="Microsoft YaHei"/>
+                <a:cs typeface="Microsoft YaHei"/>
+              </a:rPr>
+              <a:t>人群外推边界　</a:t>
+            </a:r>
+            <a:r>
+              <a:rPr sz="1000" b="0">
+                <a:solidFill>
+                  <a:srgbClr val="16191D"/>
+                </a:solidFill>
+                <a:latin typeface="Segoe UI"/>
+                <a:ea typeface="Microsoft YaHei"/>
+                <a:cs typeface="Microsoft YaHei"/>
+              </a:rPr>
+              <a:t>该效应量是在特定人群里测出来的：换人群（不同族裔、不同基线风险、志愿者偏健康的「健康志愿者效应」）后，是效应量缩放，还是方向都可能翻转？写成可判形式：给出该效应在不同基线风险下的绝对风险差，并说明在什么基线风险下绝对危害为零。</a:t>
+            </a:r>
+          </a:p>
+          <a:p>
+            <a:pPr>
+              <a:spcAft>
+                <a:spcPts val="900"/>
+              </a:spcAft>
+            </a:pPr>
+            <a:r>
+              <a:rPr sz="800" b="0">
+                <a:solidFill>
+                  <a:srgbClr val="8A8F96"/>
+                </a:solidFill>
+                <a:latin typeface="Segoe UI"/>
+                <a:ea typeface="Microsoft YaHei"/>
+                <a:cs typeface="Microsoft YaHei"/>
+              </a:rPr>
+              <a:t>判定路由：绝对风险重算（基线风险 × HR）+ 跨队列复现　·　文中未见</a:t>
+            </a:r>
+          </a:p>
+          <a:p>
+            <a:pPr>
+              <a:spcAft>
+                <a:spcPts val="700"/>
+              </a:spcAft>
+            </a:pPr>
+            <a:r>
+              <a:rPr sz="850" b="1">
+                <a:solidFill>
+                  <a:srgbClr val="B03A2E"/>
+                </a:solidFill>
+                <a:latin typeface="Segoe UI"/>
+                <a:ea typeface="Microsoft YaHei"/>
+                <a:cs typeface="Microsoft YaHei"/>
+              </a:rPr>
+              <a:t>测量误差方向　</a:t>
+            </a:r>
+            <a:r>
+              <a:rPr sz="1000" b="0">
+                <a:solidFill>
+                  <a:srgbClr val="16191D"/>
+                </a:solidFill>
+                <a:latin typeface="Segoe UI"/>
+                <a:ea typeface="Microsoft YaHei"/>
+                <a:cs typeface="Microsoft YaHei"/>
+              </a:rPr>
+              <a:t>暴露/结局是自报或单次测量的：这类误差是</a:t>
+            </a:r>
+            <a:r>
+              <a:rPr sz="1000" b="0">
+                <a:solidFill>
+                  <a:srgbClr val="16191D"/>
+                </a:solidFill>
+                <a:latin typeface="Segoe UI"/>
+                <a:ea typeface="Microsoft YaHei"/>
+                <a:cs typeface="Microsoft YaHei"/>
+              </a:rPr>
+              <a:t>非差异性</a:t>
+            </a:r>
+            <a:r>
+              <a:rPr sz="1000" b="0">
+                <a:solidFill>
+                  <a:srgbClr val="16191D"/>
+                </a:solidFill>
+                <a:latin typeface="Segoe UI"/>
+                <a:ea typeface="Microsoft YaHei"/>
+                <a:cs typeface="Microsoft YaHei"/>
+              </a:rPr>
+              <a:t>（把效应推向无效、低估）还是</a:t>
+            </a:r>
+            <a:r>
+              <a:rPr sz="1000" b="0">
+                <a:solidFill>
+                  <a:srgbClr val="16191D"/>
+                </a:solidFill>
+                <a:latin typeface="Segoe UI"/>
+                <a:ea typeface="Microsoft YaHei"/>
+                <a:cs typeface="Microsoft YaHei"/>
+              </a:rPr>
+              <a:t>差异性</a:t>
+            </a:r>
+            <a:r>
+              <a:rPr sz="1000" b="0">
+                <a:solidFill>
+                  <a:srgbClr val="16191D"/>
+                </a:solidFill>
+                <a:latin typeface="Segoe UI"/>
+                <a:ea typeface="Microsoft YaHei"/>
+                <a:cs typeface="Microsoft YaHei"/>
+              </a:rPr>
+              <a:t>（可能制造假阳性）？写成可判形式：用重复测量做回归校准，报告校准系数与校准后的效应量；若校准后效应变大，说明原结论被低估。</a:t>
+            </a:r>
+          </a:p>
+          <a:p>
+            <a:pPr>
+              <a:spcAft>
+                <a:spcPts val="900"/>
+              </a:spcAft>
+            </a:pPr>
+            <a:r>
+              <a:rPr sz="800" b="0">
+                <a:solidFill>
+                  <a:srgbClr val="8A8F96"/>
+                </a:solidFill>
+                <a:latin typeface="Segoe UI"/>
+                <a:ea typeface="Microsoft YaHei"/>
+                <a:cs typeface="Microsoft YaHei"/>
+              </a:rPr>
+              <a:t>判定路由：回归校准（regression calibration）+ 重复测量子样本　·　主题作者已论及</a:t>
+            </a:r>
+          </a:p>
+          <a:p>
+            <a:pPr>
+              <a:spcAft>
+                <a:spcPts val="700"/>
+              </a:spcAft>
+            </a:pPr>
+            <a:r>
+              <a:rPr sz="850" b="1">
+                <a:solidFill>
+                  <a:srgbClr val="B03A2E"/>
+                </a:solidFill>
+                <a:latin typeface="Segoe UI"/>
+                <a:ea typeface="Microsoft YaHei"/>
+                <a:cs typeface="Microsoft YaHei"/>
+              </a:rPr>
+              <a:t>因果方向　</a:t>
+            </a:r>
+            <a:r>
+              <a:rPr sz="1000" b="0">
+                <a:solidFill>
+                  <a:srgbClr val="16191D"/>
+                </a:solidFill>
+                <a:latin typeface="Segoe UI"/>
+                <a:ea typeface="Microsoft YaHei"/>
+                <a:cs typeface="Microsoft YaHei"/>
+              </a:rPr>
+              <a:t>文中给出的是关联，但设计默认了 X→Y 的方向：反向因果（结局或早期病变改变了暴露）能否解释该效应？用可检验的形式说：把随访前 k 年发生的事件剔除（lag 分析），效应量随 k 如何变化？若 k≥2 年就衰减到 1，说明什么？</a:t>
+            </a:r>
+          </a:p>
+          <a:p>
+            <a:pPr>
+              <a:spcAft>
+                <a:spcPts val="900"/>
+              </a:spcAft>
+            </a:pPr>
+            <a:r>
+              <a:rPr sz="800" b="0">
+                <a:solidFill>
+                  <a:srgbClr val="8A8F96"/>
+                </a:solidFill>
+                <a:latin typeface="Segoe UI"/>
+                <a:ea typeface="Microsoft YaHei"/>
+                <a:cs typeface="Microsoft YaHei"/>
+              </a:rPr>
+              <a:t>判定路由：滞后/剔除分析（lag analysis）+ 反向孟德尔随机化　·　主题作者已论及</a:t>
+            </a:r>
+          </a:p>
+          <a:p>
+            <a:pPr>
+              <a:spcAft>
+                <a:spcPts val="700"/>
+              </a:spcAft>
+            </a:pPr>
+            <a:r>
+              <a:rPr sz="850" b="1">
+                <a:solidFill>
+                  <a:srgbClr val="B03A2E"/>
+                </a:solidFill>
+                <a:latin typeface="Segoe UI"/>
+                <a:ea typeface="Microsoft YaHei"/>
+                <a:cs typeface="Microsoft YaHei"/>
+              </a:rPr>
+              <a:t>残余混杂强度　</a:t>
+            </a:r>
+            <a:r>
+              <a:rPr sz="1000" b="0">
+                <a:solidFill>
+                  <a:srgbClr val="16191D"/>
+                </a:solidFill>
+                <a:latin typeface="Segoe UI"/>
+                <a:ea typeface="Microsoft YaHei"/>
+                <a:cs typeface="Microsoft YaHei"/>
+              </a:rPr>
+              <a:t>该效应是「已调整」之后剩下的：残余混杂要多强才能把它解释掉？把它写成可算的形式：给定效应量与置信区间，算 E-value（未测混杂与暴露、结局的关联强度各自要达到多少，才能把效应推到无效），并给出最小混杂强度数值。</a:t>
+            </a:r>
+          </a:p>
+          <a:p>
+            <a:pPr>
+              <a:spcAft>
+                <a:spcPts val="900"/>
+              </a:spcAft>
+            </a:pPr>
+            <a:r>
+              <a:rPr sz="800" b="0">
+                <a:solidFill>
+                  <a:srgbClr val="8A8F96"/>
+                </a:solidFill>
+                <a:latin typeface="Segoe UI"/>
+                <a:ea typeface="Microsoft YaHei"/>
+                <a:cs typeface="Microsoft YaHei"/>
+              </a:rPr>
+              <a:t>判定路由：E-value / 敏感性分析（可精确计算）　·　主题作者已论及</a:t>
+            </a:r>
+          </a:p>
+          <a:p>
+            <a:pPr>
+              <a:spcAft>
+                <a:spcPts val="700"/>
+              </a:spcAft>
+            </a:pPr>
+            <a:r>
+              <a:rPr sz="850" b="1">
+                <a:solidFill>
+                  <a:srgbClr val="B03A2E"/>
+                </a:solidFill>
+                <a:latin typeface="Segoe UI"/>
+                <a:ea typeface="Microsoft YaHei"/>
+                <a:cs typeface="Microsoft YaHei"/>
+              </a:rPr>
+              <a:t>效应量 vs 判定阈值　</a:t>
+            </a:r>
+            <a:r>
+              <a:rPr sz="1000" b="0">
+                <a:solidFill>
+                  <a:srgbClr val="16191D"/>
+                </a:solidFill>
+                <a:latin typeface="Segoe UI"/>
+                <a:ea typeface="Microsoft YaHei"/>
+                <a:cs typeface="Microsoft YaHei"/>
+              </a:rPr>
+              <a:t>由 HR 与 95% CI 直接给出：这个效应量有没有超过事先设定的决策阈值（临床/公共卫生意义上的）？换算成绝对尺度（每千人年多/少多少事件）、以及使结论翻转所需的最小偏倚或最小随访时间。</a:t>
+            </a:r>
+          </a:p>
+          <a:p>
+            <a:pPr>
+              <a:spcAft>
+                <a:spcPts val="900"/>
+              </a:spcAft>
+            </a:pPr>
+            <a:r>
+              <a:rPr sz="800" b="0">
+                <a:solidFill>
+                  <a:srgbClr val="8A8F96"/>
+                </a:solidFill>
+                <a:latin typeface="Segoe UI"/>
+                <a:ea typeface="Microsoft YaHei"/>
+                <a:cs typeface="Microsoft YaHei"/>
+              </a:rPr>
+              <a:t>判定路由：绝对风险差 / NNH 计算 + 阈值敏感性　·　文中未见</a:t>
+            </a:r>
+          </a:p>
+        </p:txBody>
+      </p:sp>
+      <p:sp>
+        <p:nvSpPr>
+          <p:cNvPr id="6" name="TextBox 5"/>
           <p:cNvSpPr txBox="1"/>
           <p:nvPr/>
         </p:nvSpPr>
         <p:spPr>
           <a:xfrm>
-            <a:off x="3440430" y="3170685"/>
-            <a:ext cx="2553462" cy="457200"/>
+            <a:off x="6217920" y="2578608"/>
+            <a:ext cx="5285232" cy="4023360"/>
           </a:xfrm>
           <a:prstGeom prst="rect">
             <a:avLst/>
@@ -3786,189 +3957,309 @@
           <a:p>
             <a:pPr>
               <a:spcAft>
-                <a:spcPts val="0"/>
-              </a:spcAft>
-            </a:pPr>
-            <a:r>
-              <a:rPr sz="850" b="0">
-                <a:solidFill>
-                  <a:srgbClr val="6B7078"/>
-                </a:solidFill>
-                <a:latin typeface="Segoe UI"/>
-                <a:ea typeface="Microsoft YaHei"/>
-                <a:cs typeface="Microsoft YaHei"/>
-              </a:rPr>
-              <a:t>② 跑批：</a:t>
-            </a:r>
+                <a:spcPts val="700"/>
+              </a:spcAft>
+            </a:pPr>
             <a:r>
               <a:rPr sz="850" b="1">
                 <a:solidFill>
-                  <a:srgbClr val="2F6B6B"/>
-                </a:solidFill>
-                <a:latin typeface="Segoe UI"/>
-                <a:ea typeface="Microsoft YaHei"/>
-                <a:cs typeface="Microsoft YaHei"/>
-              </a:rPr>
-              <a:t>paper … --domain biomed</a:t>
-            </a:r>
-          </a:p>
-        </p:txBody>
-      </p:sp>
-      <p:pic>
-        <p:nvPicPr>
-          <p:cNvPr id="9" name="Picture 8" descr="t3-items.png"/>
-          <p:cNvPicPr>
-            <a:picLocks noChangeAspect="1"/>
-          </p:cNvPicPr>
-          <p:nvPr/>
-        </p:nvPicPr>
-        <p:blipFill>
-          <a:blip r:embed="rId4"/>
-          <a:stretch>
-            <a:fillRect/>
-          </a:stretch>
-        </p:blipFill>
-        <p:spPr>
-          <a:xfrm>
-            <a:off x="6195060" y="2670048"/>
-            <a:ext cx="1406920" cy="2432304"/>
-          </a:xfrm>
-          <a:prstGeom prst="rect">
-            <a:avLst/>
-          </a:prstGeom>
-        </p:spPr>
-      </p:pic>
-      <p:sp>
-        <p:nvSpPr>
-          <p:cNvPr id="10" name="TextBox 9"/>
-          <p:cNvSpPr txBox="1"/>
-          <p:nvPr/>
-        </p:nvSpPr>
-        <p:spPr>
-          <a:xfrm>
-            <a:off x="6195060" y="5157216"/>
-            <a:ext cx="2553462" cy="457200"/>
-          </a:xfrm>
-          <a:prstGeom prst="rect">
-            <a:avLst/>
-          </a:prstGeom>
-          <a:noFill/>
-        </p:spPr>
-        <p:txBody>
-          <a:bodyPr wrap="square">
-            <a:spAutoFit/>
-          </a:bodyPr>
-          <a:lstStyle/>
-          <a:p>
-            <a:pPr>
-              <a:spcAft>
-                <a:spcPts val="0"/>
-              </a:spcAft>
-            </a:pPr>
-            <a:r>
-              <a:rPr sz="850" b="0">
-                <a:solidFill>
-                  <a:srgbClr val="6B7078"/>
-                </a:solidFill>
-                <a:latin typeface="Segoe UI"/>
-                <a:ea typeface="Microsoft YaHei"/>
-                <a:cs typeface="Microsoft YaHei"/>
-              </a:rPr>
-              <a:t>③ 逐条问题：带原文证据句 + 判定路由</a:t>
-            </a:r>
-          </a:p>
-        </p:txBody>
-      </p:sp>
-      <p:pic>
-        <p:nvPicPr>
-          <p:cNvPr id="11" name="Picture 10" descr="t4-report.png"/>
-          <p:cNvPicPr>
-            <a:picLocks noChangeAspect="1"/>
-          </p:cNvPicPr>
-          <p:nvPr/>
-        </p:nvPicPr>
-        <p:blipFill>
-          <a:blip r:embed="rId5"/>
-          <a:stretch>
-            <a:fillRect/>
-          </a:stretch>
-        </p:blipFill>
-        <p:spPr>
-          <a:xfrm>
-            <a:off x="8949690" y="2670048"/>
-            <a:ext cx="1712481" cy="2432304"/>
-          </a:xfrm>
-          <a:prstGeom prst="rect">
-            <a:avLst/>
-          </a:prstGeom>
-        </p:spPr>
-      </p:pic>
-      <p:sp>
-        <p:nvSpPr>
-          <p:cNvPr id="12" name="TextBox 11"/>
-          <p:cNvSpPr txBox="1"/>
-          <p:nvPr/>
-        </p:nvSpPr>
-        <p:spPr>
-          <a:xfrm>
-            <a:off x="8949690" y="5157216"/>
-            <a:ext cx="2553462" cy="457200"/>
-          </a:xfrm>
-          <a:prstGeom prst="rect">
-            <a:avLst/>
-          </a:prstGeom>
-          <a:noFill/>
-        </p:spPr>
-        <p:txBody>
-          <a:bodyPr wrap="square">
-            <a:spAutoFit/>
-          </a:bodyPr>
-          <a:lstStyle/>
-          <a:p>
-            <a:pPr>
-              <a:spcAft>
-                <a:spcPts val="0"/>
-              </a:spcAft>
-            </a:pPr>
-            <a:r>
-              <a:rPr sz="850" b="0">
-                <a:solidFill>
-                  <a:srgbClr val="6B7078"/>
-                </a:solidFill>
-                <a:latin typeface="Segoe UI"/>
-                <a:ea typeface="Microsoft YaHei"/>
-                <a:cs typeface="Microsoft YaHei"/>
-              </a:rPr>
-              <a:t>④ 汇总：</a:t>
-            </a:r>
+                  <a:srgbClr val="B03A2E"/>
+                </a:solidFill>
+                <a:latin typeface="Segoe UI"/>
+                <a:ea typeface="Microsoft YaHei"/>
+                <a:cs typeface="Microsoft YaHei"/>
+              </a:rPr>
+              <a:t>替代分析的反事实　</a:t>
+            </a:r>
+            <a:r>
+              <a:rPr sz="1000" b="0">
+                <a:solidFill>
+                  <a:srgbClr val="16191D"/>
+                </a:solidFill>
+                <a:latin typeface="Segoe UI"/>
+                <a:ea typeface="Microsoft YaHei"/>
+                <a:cs typeface="Microsoft YaHei"/>
+              </a:rPr>
+              <a:t>替代模型的结论依赖「对照是什么」：把 A 换成 B，与「把 A 拿掉」、「A 换成 C」是两个不同的反事实，效应量不可互换。写成可判形式：明确反事实集，并检验结论在该反事实集内是否稳健（不同替代物之间的排序是否一致）。</a:t>
+            </a:r>
+          </a:p>
+          <a:p>
+            <a:pPr>
+              <a:spcAft>
+                <a:spcPts val="900"/>
+              </a:spcAft>
+            </a:pPr>
+            <a:r>
+              <a:rPr sz="800" b="0">
+                <a:solidFill>
+                  <a:srgbClr val="8A8F96"/>
+                </a:solidFill>
+                <a:latin typeface="Segoe UI"/>
+                <a:ea typeface="Microsoft YaHei"/>
+                <a:cs typeface="Microsoft YaHei"/>
+              </a:rPr>
+              <a:t>判定路由：反事实定义显式化 + 替代物排序稳健性检验　·　主题作者已论及</a:t>
+            </a:r>
+          </a:p>
+          <a:p>
+            <a:pPr>
+              <a:spcAft>
+                <a:spcPts val="700"/>
+              </a:spcAft>
+            </a:pPr>
             <a:r>
               <a:rPr sz="850" b="1">
                 <a:solidFill>
-                  <a:srgbClr val="2F6B6B"/>
-                </a:solidFill>
-                <a:latin typeface="Segoe UI"/>
-                <a:ea typeface="Microsoft YaHei"/>
-                <a:cs typeface="Microsoft YaHei"/>
-              </a:rPr>
-              <a:t>REPORT.md</a:t>
-            </a:r>
-            <a:r>
-              <a:rPr sz="850" b="0">
-                <a:solidFill>
-                  <a:srgbClr val="6B7078"/>
-                </a:solidFill>
-                <a:latin typeface="Segoe UI"/>
-                <a:ea typeface="Microsoft YaHei"/>
-                <a:cs typeface="Microsoft YaHei"/>
-              </a:rPr>
-              <a:t> 一页人话</a:t>
-            </a:r>
-          </a:p>
-        </p:txBody>
-      </p:sp>
-      <p:sp>
-        <p:nvSpPr>
-          <p:cNvPr id="13" name="Rectangle 12"/>
+                  <a:srgbClr val="B03A2E"/>
+                </a:solidFill>
+                <a:latin typeface="Segoe UI"/>
+                <a:ea typeface="Microsoft YaHei"/>
+                <a:cs typeface="Microsoft YaHei"/>
+              </a:rPr>
+              <a:t>多重比较与假发现　</a:t>
+            </a:r>
+            <a:r>
+              <a:rPr sz="1000" b="0">
+                <a:solidFill>
+                  <a:srgbClr val="16191D"/>
+                </a:solidFill>
+                <a:latin typeface="Segoe UI"/>
+                <a:ea typeface="Microsoft YaHei"/>
+                <a:cs typeface="Microsoft YaHei"/>
+              </a:rPr>
+              <a:t>文中做了多少个亚组/敏感性/次要结局检验？写成可判形式：报告检验总数与假发现率曲线，给出「FDR=5% 下仍然成立」的结论清单；若某一敏感性分析翻转结论，说明翻转阈值在哪里。</a:t>
+            </a:r>
+          </a:p>
+          <a:p>
+            <a:pPr>
+              <a:spcAft>
+                <a:spcPts val="900"/>
+              </a:spcAft>
+            </a:pPr>
+            <a:r>
+              <a:rPr sz="800" b="0">
+                <a:solidFill>
+                  <a:srgbClr val="8A8F96"/>
+                </a:solidFill>
+                <a:latin typeface="Segoe UI"/>
+                <a:ea typeface="Microsoft YaHei"/>
+                <a:cs typeface="Microsoft YaHei"/>
+              </a:rPr>
+              <a:t>判定路由：多重比较清单化 + FDR 曲线 + 翻转阈值　·　主题作者已论及</a:t>
+            </a:r>
+          </a:p>
+          <a:p>
+            <a:pPr>
+              <a:spcAft>
+                <a:spcPts val="700"/>
+              </a:spcAft>
+            </a:pPr>
+            <a:r>
+              <a:rPr sz="850" b="1">
+                <a:solidFill>
+                  <a:srgbClr val="B03A2E"/>
+                </a:solidFill>
+                <a:latin typeface="Segoe UI"/>
+                <a:ea typeface="Microsoft YaHei"/>
+                <a:cs typeface="Microsoft YaHei"/>
+              </a:rPr>
+              <a:t>交互与尺度　</a:t>
+            </a:r>
+            <a:r>
+              <a:rPr sz="1000" b="0">
+                <a:solidFill>
+                  <a:srgbClr val="16191D"/>
+                </a:solidFill>
+                <a:latin typeface="Segoe UI"/>
+                <a:ea typeface="Microsoft YaHei"/>
+                <a:cs typeface="Microsoft YaHei"/>
+              </a:rPr>
+              <a:t>联合暴露的「最高风险组」是相加还是相乘？写成可判形式：在</a:t>
+            </a:r>
+            <a:r>
+              <a:rPr sz="1000" b="0">
+                <a:solidFill>
+                  <a:srgbClr val="16191D"/>
+                </a:solidFill>
+                <a:latin typeface="Segoe UI"/>
+                <a:ea typeface="Microsoft YaHei"/>
+                <a:cs typeface="Microsoft YaHei"/>
+              </a:rPr>
+              <a:t>加性与乘性两种尺度</a:t>
+            </a:r>
+            <a:r>
+              <a:rPr sz="1000" b="0">
+                <a:solidFill>
+                  <a:srgbClr val="16191D"/>
+                </a:solidFill>
+                <a:latin typeface="Segoe UI"/>
+                <a:ea typeface="Microsoft YaHei"/>
+                <a:cs typeface="Microsoft YaHei"/>
+              </a:rPr>
+              <a:t>上分别检验交互，报告 RERI / 交互 HR 及 P-interaction；并说明该交互是否通过了多重比较校正（未校正的亚组交互是最常见的假阳性来源）。</a:t>
+            </a:r>
+          </a:p>
+          <a:p>
+            <a:pPr>
+              <a:spcAft>
+                <a:spcPts val="900"/>
+              </a:spcAft>
+            </a:pPr>
+            <a:r>
+              <a:rPr sz="800" b="0">
+                <a:solidFill>
+                  <a:srgbClr val="8A8F96"/>
+                </a:solidFill>
+                <a:latin typeface="Segoe UI"/>
+                <a:ea typeface="Microsoft YaHei"/>
+                <a:cs typeface="Microsoft YaHei"/>
+              </a:rPr>
+              <a:t>判定路由：加性/乘性交互分解（RERI）+ 多重比较校正　·　主题作者已论及</a:t>
+            </a:r>
+          </a:p>
+          <a:p>
+            <a:pPr>
+              <a:spcAft>
+                <a:spcPts val="700"/>
+              </a:spcAft>
+            </a:pPr>
+            <a:r>
+              <a:rPr sz="850" b="1">
+                <a:solidFill>
+                  <a:srgbClr val="B03A2E"/>
+                </a:solidFill>
+                <a:latin typeface="Segoe UI"/>
+                <a:ea typeface="Microsoft YaHei"/>
+                <a:cs typeface="Microsoft YaHei"/>
+              </a:rPr>
+              <a:t>剂量—反应形状　</a:t>
+            </a:r>
+            <a:r>
+              <a:rPr sz="1000" b="0">
+                <a:solidFill>
+                  <a:srgbClr val="16191D"/>
+                </a:solidFill>
+                <a:latin typeface="Segoe UI"/>
+                <a:ea typeface="Microsoft YaHei"/>
+                <a:cs typeface="Microsoft YaHei"/>
+              </a:rPr>
+              <a:t>文中把暴露分组比较，但没有给出函数形状：单调、阈值，还是非单调（低剂量有益、高剂量有害）？写成可判形式：在连续暴露上拟合样条/分段模型，检验非线性（P-nonlinear），给出拐点位置与其置信区间。</a:t>
+            </a:r>
+          </a:p>
+          <a:p>
+            <a:pPr>
+              <a:spcAft>
+                <a:spcPts val="900"/>
+              </a:spcAft>
+            </a:pPr>
+            <a:r>
+              <a:rPr sz="800" b="0">
+                <a:solidFill>
+                  <a:srgbClr val="8A8F96"/>
+                </a:solidFill>
+                <a:latin typeface="Segoe UI"/>
+                <a:ea typeface="Microsoft YaHei"/>
+                <a:cs typeface="Microsoft YaHei"/>
+              </a:rPr>
+              <a:t>判定路由：限制立方样条 + 非线性检验（拐点估计）　·　主题作者已论及</a:t>
+            </a:r>
+          </a:p>
+          <a:p>
+            <a:pPr>
+              <a:spcAft>
+                <a:spcPts val="700"/>
+              </a:spcAft>
+            </a:pPr>
+            <a:r>
+              <a:rPr sz="850" b="1">
+                <a:solidFill>
+                  <a:srgbClr val="B03A2E"/>
+                </a:solidFill>
+                <a:latin typeface="Segoe UI"/>
+                <a:ea typeface="Microsoft YaHei"/>
+                <a:cs typeface="Microsoft YaHei"/>
+              </a:rPr>
+              <a:t>机制必要性　</a:t>
+            </a:r>
+            <a:r>
+              <a:rPr sz="1000" b="0">
+                <a:solidFill>
+                  <a:srgbClr val="16191D"/>
+                </a:solidFill>
+                <a:latin typeface="Segoe UI"/>
+                <a:ea typeface="Microsoft YaHei"/>
+                <a:cs typeface="Microsoft YaHei"/>
+              </a:rPr>
+              <a:t>文中提到机制但不区分</a:t>
+            </a:r>
+            <a:r>
+              <a:rPr sz="1000" b="0">
+                <a:solidFill>
+                  <a:srgbClr val="16191D"/>
+                </a:solidFill>
+                <a:latin typeface="Segoe UI"/>
+                <a:ea typeface="Microsoft YaHei"/>
+                <a:cs typeface="Microsoft YaHei"/>
+              </a:rPr>
+              <a:t>必要性</a:t>
+            </a:r>
+            <a:r>
+              <a:rPr sz="1000" b="0">
+                <a:solidFill>
+                  <a:srgbClr val="16191D"/>
+                </a:solidFill>
+                <a:latin typeface="Segoe UI"/>
+                <a:ea typeface="Microsoft YaHei"/>
+                <a:cs typeface="Microsoft YaHei"/>
+              </a:rPr>
+              <a:t>与</a:t>
+            </a:r>
+            <a:r>
+              <a:rPr sz="1000" b="0">
+                <a:solidFill>
+                  <a:srgbClr val="16191D"/>
+                </a:solidFill>
+                <a:latin typeface="Segoe UI"/>
+                <a:ea typeface="Microsoft YaHei"/>
+                <a:cs typeface="Microsoft YaHei"/>
+              </a:rPr>
+              <a:t>充分性</a:t>
+            </a:r>
+            <a:r>
+              <a:rPr sz="1000" b="0">
+                <a:solidFill>
+                  <a:srgbClr val="16191D"/>
+                </a:solidFill>
+                <a:latin typeface="Segoe UI"/>
+                <a:ea typeface="Microsoft YaHei"/>
+                <a:cs typeface="Microsoft YaHei"/>
+              </a:rPr>
+              <a:t>：敲掉该通路，效应是否消失（必要）？单独激活该通路，是否足以复制效应（充分）？写成可判形式：给出两问各自的实验设计（KO + rescue / 激活剂），以及在人样本上可观察的中间量。</a:t>
+            </a:r>
+          </a:p>
+          <a:p>
+            <a:pPr>
+              <a:spcAft>
+                <a:spcPts val="900"/>
+              </a:spcAft>
+            </a:pPr>
+            <a:r>
+              <a:rPr sz="800" b="0">
+                <a:solidFill>
+                  <a:srgbClr val="8A8F96"/>
+                </a:solidFill>
+                <a:latin typeface="Segoe UI"/>
+                <a:ea typeface="Microsoft YaHei"/>
+                <a:cs typeface="Microsoft YaHei"/>
+              </a:rPr>
+              <a:t>判定路由：必要性与充分性实验设计（KO+rescue）+ 中介分析　·　主题作者已论及</a:t>
+            </a:r>
+          </a:p>
+        </p:txBody>
+      </p:sp>
+      <p:sp>
+        <p:nvSpPr>
+          <p:cNvPr id="7" name="Rectangle 6"/>
           <p:cNvSpPr/>
           <p:nvPr/>
         </p:nvSpPr>
@@ -4012,7 +4303,7 @@
       </p:sp>
       <p:sp>
         <p:nvSpPr>
-          <p:cNvPr id="14" name="TextBox 13"/>
+          <p:cNvPr id="8" name="TextBox 7"/>
           <p:cNvSpPr txBox="1"/>
           <p:nvPr/>
         </p:nvSpPr>
@@ -4046,7 +4337,7 @@
                 <a:ea typeface="Microsoft YaHei"/>
                 <a:cs typeface="Microsoft YaHei"/>
               </a:rPr>
-              <a:t>完整回放与逐条证据句见手册：</a:t>
+              <a:t>全 29 条中，主题</a:t>
             </a:r>
             <a:r>
               <a:rPr sz="1000" b="1">
@@ -4057,6 +4348,50 @@
                 <a:ea typeface="Microsoft YaHei"/>
                 <a:cs typeface="Microsoft YaHei"/>
               </a:rPr>
+              <a:t>作者已论及 23 条</a:t>
+            </a:r>
+            <a:r>
+              <a:rPr sz="1000" b="0">
+                <a:solidFill>
+                  <a:srgbClr val="6B7078"/>
+                </a:solidFill>
+                <a:latin typeface="Segoe UI"/>
+                <a:ea typeface="Microsoft YaHei"/>
+                <a:cs typeface="Microsoft YaHei"/>
+              </a:rPr>
+              <a:t>、</a:t>
+            </a:r>
+            <a:r>
+              <a:rPr sz="1000" b="1">
+                <a:solidFill>
+                  <a:srgbClr val="2F6B6B"/>
+                </a:solidFill>
+                <a:latin typeface="Segoe UI"/>
+                <a:ea typeface="Microsoft YaHei"/>
+                <a:cs typeface="Microsoft YaHei"/>
+              </a:rPr>
+              <a:t>文中未见 6 条</a:t>
+            </a:r>
+            <a:r>
+              <a:rPr sz="1000" b="0">
+                <a:solidFill>
+                  <a:srgbClr val="6B7078"/>
+                </a:solidFill>
+                <a:latin typeface="Segoe UI"/>
+                <a:ea typeface="Microsoft YaHei"/>
+                <a:cs typeface="Microsoft YaHei"/>
+              </a:rPr>
+              <a:t>；另有 3 条是机器直接算出的数值（见下页）。完整清单见 </a:t>
+            </a:r>
+            <a:r>
+              <a:rPr sz="1000" b="1">
+                <a:solidFill>
+                  <a:srgbClr val="2F6B6B"/>
+                </a:solidFill>
+                <a:latin typeface="Segoe UI"/>
+                <a:ea typeface="Microsoft YaHei"/>
+                <a:cs typeface="Microsoft YaHei"/>
+              </a:rPr>
               <a:t>docs/guide/demo-biomed.md</a:t>
             </a:r>
             <a:r>
@@ -4075,7 +4410,7 @@
       </p:sp>
       <p:sp>
         <p:nvSpPr>
-          <p:cNvPr id="15" name="TextBox 14"/>
+          <p:cNvPr id="9" name="TextBox 8"/>
           <p:cNvSpPr txBox="1"/>
           <p:nvPr/>
         </p:nvSpPr>
@@ -4109,7 +4444,7 @@
                 <a:ea typeface="Microsoft YaHei"/>
                 <a:cs typeface="Microsoft YaHei"/>
               </a:rPr>
-              <a:t>10 / 24</a:t>
+              <a:t>10 / 26</a:t>
             </a:r>
           </a:p>
         </p:txBody>
@@ -4176,7 +4511,7 @@
                 <a:ea typeface="Microsoft YaHei"/>
                 <a:cs typeface="Microsoft YaHei"/>
               </a:rPr>
-              <a:t>二、在生物医学的实践 · 经验</a:t>
+              <a:t>二、在生物医学的实践 · 结果 ④（新知识）</a:t>
             </a:r>
           </a:p>
         </p:txBody>
@@ -4217,7 +4552,7 @@
                 <a:ea typeface="SimSun"/>
                 <a:cs typeface="SimSun"/>
               </a:rPr>
-              <a:t>这次实践学到的三件事</a:t>
+              <a:t>机器算出来的三个残余混杂门槛</a:t>
             </a:r>
           </a:p>
         </p:txBody>
@@ -4258,58 +4593,21 @@
                 <a:ea typeface="Microsoft YaHei"/>
                 <a:cs typeface="Microsoft YaHei"/>
               </a:rPr>
-              <a:t>经验比结果更值得带走——下面三条都是被真实数据打出来的，不是设计时想到的。</a:t>
-            </a:r>
-          </a:p>
-        </p:txBody>
-      </p:sp>
-      <p:sp>
-        <p:nvSpPr>
-          <p:cNvPr id="5" name="TextBox 4"/>
-          <p:cNvSpPr txBox="1"/>
-          <p:nvPr/>
-        </p:nvSpPr>
-        <p:spPr>
-          <a:xfrm>
-            <a:off x="685800" y="2670048"/>
-            <a:ext cx="10607040" cy="3474720"/>
-          </a:xfrm>
-          <a:prstGeom prst="rect">
-            <a:avLst/>
-          </a:prstGeom>
-          <a:noFill/>
-        </p:spPr>
-        <p:txBody>
-          <a:bodyPr wrap="square">
-            <a:spAutoFit/>
-          </a:bodyPr>
-          <a:lstStyle/>
-          <a:p>
-            <a:pPr>
-              <a:spcAft>
-                <a:spcPts val="100"/>
-              </a:spcAft>
-            </a:pPr>
-            <a:r>
-              <a:rPr sz="1250" b="1">
-                <a:solidFill>
-                  <a:srgbClr val="16191D"/>
-                </a:solidFill>
-                <a:latin typeface="Source Han Serif SC"/>
-                <a:ea typeface="SimSun"/>
-                <a:cs typeface="SimSun"/>
-              </a:rPr>
-              <a:t>① 必须把「作者已提出」单独分出来</a:t>
-            </a:r>
-          </a:p>
-          <a:p>
-            <a:pPr>
-              <a:spcAft>
-                <a:spcPts val="900"/>
-              </a:spcAft>
-            </a:pPr>
-            <a:r>
-              <a:rPr sz="1150" b="0">
+              <a:t>观察性研究的天生软肋：</a:t>
+            </a:r>
+            <a:r>
+              <a:rPr sz="1200" b="1">
+                <a:solidFill>
+                  <a:srgbClr val="2F6B6B"/>
+                </a:solidFill>
+                <a:latin typeface="Segoe UI"/>
+                <a:ea typeface="Microsoft YaHei"/>
+                <a:cs typeface="Microsoft YaHei"/>
+              </a:rPr>
+              <a:t>没人测过的东西</a:t>
+            </a:r>
+            <a:r>
+              <a:rPr sz="1200" b="0">
                 <a:solidFill>
                   <a:srgbClr val="4A4F57"/>
                 </a:solidFill>
@@ -4317,10 +4615,10 @@
                 <a:ea typeface="Microsoft YaHei"/>
                 <a:cs typeface="Microsoft YaHei"/>
               </a:rPr>
-              <a:t>29 条方法学追问里 </a:t>
-            </a:r>
-            <a:r>
-              <a:rPr sz="1150" b="1">
+              <a:t>可能才是真凶。E-value 回答一个问题——</a:t>
+            </a:r>
+            <a:r>
+              <a:rPr sz="1200" b="1">
                 <a:solidFill>
                   <a:srgbClr val="2F6B6B"/>
                 </a:solidFill>
@@ -4328,176 +4626,27 @@
                 <a:ea typeface="Microsoft YaHei"/>
                 <a:cs typeface="Microsoft YaHei"/>
               </a:rPr>
-              <a:t>23 条的主题作者已在文中论及</a:t>
-            </a:r>
-            <a:r>
-              <a:rPr sz="1150" b="0">
-                <a:solidFill>
-                  <a:srgbClr val="4A4F57"/>
-                </a:solidFill>
-                <a:latin typeface="Segoe UI"/>
-                <a:ea typeface="Microsoft YaHei"/>
-                <a:cs typeface="Microsoft YaHei"/>
-              </a:rPr>
-              <a:t>。机器加的是</a:t>
-            </a:r>
-            <a:r>
-              <a:rPr sz="1150" b="1">
-                <a:solidFill>
-                  <a:srgbClr val="2F6B6B"/>
-                </a:solidFill>
-                <a:latin typeface="Segoe UI"/>
-                <a:ea typeface="Microsoft YaHei"/>
-                <a:cs typeface="Microsoft YaHei"/>
-              </a:rPr>
-              <a:t>可判形式</a:t>
-            </a:r>
-            <a:r>
-              <a:rPr sz="1150" b="0">
-                <a:solidFill>
-                  <a:srgbClr val="4A4F57"/>
-                </a:solidFill>
-                <a:latin typeface="Segoe UI"/>
-                <a:ea typeface="Microsoft YaHei"/>
-                <a:cs typeface="Microsoft YaHei"/>
-              </a:rPr>
-              <a:t>（滞后分析、E-value 门槛、RERI、回归校准…），不是话题本身。不分标就会把「复述」当成「发现」。</a:t>
-            </a:r>
-          </a:p>
-          <a:p>
-            <a:pPr>
-              <a:spcAft>
-                <a:spcPts val="100"/>
-              </a:spcAft>
-            </a:pPr>
-            <a:r>
-              <a:rPr sz="1250" b="1">
-                <a:solidFill>
-                  <a:srgbClr val="16191D"/>
-                </a:solidFill>
-                <a:latin typeface="Source Han Serif SC"/>
-                <a:ea typeface="SimSun"/>
-                <a:cs typeface="SimSun"/>
-              </a:rPr>
-              <a:t>② 领域包的价值在于「会算」</a:t>
-            </a:r>
-          </a:p>
-          <a:p>
-            <a:pPr>
-              <a:spcAft>
-                <a:spcPts val="900"/>
-              </a:spcAft>
-            </a:pPr>
-            <a:r>
-              <a:rPr sz="1150" b="0">
-                <a:solidFill>
-                  <a:srgbClr val="4A4F57"/>
-                </a:solidFill>
-                <a:latin typeface="Segoe UI"/>
-                <a:ea typeface="Microsoft YaHei"/>
-                <a:cs typeface="Microsoft YaHei"/>
-              </a:rPr>
-              <a:t>10 类缺口只是清单；真正有用的是</a:t>
-            </a:r>
-            <a:r>
-              <a:rPr sz="1150" b="1">
-                <a:solidFill>
-                  <a:srgbClr val="2F6B6B"/>
-                </a:solidFill>
-                <a:latin typeface="Segoe UI"/>
-                <a:ea typeface="Microsoft YaHei"/>
-                <a:cs typeface="Microsoft YaHei"/>
-              </a:rPr>
-              <a:t>从论文自报的 HR/CI 直接算出门槛</a:t>
-            </a:r>
-            <a:r>
-              <a:rPr sz="1150" b="0">
-                <a:solidFill>
-                  <a:srgbClr val="4A4F57"/>
-                </a:solidFill>
-                <a:latin typeface="Segoe UI"/>
-                <a:ea typeface="Microsoft YaHei"/>
-                <a:cs typeface="Microsoft YaHei"/>
-              </a:rPr>
-              <a:t>——这是任何读者都能复核的数，而不是一句「可能有残余混杂」。</a:t>
-            </a:r>
-          </a:p>
-          <a:p>
-            <a:pPr>
-              <a:spcAft>
-                <a:spcPts val="100"/>
-              </a:spcAft>
-            </a:pPr>
-            <a:r>
-              <a:rPr sz="1250" b="1">
-                <a:solidFill>
-                  <a:srgbClr val="16191D"/>
-                </a:solidFill>
-                <a:latin typeface="Source Han Serif SC"/>
-                <a:ea typeface="SimSun"/>
-                <a:cs typeface="SimSun"/>
-              </a:rPr>
-              <a:t>③ 门槛 ≠ 结论</a:t>
-            </a:r>
-          </a:p>
-          <a:p>
-            <a:pPr>
-              <a:spcAft>
-                <a:spcPts val="900"/>
-              </a:spcAft>
-            </a:pPr>
-            <a:r>
-              <a:rPr sz="1150" b="0">
-                <a:solidFill>
-                  <a:srgbClr val="4A4F57"/>
-                </a:solidFill>
-                <a:latin typeface="Segoe UI"/>
-                <a:ea typeface="Microsoft YaHei"/>
-                <a:cs typeface="Microsoft YaHei"/>
-              </a:rPr>
-              <a:t>E-value 1.67 说的是「混杂要强到这个程度才能解释掉」，</a:t>
-            </a:r>
-            <a:r>
-              <a:rPr sz="1150" b="1">
-                <a:solidFill>
-                  <a:srgbClr val="2F6B6B"/>
-                </a:solidFill>
-                <a:latin typeface="Segoe UI"/>
-                <a:ea typeface="Microsoft YaHei"/>
-                <a:cs typeface="Microsoft YaHei"/>
-              </a:rPr>
-              <a:t>不是说效应是真的</a:t>
-            </a:r>
-            <a:r>
-              <a:rPr sz="1150" b="0">
-                <a:solidFill>
-                  <a:srgbClr val="4A4F57"/>
-                </a:solidFill>
-                <a:latin typeface="Segoe UI"/>
-                <a:ea typeface="Microsoft YaHei"/>
-                <a:cs typeface="Microsoft YaHei"/>
-              </a:rPr>
-              <a:t>，更推不出任何用药、摄入或诊断建议。这条边界必须写在产出里，而不是写在附录里。</a:t>
-            </a:r>
-          </a:p>
-        </p:txBody>
-      </p:sp>
-      <p:sp>
-        <p:nvSpPr>
-          <p:cNvPr id="6" name="Rectangle 5"/>
+              <a:t>那个东西得多强，才能把这条结论解释掉？</a:t>
+            </a:r>
+          </a:p>
+        </p:txBody>
+      </p:sp>
+      <p:sp>
+        <p:nvSpPr>
+          <p:cNvPr id="5" name="Rectangle 4"/>
           <p:cNvSpPr/>
           <p:nvPr/>
         </p:nvSpPr>
         <p:spPr>
           <a:xfrm>
-            <a:off x="685800" y="5815584"/>
-            <a:ext cx="10789920" cy="9525"/>
+            <a:off x="685800" y="2578608"/>
+            <a:ext cx="3447288" cy="20320"/>
           </a:xfrm>
           <a:prstGeom prst="rect">
             <a:avLst/>
           </a:prstGeom>
           <a:solidFill>
-            <a:srgbClr val="C9C2B4"/>
+            <a:srgbClr val="9A7B3F"/>
           </a:solidFill>
           <a:ln>
             <a:noFill/>
@@ -4528,14 +4677,14 @@
       </p:sp>
       <p:sp>
         <p:nvSpPr>
-          <p:cNvPr id="7" name="TextBox 6"/>
+          <p:cNvPr id="6" name="TextBox 5"/>
           <p:cNvSpPr txBox="1"/>
           <p:nvPr/>
         </p:nvSpPr>
         <p:spPr>
           <a:xfrm>
-            <a:off x="685800" y="5897880"/>
-            <a:ext cx="10424160" cy="731520"/>
+            <a:off x="685800" y="2633472"/>
+            <a:ext cx="3447288" cy="457200"/>
           </a:xfrm>
           <a:prstGeom prst="rect">
             <a:avLst/>
@@ -4554,51 +4703,29 @@
               </a:spcAft>
             </a:pPr>
             <a:r>
-              <a:rPr sz="1000" b="0">
-                <a:solidFill>
-                  <a:srgbClr val="6B7078"/>
-                </a:solidFill>
-                <a:latin typeface="Segoe UI"/>
-                <a:ea typeface="Microsoft YaHei"/>
-                <a:cs typeface="Microsoft YaHei"/>
-              </a:rPr>
-              <a:t>门控：产出的每一条问题都带 </a:t>
-            </a:r>
-            <a:r>
-              <a:rPr sz="1000" b="1">
+              <a:rPr sz="2200" b="1">
                 <a:solidFill>
                   <a:srgbClr val="2F6B6B"/>
                 </a:solidFill>
-                <a:latin typeface="Segoe UI"/>
-                <a:ea typeface="Microsoft YaHei"/>
-                <a:cs typeface="Microsoft YaHei"/>
-              </a:rPr>
-              <a:t>evidence</a:t>
-            </a:r>
-            <a:r>
-              <a:rPr sz="1000" b="0">
-                <a:solidFill>
-                  <a:srgbClr val="6B7078"/>
-                </a:solidFill>
-                <a:latin typeface="Segoe UI"/>
-                <a:ea typeface="Microsoft YaHei"/>
-                <a:cs typeface="Microsoft YaHei"/>
-              </a:rPr>
-              <a:t>（原文句），可逐条回原文核对。</a:t>
-            </a:r>
-          </a:p>
-        </p:txBody>
-      </p:sp>
-      <p:sp>
-        <p:nvSpPr>
-          <p:cNvPr id="8" name="TextBox 7"/>
+                <a:latin typeface="Source Han Serif SC"/>
+                <a:ea typeface="SimSun"/>
+                <a:cs typeface="SimSun"/>
+              </a:rPr>
+              <a:t>1.67</a:t>
+            </a:r>
+          </a:p>
+        </p:txBody>
+      </p:sp>
+      <p:sp>
+        <p:nvSpPr>
+          <p:cNvPr id="7" name="TextBox 6"/>
           <p:cNvSpPr txBox="1"/>
           <p:nvPr/>
         </p:nvSpPr>
         <p:spPr>
           <a:xfrm>
-            <a:off x="10424160" y="6355080"/>
-            <a:ext cx="1051560" cy="274320"/>
+            <a:off x="685800" y="3090672"/>
+            <a:ext cx="3447288" cy="548640"/>
           </a:xfrm>
           <a:prstGeom prst="rect">
             <a:avLst/>
@@ -4611,6 +4738,562 @@
           </a:bodyPr>
           <a:lstStyle/>
           <a:p>
+            <a:pPr>
+              <a:spcAft>
+                <a:spcPts val="0"/>
+              </a:spcAft>
+            </a:pPr>
+            <a:r>
+              <a:rPr sz="850" b="1">
+                <a:solidFill>
+                  <a:srgbClr val="2F6B6B"/>
+                </a:solidFill>
+                <a:latin typeface="Segoe UI"/>
+                <a:ea typeface="Microsoft YaHei"/>
+                <a:cs typeface="Microsoft YaHei"/>
+              </a:rPr>
+              <a:t>代糖吃得多 → 肾病风险高 19%</a:t>
+            </a:r>
+            <a:r>
+              <a:rPr sz="850" b="0">
+                <a:solidFill>
+                  <a:srgbClr val="6B7078"/>
+                </a:solidFill>
+                <a:latin typeface="Segoe UI"/>
+                <a:ea typeface="Microsoft YaHei"/>
+                <a:cs typeface="Microsoft YaHei"/>
+              </a:rPr>
+              <a:t>
+要有中等强度隐藏因素才能推翻：站得住</a:t>
+            </a:r>
+          </a:p>
+        </p:txBody>
+      </p:sp>
+      <p:sp>
+        <p:nvSpPr>
+          <p:cNvPr id="8" name="Rectangle 7"/>
+          <p:cNvSpPr/>
+          <p:nvPr/>
+        </p:nvSpPr>
+        <p:spPr>
+          <a:xfrm>
+            <a:off x="4370832" y="2578608"/>
+            <a:ext cx="3447288" cy="20320"/>
+          </a:xfrm>
+          <a:prstGeom prst="rect">
+            <a:avLst/>
+          </a:prstGeom>
+          <a:solidFill>
+            <a:srgbClr val="9A7B3F"/>
+          </a:solidFill>
+          <a:ln>
+            <a:noFill/>
+          </a:ln>
+          <a:effectLst/>
+        </p:spPr>
+        <p:style>
+          <a:lnRef idx="1">
+            <a:schemeClr val="accent1"/>
+          </a:lnRef>
+          <a:fillRef idx="3">
+            <a:schemeClr val="accent1"/>
+          </a:fillRef>
+          <a:effectRef idx="2">
+            <a:schemeClr val="accent1"/>
+          </a:effectRef>
+          <a:fontRef idx="minor">
+            <a:schemeClr val="lt1"/>
+          </a:fontRef>
+        </p:style>
+        <p:txBody>
+          <a:bodyPr rtlCol="0" anchor="ctr"/>
+          <a:lstStyle/>
+          <a:p>
+            <a:pPr algn="ctr"/>
+          </a:p>
+        </p:txBody>
+      </p:sp>
+      <p:sp>
+        <p:nvSpPr>
+          <p:cNvPr id="9" name="TextBox 8"/>
+          <p:cNvSpPr txBox="1"/>
+          <p:nvPr/>
+        </p:nvSpPr>
+        <p:spPr>
+          <a:xfrm>
+            <a:off x="4370832" y="2633472"/>
+            <a:ext cx="3447288" cy="457200"/>
+          </a:xfrm>
+          <a:prstGeom prst="rect">
+            <a:avLst/>
+          </a:prstGeom>
+          <a:noFill/>
+        </p:spPr>
+        <p:txBody>
+          <a:bodyPr wrap="square">
+            <a:spAutoFit/>
+          </a:bodyPr>
+          <a:lstStyle/>
+          <a:p>
+            <a:pPr>
+              <a:spcAft>
+                <a:spcPts val="0"/>
+              </a:spcAft>
+            </a:pPr>
+            <a:r>
+              <a:rPr sz="2200" b="1">
+                <a:solidFill>
+                  <a:srgbClr val="2F6B6B"/>
+                </a:solidFill>
+                <a:latin typeface="Source Han Serif SC"/>
+                <a:ea typeface="SimSun"/>
+                <a:cs typeface="SimSun"/>
+              </a:rPr>
+              <a:t>2.34</a:t>
+            </a:r>
+          </a:p>
+        </p:txBody>
+      </p:sp>
+      <p:sp>
+        <p:nvSpPr>
+          <p:cNvPr id="10" name="TextBox 9"/>
+          <p:cNvSpPr txBox="1"/>
+          <p:nvPr/>
+        </p:nvSpPr>
+        <p:spPr>
+          <a:xfrm>
+            <a:off x="4370832" y="3090672"/>
+            <a:ext cx="3447288" cy="548640"/>
+          </a:xfrm>
+          <a:prstGeom prst="rect">
+            <a:avLst/>
+          </a:prstGeom>
+          <a:noFill/>
+        </p:spPr>
+        <p:txBody>
+          <a:bodyPr wrap="square">
+            <a:spAutoFit/>
+          </a:bodyPr>
+          <a:lstStyle/>
+          <a:p>
+            <a:pPr>
+              <a:spcAft>
+                <a:spcPts val="0"/>
+              </a:spcAft>
+            </a:pPr>
+            <a:r>
+              <a:rPr sz="850" b="1">
+                <a:solidFill>
+                  <a:srgbClr val="2F6B6B"/>
+                </a:solidFill>
+                <a:latin typeface="Segoe UI"/>
+                <a:ea typeface="Microsoft YaHei"/>
+                <a:cs typeface="Microsoft YaHei"/>
+              </a:rPr>
+              <a:t>代糖多 + 遗传风险高 → 高 49%</a:t>
+            </a:r>
+            <a:r>
+              <a:rPr sz="850" b="0">
+                <a:solidFill>
+                  <a:srgbClr val="6B7078"/>
+                </a:solidFill>
+                <a:latin typeface="Segoe UI"/>
+                <a:ea typeface="Microsoft YaHei"/>
+                <a:cs typeface="Microsoft YaHei"/>
+              </a:rPr>
+              <a:t>
+现实里很少有这么强的因素：</a:t>
+            </a:r>
+            <a:r>
+              <a:rPr sz="850" b="1">
+                <a:solidFill>
+                  <a:srgbClr val="2F6B6B"/>
+                </a:solidFill>
+                <a:latin typeface="Segoe UI"/>
+                <a:ea typeface="Microsoft YaHei"/>
+                <a:cs typeface="Microsoft YaHei"/>
+              </a:rPr>
+              <a:t>最稳</a:t>
+            </a:r>
+          </a:p>
+        </p:txBody>
+      </p:sp>
+      <p:sp>
+        <p:nvSpPr>
+          <p:cNvPr id="11" name="Rectangle 10"/>
+          <p:cNvSpPr/>
+          <p:nvPr/>
+        </p:nvSpPr>
+        <p:spPr>
+          <a:xfrm>
+            <a:off x="8055864" y="2578608"/>
+            <a:ext cx="3447288" cy="20320"/>
+          </a:xfrm>
+          <a:prstGeom prst="rect">
+            <a:avLst/>
+          </a:prstGeom>
+          <a:solidFill>
+            <a:srgbClr val="9A7B3F"/>
+          </a:solidFill>
+          <a:ln>
+            <a:noFill/>
+          </a:ln>
+          <a:effectLst/>
+        </p:spPr>
+        <p:style>
+          <a:lnRef idx="1">
+            <a:schemeClr val="accent1"/>
+          </a:lnRef>
+          <a:fillRef idx="3">
+            <a:schemeClr val="accent1"/>
+          </a:fillRef>
+          <a:effectRef idx="2">
+            <a:schemeClr val="accent1"/>
+          </a:effectRef>
+          <a:fontRef idx="minor">
+            <a:schemeClr val="lt1"/>
+          </a:fontRef>
+        </p:style>
+        <p:txBody>
+          <a:bodyPr rtlCol="0" anchor="ctr"/>
+          <a:lstStyle/>
+          <a:p>
+            <a:pPr algn="ctr"/>
+          </a:p>
+        </p:txBody>
+      </p:sp>
+      <p:sp>
+        <p:nvSpPr>
+          <p:cNvPr id="12" name="TextBox 11"/>
+          <p:cNvSpPr txBox="1"/>
+          <p:nvPr/>
+        </p:nvSpPr>
+        <p:spPr>
+          <a:xfrm>
+            <a:off x="8055864" y="2633472"/>
+            <a:ext cx="3447288" cy="457200"/>
+          </a:xfrm>
+          <a:prstGeom prst="rect">
+            <a:avLst/>
+          </a:prstGeom>
+          <a:noFill/>
+        </p:spPr>
+        <p:txBody>
+          <a:bodyPr wrap="square">
+            <a:spAutoFit/>
+          </a:bodyPr>
+          <a:lstStyle/>
+          <a:p>
+            <a:pPr>
+              <a:spcAft>
+                <a:spcPts val="0"/>
+              </a:spcAft>
+            </a:pPr>
+            <a:r>
+              <a:rPr sz="2200" b="1">
+                <a:solidFill>
+                  <a:srgbClr val="B03A2E"/>
+                </a:solidFill>
+                <a:latin typeface="Source Han Serif SC"/>
+                <a:ea typeface="SimSun"/>
+                <a:cs typeface="SimSun"/>
+              </a:rPr>
+              <a:t>1.16</a:t>
+            </a:r>
+          </a:p>
+        </p:txBody>
+      </p:sp>
+      <p:sp>
+        <p:nvSpPr>
+          <p:cNvPr id="13" name="TextBox 12"/>
+          <p:cNvSpPr txBox="1"/>
+          <p:nvPr/>
+        </p:nvSpPr>
+        <p:spPr>
+          <a:xfrm>
+            <a:off x="8055864" y="3090672"/>
+            <a:ext cx="3447288" cy="548640"/>
+          </a:xfrm>
+          <a:prstGeom prst="rect">
+            <a:avLst/>
+          </a:prstGeom>
+          <a:noFill/>
+        </p:spPr>
+        <p:txBody>
+          <a:bodyPr wrap="square">
+            <a:spAutoFit/>
+          </a:bodyPr>
+          <a:lstStyle/>
+          <a:p>
+            <a:pPr>
+              <a:spcAft>
+                <a:spcPts val="0"/>
+              </a:spcAft>
+            </a:pPr>
+            <a:r>
+              <a:rPr sz="850" b="1">
+                <a:solidFill>
+                  <a:srgbClr val="2F6B6B"/>
+                </a:solidFill>
+                <a:latin typeface="Segoe UI"/>
+                <a:ea typeface="Microsoft YaHei"/>
+                <a:cs typeface="Microsoft YaHei"/>
+              </a:rPr>
+              <a:t>用代糖替代糖 → 高 2%</a:t>
+            </a:r>
+            <a:r>
+              <a:rPr sz="850" b="0">
+                <a:solidFill>
+                  <a:srgbClr val="6B7078"/>
+                </a:solidFill>
+                <a:latin typeface="Segoe UI"/>
+                <a:ea typeface="Microsoft YaHei"/>
+                <a:cs typeface="Microsoft YaHei"/>
+              </a:rPr>
+              <a:t>
+微弱偏差就能推翻：</a:t>
+            </a:r>
+            <a:r>
+              <a:rPr sz="850" b="1">
+                <a:solidFill>
+                  <a:srgbClr val="2F6B6B"/>
+                </a:solidFill>
+                <a:latin typeface="Segoe UI"/>
+                <a:ea typeface="Microsoft YaHei"/>
+                <a:cs typeface="Microsoft YaHei"/>
+              </a:rPr>
+              <a:t>几乎站不住</a:t>
+            </a:r>
+          </a:p>
+        </p:txBody>
+      </p:sp>
+      <p:pic>
+        <p:nvPicPr>
+          <p:cNvPr id="14" name="Picture 13" descr="fig_evalue.png"/>
+          <p:cNvPicPr>
+            <a:picLocks noChangeAspect="1"/>
+          </p:cNvPicPr>
+          <p:nvPr/>
+        </p:nvPicPr>
+        <p:blipFill>
+          <a:blip r:embed="rId2"/>
+          <a:stretch>
+            <a:fillRect/>
+          </a:stretch>
+        </p:blipFill>
+        <p:spPr>
+          <a:xfrm>
+            <a:off x="4642229" y="3749040"/>
+            <a:ext cx="2904494" cy="1444752"/>
+          </a:xfrm>
+          <a:prstGeom prst="rect">
+            <a:avLst/>
+          </a:prstGeom>
+        </p:spPr>
+      </p:pic>
+      <p:sp>
+        <p:nvSpPr>
+          <p:cNvPr id="15" name="TextBox 14"/>
+          <p:cNvSpPr txBox="1"/>
+          <p:nvPr/>
+        </p:nvSpPr>
+        <p:spPr>
+          <a:xfrm>
+            <a:off x="685800" y="5266944"/>
+            <a:ext cx="10817352" cy="457200"/>
+          </a:xfrm>
+          <a:prstGeom prst="rect">
+            <a:avLst/>
+          </a:prstGeom>
+          <a:noFill/>
+        </p:spPr>
+        <p:txBody>
+          <a:bodyPr wrap="square">
+            <a:spAutoFit/>
+          </a:bodyPr>
+          <a:lstStyle/>
+          <a:p>
+            <a:pPr>
+              <a:spcAft>
+                <a:spcPts val="0"/>
+              </a:spcAft>
+            </a:pPr>
+            <a:r>
+              <a:rPr sz="900" b="0">
+                <a:solidFill>
+                  <a:srgbClr val="6B7078"/>
+                </a:solidFill>
+                <a:latin typeface="Segoe UI"/>
+                <a:ea typeface="Microsoft YaHei"/>
+                <a:cs typeface="Microsoft YaHei"/>
+              </a:rPr>
+              <a:t>条形越长 = 越难推翻 = 结论越稳；原点 1 表示「隐藏因素毫无作用」。红色虚线（1.5）以下为脆弱区；黑色短竖线是按 95% CI </a:t>
+            </a:r>
+            <a:r>
+              <a:rPr sz="900" b="1">
+                <a:solidFill>
+                  <a:srgbClr val="2F6B6B"/>
+                </a:solidFill>
+                <a:latin typeface="Segoe UI"/>
+                <a:ea typeface="Microsoft YaHei"/>
+                <a:cs typeface="Microsoft YaHei"/>
+              </a:rPr>
+              <a:t>下界</a:t>
+            </a:r>
+            <a:r>
+              <a:rPr sz="900" b="0">
+                <a:solidFill>
+                  <a:srgbClr val="6B7078"/>
+                </a:solidFill>
+                <a:latin typeface="Segoe UI"/>
+                <a:ea typeface="Microsoft YaHei"/>
+                <a:cs typeface="Microsoft YaHei"/>
+              </a:rPr>
+              <a:t>重算的保守读数。</a:t>
+            </a:r>
+          </a:p>
+        </p:txBody>
+      </p:sp>
+      <p:sp>
+        <p:nvSpPr>
+          <p:cNvPr id="16" name="Rectangle 15"/>
+          <p:cNvSpPr/>
+          <p:nvPr/>
+        </p:nvSpPr>
+        <p:spPr>
+          <a:xfrm>
+            <a:off x="685800" y="5815584"/>
+            <a:ext cx="10789920" cy="9525"/>
+          </a:xfrm>
+          <a:prstGeom prst="rect">
+            <a:avLst/>
+          </a:prstGeom>
+          <a:solidFill>
+            <a:srgbClr val="C9C2B4"/>
+          </a:solidFill>
+          <a:ln>
+            <a:noFill/>
+          </a:ln>
+          <a:effectLst/>
+        </p:spPr>
+        <p:style>
+          <a:lnRef idx="1">
+            <a:schemeClr val="accent1"/>
+          </a:lnRef>
+          <a:fillRef idx="3">
+            <a:schemeClr val="accent1"/>
+          </a:fillRef>
+          <a:effectRef idx="2">
+            <a:schemeClr val="accent1"/>
+          </a:effectRef>
+          <a:fontRef idx="minor">
+            <a:schemeClr val="lt1"/>
+          </a:fontRef>
+        </p:style>
+        <p:txBody>
+          <a:bodyPr rtlCol="0" anchor="ctr"/>
+          <a:lstStyle/>
+          <a:p>
+            <a:pPr algn="ctr"/>
+          </a:p>
+        </p:txBody>
+      </p:sp>
+      <p:sp>
+        <p:nvSpPr>
+          <p:cNvPr id="17" name="TextBox 16"/>
+          <p:cNvSpPr txBox="1"/>
+          <p:nvPr/>
+        </p:nvSpPr>
+        <p:spPr>
+          <a:xfrm>
+            <a:off x="685800" y="5897880"/>
+            <a:ext cx="10424160" cy="731520"/>
+          </a:xfrm>
+          <a:prstGeom prst="rect">
+            <a:avLst/>
+          </a:prstGeom>
+          <a:noFill/>
+        </p:spPr>
+        <p:txBody>
+          <a:bodyPr wrap="square">
+            <a:spAutoFit/>
+          </a:bodyPr>
+          <a:lstStyle/>
+          <a:p>
+            <a:pPr>
+              <a:spcAft>
+                <a:spcPts val="0"/>
+              </a:spcAft>
+            </a:pPr>
+            <a:r>
+              <a:rPr sz="1000" b="1">
+                <a:solidFill>
+                  <a:srgbClr val="2F6B6B"/>
+                </a:solidFill>
+                <a:latin typeface="Segoe UI"/>
+                <a:ea typeface="Microsoft YaHei"/>
+                <a:cs typeface="Microsoft YaHei"/>
+              </a:rPr>
+              <a:t>原文中 “E-value” 出现 0 次</a:t>
+            </a:r>
+            <a:r>
+              <a:rPr sz="1000" b="0">
+                <a:solidFill>
+                  <a:srgbClr val="6B7078"/>
+                </a:solidFill>
+                <a:latin typeface="Segoe UI"/>
+                <a:ea typeface="Microsoft YaHei"/>
+                <a:cs typeface="Microsoft YaHei"/>
+              </a:rPr>
+              <a:t>——这三个数是机器用论文自报的 HR/CI 算出来的。纪律：这是</a:t>
+            </a:r>
+            <a:r>
+              <a:rPr sz="1000" b="1">
+                <a:solidFill>
+                  <a:srgbClr val="2F6B6B"/>
+                </a:solidFill>
+                <a:latin typeface="Segoe UI"/>
+                <a:ea typeface="Microsoft YaHei"/>
+                <a:cs typeface="Microsoft YaHei"/>
+              </a:rPr>
+              <a:t>门槛，不是结论</a:t>
+            </a:r>
+            <a:r>
+              <a:rPr sz="1000" b="0">
+                <a:solidFill>
+                  <a:srgbClr val="6B7078"/>
+                </a:solidFill>
+                <a:latin typeface="Segoe UI"/>
+                <a:ea typeface="Microsoft YaHei"/>
+                <a:cs typeface="Microsoft YaHei"/>
+              </a:rPr>
+              <a:t>，也推不出任何饮食或用药建议。</a:t>
+            </a:r>
+          </a:p>
+        </p:txBody>
+      </p:sp>
+      <p:sp>
+        <p:nvSpPr>
+          <p:cNvPr id="18" name="TextBox 17"/>
+          <p:cNvSpPr txBox="1"/>
+          <p:nvPr/>
+        </p:nvSpPr>
+        <p:spPr>
+          <a:xfrm>
+            <a:off x="10424160" y="6355080"/>
+            <a:ext cx="1051560" cy="274320"/>
+          </a:xfrm>
+          <a:prstGeom prst="rect">
+            <a:avLst/>
+          </a:prstGeom>
+          <a:noFill/>
+        </p:spPr>
+        <p:txBody>
+          <a:bodyPr wrap="square">
+            <a:spAutoFit/>
+          </a:bodyPr>
+          <a:lstStyle/>
+          <a:p>
             <a:pPr algn="r">
               <a:spcAft>
                 <a:spcPts val="0"/>
@@ -4625,7 +5308,7 @@
                 <a:ea typeface="Microsoft YaHei"/>
                 <a:cs typeface="Microsoft YaHei"/>
               </a:rPr>
-              <a:t>11 / 24</a:t>
+              <a:t>11 / 26</a:t>
             </a:r>
           </a:p>
         </p:txBody>
@@ -4692,7 +5375,7 @@
                 <a:ea typeface="Microsoft YaHei"/>
                 <a:cs typeface="Microsoft YaHei"/>
               </a:rPr>
-              <a:t>三、dao 模型在生物医学的实践</a:t>
+              <a:t>二、在生物医学的实践 · 真实使用</a:t>
             </a:r>
           </a:p>
         </p:txBody>
@@ -4733,7 +5416,7 @@
                 <a:ea typeface="SimSun"/>
                 <a:cs typeface="SimSun"/>
               </a:rPr>
-              <a:t>dao-v 0.3：一个专门用来提问的微调模型</a:t>
+              <a:t>真实跑一遍：命令与产物</a:t>
             </a:r>
           </a:p>
         </p:txBody>
@@ -4766,6 +5449,17 @@
               </a:spcAft>
             </a:pPr>
             <a:r>
+              <a:rPr sz="1200" b="0">
+                <a:solidFill>
+                  <a:srgbClr val="4A4F57"/>
+                </a:solidFill>
+                <a:latin typeface="Segoe UI"/>
+                <a:ea typeface="Microsoft YaHei"/>
+                <a:cs typeface="Microsoft YaHei"/>
+              </a:rPr>
+              <a:t>下面是</a:t>
+            </a:r>
+            <a:r>
               <a:rPr sz="1200" b="1">
                 <a:solidFill>
                   <a:srgbClr val="2F6B6B"/>
@@ -4774,7 +5468,7 @@
                 <a:ea typeface="Microsoft YaHei"/>
                 <a:cs typeface="Microsoft YaHei"/>
               </a:rPr>
-              <a:t>v0.3 = v0.2 + RFT 后训练</a:t>
+              <a:t>真实命令序列与未删改的输出</a:t>
             </a:r>
             <a:r>
               <a:rPr sz="1200" b="0">
@@ -4785,7 +5479,7 @@
                 <a:ea typeface="Microsoft YaHei"/>
                 <a:cs typeface="Microsoft YaHei"/>
               </a:rPr>
-              <a:t>（low-lr 训练 + LLM-as-judge 过滤数据）。它的任务不是回答问题，而是</a:t>
+              <a:t>（不是示意）。产物固定落在 </a:t>
             </a:r>
             <a:r>
               <a:rPr sz="1200" b="1">
@@ -4796,7 +5490,7 @@
                 <a:ea typeface="Microsoft YaHei"/>
                 <a:cs typeface="Microsoft YaHei"/>
               </a:rPr>
-              <a:t>从论文证据、方法局限与结果细节中，提出作者没有明说、但值得进一步探究的开放科学问题</a:t>
+              <a:t>--out</a:t>
             </a:r>
             <a:r>
               <a:rPr sz="1200" b="0">
@@ -4807,14 +5501,58 @@
                 <a:ea typeface="Microsoft YaHei"/>
                 <a:cs typeface="Microsoft YaHei"/>
               </a:rPr>
-              <a:t>。目前领域限制于生物医学。</a:t>
+              <a:t> 目录：</a:t>
+            </a:r>
+            <a:r>
+              <a:rPr sz="1200" b="1">
+                <a:solidFill>
+                  <a:srgbClr val="2F6B6B"/>
+                </a:solidFill>
+                <a:latin typeface="Segoe UI"/>
+                <a:ea typeface="Microsoft YaHei"/>
+                <a:cs typeface="Microsoft YaHei"/>
+              </a:rPr>
+              <a:t>problems_*.json</a:t>
+            </a:r>
+            <a:r>
+              <a:rPr sz="1200" b="0">
+                <a:solidFill>
+                  <a:srgbClr val="4A4F57"/>
+                </a:solidFill>
+                <a:latin typeface="Segoe UI"/>
+                <a:ea typeface="Microsoft YaHei"/>
+                <a:cs typeface="Microsoft YaHei"/>
+              </a:rPr>
+              <a:t> + </a:t>
+            </a:r>
+            <a:r>
+              <a:rPr sz="1200" b="1">
+                <a:solidFill>
+                  <a:srgbClr val="2F6B6B"/>
+                </a:solidFill>
+                <a:latin typeface="Segoe UI"/>
+                <a:ea typeface="Microsoft YaHei"/>
+                <a:cs typeface="Microsoft YaHei"/>
+              </a:rPr>
+              <a:t>REPORT.md</a:t>
+            </a:r>
+            <a:r>
+              <a:rPr sz="1200" b="0">
+                <a:solidFill>
+                  <a:srgbClr val="4A4F57"/>
+                </a:solidFill>
+                <a:latin typeface="Segoe UI"/>
+                <a:ea typeface="Microsoft YaHei"/>
+                <a:cs typeface="Microsoft YaHei"/>
+              </a:rPr>
+              <a:t>。</a:t>
             </a:r>
           </a:p>
         </p:txBody>
       </p:sp>
       <p:pic>
         <p:nvPicPr>
-          <p:cNvPr id="5" name="Picture 4" descr="user_model_studio.png"/>
+          <p:cNvPr id="5" name="Picture 4" descr="t1-fetch.png"/>
           <p:cNvPicPr>
             <a:picLocks noChangeAspect="1"/>
           </p:cNvPicPr>
@@ -4828,8 +5566,8 @@
         </p:blipFill>
         <p:spPr>
           <a:xfrm>
-            <a:off x="4332897" y="2670048"/>
-            <a:ext cx="3523158" cy="2414016"/>
+            <a:off x="685800" y="2670048"/>
+            <a:ext cx="2553462" cy="785514"/>
           </a:xfrm>
           <a:prstGeom prst="rect">
             <a:avLst/>
@@ -4844,8 +5582,8 @@
         </p:nvSpPr>
         <p:spPr>
           <a:xfrm>
-            <a:off x="685800" y="5175504"/>
-            <a:ext cx="10817352" cy="548640"/>
+            <a:off x="685800" y="3510426"/>
+            <a:ext cx="2553462" cy="457200"/>
           </a:xfrm>
           <a:prstGeom prst="rect">
             <a:avLst/>
@@ -4864,7 +5602,7 @@
               </a:spcAft>
             </a:pPr>
             <a:r>
-              <a:rPr sz="900" b="0">
+              <a:rPr sz="850" b="0">
                 <a:solidFill>
                   <a:srgbClr val="6B7078"/>
                 </a:solidFill>
@@ -4872,10 +5610,10 @@
                 <a:ea typeface="Microsoft YaHei"/>
                 <a:cs typeface="Microsoft YaHei"/>
               </a:rPr>
-              <a:t>ModelScope studio 上的</a:t>
-            </a:r>
-            <a:r>
-              <a:rPr sz="900" b="1">
+              <a:t>① 取论文：</a:t>
+            </a:r>
+            <a:r>
+              <a:rPr sz="850" b="1">
                 <a:solidFill>
                   <a:srgbClr val="2F6B6B"/>
                 </a:solidFill>
@@ -4883,10 +5621,10 @@
                 <a:ea typeface="Microsoft YaHei"/>
                 <a:cs typeface="Microsoft YaHei"/>
               </a:rPr>
-              <a:t>真实运行界面</a:t>
-            </a:r>
-            <a:r>
-              <a:rPr sz="900" b="0">
+              <a:t>data fetch</a:t>
+            </a:r>
+            <a:r>
+              <a:rPr sz="850" b="0">
                 <a:solidFill>
                   <a:srgbClr val="6B7078"/>
                 </a:solidFill>
@@ -4894,14 +5632,242 @@
                 <a:ea typeface="Microsoft YaHei"/>
                 <a:cs typeface="Microsoft YaHei"/>
               </a:rPr>
-              <a:t>（Ask-Dao v0.3 · 生物医学知识发现机器）：左侧是论文的摘要 / 讨论 / 结论，右侧是模型现场生成的候选问题，底部可调候选数量与 temperature。</a:t>
-            </a:r>
-          </a:p>
-        </p:txBody>
-      </p:sp>
-      <p:sp>
-        <p:nvSpPr>
-          <p:cNvPr id="7" name="Rectangle 6"/>
+              <a:t> 从 Europe PMC 拉开放获取全文</a:t>
+            </a:r>
+          </a:p>
+        </p:txBody>
+      </p:sp>
+      <p:pic>
+        <p:nvPicPr>
+          <p:cNvPr id="7" name="Picture 6" descr="t2-run.png"/>
+          <p:cNvPicPr>
+            <a:picLocks noChangeAspect="1"/>
+          </p:cNvPicPr>
+          <p:nvPr/>
+        </p:nvPicPr>
+        <p:blipFill>
+          <a:blip r:embed="rId3"/>
+          <a:stretch>
+            <a:fillRect/>
+          </a:stretch>
+        </p:blipFill>
+        <p:spPr>
+          <a:xfrm>
+            <a:off x="3440430" y="2670048"/>
+            <a:ext cx="2553462" cy="445773"/>
+          </a:xfrm>
+          <a:prstGeom prst="rect">
+            <a:avLst/>
+          </a:prstGeom>
+        </p:spPr>
+      </p:pic>
+      <p:sp>
+        <p:nvSpPr>
+          <p:cNvPr id="8" name="TextBox 7"/>
+          <p:cNvSpPr txBox="1"/>
+          <p:nvPr/>
+        </p:nvSpPr>
+        <p:spPr>
+          <a:xfrm>
+            <a:off x="3440430" y="3170685"/>
+            <a:ext cx="2553462" cy="457200"/>
+          </a:xfrm>
+          <a:prstGeom prst="rect">
+            <a:avLst/>
+          </a:prstGeom>
+          <a:noFill/>
+        </p:spPr>
+        <p:txBody>
+          <a:bodyPr wrap="square">
+            <a:spAutoFit/>
+          </a:bodyPr>
+          <a:lstStyle/>
+          <a:p>
+            <a:pPr>
+              <a:spcAft>
+                <a:spcPts val="0"/>
+              </a:spcAft>
+            </a:pPr>
+            <a:r>
+              <a:rPr sz="850" b="0">
+                <a:solidFill>
+                  <a:srgbClr val="6B7078"/>
+                </a:solidFill>
+                <a:latin typeface="Segoe UI"/>
+                <a:ea typeface="Microsoft YaHei"/>
+                <a:cs typeface="Microsoft YaHei"/>
+              </a:rPr>
+              <a:t>② 跑批：</a:t>
+            </a:r>
+            <a:r>
+              <a:rPr sz="850" b="1">
+                <a:solidFill>
+                  <a:srgbClr val="2F6B6B"/>
+                </a:solidFill>
+                <a:latin typeface="Segoe UI"/>
+                <a:ea typeface="Microsoft YaHei"/>
+                <a:cs typeface="Microsoft YaHei"/>
+              </a:rPr>
+              <a:t>paper … --domain biomed</a:t>
+            </a:r>
+          </a:p>
+        </p:txBody>
+      </p:sp>
+      <p:pic>
+        <p:nvPicPr>
+          <p:cNvPr id="9" name="Picture 8" descr="t3-items.png"/>
+          <p:cNvPicPr>
+            <a:picLocks noChangeAspect="1"/>
+          </p:cNvPicPr>
+          <p:nvPr/>
+        </p:nvPicPr>
+        <p:blipFill>
+          <a:blip r:embed="rId4"/>
+          <a:stretch>
+            <a:fillRect/>
+          </a:stretch>
+        </p:blipFill>
+        <p:spPr>
+          <a:xfrm>
+            <a:off x="6195060" y="2670048"/>
+            <a:ext cx="1406920" cy="2432304"/>
+          </a:xfrm>
+          <a:prstGeom prst="rect">
+            <a:avLst/>
+          </a:prstGeom>
+        </p:spPr>
+      </p:pic>
+      <p:sp>
+        <p:nvSpPr>
+          <p:cNvPr id="10" name="TextBox 9"/>
+          <p:cNvSpPr txBox="1"/>
+          <p:nvPr/>
+        </p:nvSpPr>
+        <p:spPr>
+          <a:xfrm>
+            <a:off x="6195060" y="5157216"/>
+            <a:ext cx="2553462" cy="457200"/>
+          </a:xfrm>
+          <a:prstGeom prst="rect">
+            <a:avLst/>
+          </a:prstGeom>
+          <a:noFill/>
+        </p:spPr>
+        <p:txBody>
+          <a:bodyPr wrap="square">
+            <a:spAutoFit/>
+          </a:bodyPr>
+          <a:lstStyle/>
+          <a:p>
+            <a:pPr>
+              <a:spcAft>
+                <a:spcPts val="0"/>
+              </a:spcAft>
+            </a:pPr>
+            <a:r>
+              <a:rPr sz="850" b="0">
+                <a:solidFill>
+                  <a:srgbClr val="6B7078"/>
+                </a:solidFill>
+                <a:latin typeface="Segoe UI"/>
+                <a:ea typeface="Microsoft YaHei"/>
+                <a:cs typeface="Microsoft YaHei"/>
+              </a:rPr>
+              <a:t>③ 逐条问题：带原文证据句 + 判定路由</a:t>
+            </a:r>
+          </a:p>
+        </p:txBody>
+      </p:sp>
+      <p:pic>
+        <p:nvPicPr>
+          <p:cNvPr id="11" name="Picture 10" descr="t4-report.png"/>
+          <p:cNvPicPr>
+            <a:picLocks noChangeAspect="1"/>
+          </p:cNvPicPr>
+          <p:nvPr/>
+        </p:nvPicPr>
+        <p:blipFill>
+          <a:blip r:embed="rId5"/>
+          <a:stretch>
+            <a:fillRect/>
+          </a:stretch>
+        </p:blipFill>
+        <p:spPr>
+          <a:xfrm>
+            <a:off x="8949690" y="2670048"/>
+            <a:ext cx="1712481" cy="2432304"/>
+          </a:xfrm>
+          <a:prstGeom prst="rect">
+            <a:avLst/>
+          </a:prstGeom>
+        </p:spPr>
+      </p:pic>
+      <p:sp>
+        <p:nvSpPr>
+          <p:cNvPr id="12" name="TextBox 11"/>
+          <p:cNvSpPr txBox="1"/>
+          <p:nvPr/>
+        </p:nvSpPr>
+        <p:spPr>
+          <a:xfrm>
+            <a:off x="8949690" y="5157216"/>
+            <a:ext cx="2553462" cy="457200"/>
+          </a:xfrm>
+          <a:prstGeom prst="rect">
+            <a:avLst/>
+          </a:prstGeom>
+          <a:noFill/>
+        </p:spPr>
+        <p:txBody>
+          <a:bodyPr wrap="square">
+            <a:spAutoFit/>
+          </a:bodyPr>
+          <a:lstStyle/>
+          <a:p>
+            <a:pPr>
+              <a:spcAft>
+                <a:spcPts val="0"/>
+              </a:spcAft>
+            </a:pPr>
+            <a:r>
+              <a:rPr sz="850" b="0">
+                <a:solidFill>
+                  <a:srgbClr val="6B7078"/>
+                </a:solidFill>
+                <a:latin typeface="Segoe UI"/>
+                <a:ea typeface="Microsoft YaHei"/>
+                <a:cs typeface="Microsoft YaHei"/>
+              </a:rPr>
+              <a:t>④ 汇总：</a:t>
+            </a:r>
+            <a:r>
+              <a:rPr sz="850" b="1">
+                <a:solidFill>
+                  <a:srgbClr val="2F6B6B"/>
+                </a:solidFill>
+                <a:latin typeface="Segoe UI"/>
+                <a:ea typeface="Microsoft YaHei"/>
+                <a:cs typeface="Microsoft YaHei"/>
+              </a:rPr>
+              <a:t>REPORT.md</a:t>
+            </a:r>
+            <a:r>
+              <a:rPr sz="850" b="0">
+                <a:solidFill>
+                  <a:srgbClr val="6B7078"/>
+                </a:solidFill>
+                <a:latin typeface="Segoe UI"/>
+                <a:ea typeface="Microsoft YaHei"/>
+                <a:cs typeface="Microsoft YaHei"/>
+              </a:rPr>
+              <a:t> 一页人话</a:t>
+            </a:r>
+          </a:p>
+        </p:txBody>
+      </p:sp>
+      <p:sp>
+        <p:nvSpPr>
+          <p:cNvPr id="13" name="Rectangle 12"/>
           <p:cNvSpPr/>
           <p:nvPr/>
         </p:nvSpPr>
@@ -4945,7 +5911,7 @@
       </p:sp>
       <p:sp>
         <p:nvSpPr>
-          <p:cNvPr id="8" name="TextBox 7"/>
+          <p:cNvPr id="14" name="TextBox 13"/>
           <p:cNvSpPr txBox="1"/>
           <p:nvPr/>
         </p:nvSpPr>
@@ -4979,7 +5945,7 @@
                 <a:ea typeface="Microsoft YaHei"/>
                 <a:cs typeface="Microsoft YaHei"/>
               </a:rPr>
-              <a:t>地址：</a:t>
+              <a:t>完整回放与逐条证据句见手册：</a:t>
             </a:r>
             <a:r>
               <a:rPr sz="1000" b="1">
@@ -4990,7 +5956,7 @@
                 <a:ea typeface="Microsoft YaHei"/>
                 <a:cs typeface="Microsoft YaHei"/>
               </a:rPr>
-              <a:t>modelscope.cn/studios/skopskp/dao-v-0.3</a:t>
+              <a:t>docs/guide/demo-biomed.md</a:t>
             </a:r>
             <a:r>
               <a:rPr sz="1000" b="0">
@@ -5001,14 +5967,14 @@
                 <a:ea typeface="Microsoft YaHei"/>
                 <a:cs typeface="Microsoft YaHei"/>
               </a:rPr>
-              <a:t>。当前跑在免费 CPU 模式（每次生成约 30–90 秒），所以界面上把候选数调小。</a:t>
-            </a:r>
-          </a:p>
-        </p:txBody>
-      </p:sp>
-      <p:sp>
-        <p:nvSpPr>
-          <p:cNvPr id="9" name="TextBox 8"/>
+              <a:t>。</a:t>
+            </a:r>
+          </a:p>
+        </p:txBody>
+      </p:sp>
+      <p:sp>
+        <p:nvSpPr>
+          <p:cNvPr id="15" name="TextBox 14"/>
           <p:cNvSpPr txBox="1"/>
           <p:nvPr/>
         </p:nvSpPr>
@@ -5042,7 +6008,7 @@
                 <a:ea typeface="Microsoft YaHei"/>
                 <a:cs typeface="Microsoft YaHei"/>
               </a:rPr>
-              <a:t>12 / 24</a:t>
+              <a:t>12 / 26</a:t>
             </a:r>
           </a:p>
         </p:txBody>
@@ -5109,7 +6075,7 @@
                 <a:ea typeface="Microsoft YaHei"/>
                 <a:cs typeface="Microsoft YaHei"/>
               </a:rPr>
-              <a:t>三、dao 模型在生物医学的实践 · 它产出的问题</a:t>
+              <a:t>二、在生物医学的实践 · 经验</a:t>
             </a:r>
           </a:p>
         </p:txBody>
@@ -5150,7 +6116,7 @@
                 <a:ea typeface="SimSun"/>
                 <a:cs typeface="SimSun"/>
               </a:rPr>
-              <a:t>模型现场生成的三个问题（原句）</a:t>
+              <a:t>这次实践学到的三件事</a:t>
             </a:r>
           </a:p>
         </p:txBody>
@@ -5191,29 +6157,7 @@
                 <a:ea typeface="Microsoft YaHei"/>
                 <a:cs typeface="Microsoft YaHei"/>
               </a:rPr>
-              <a:t>同一个输入（就是上一篇论文的摘要 / 讨论 / 结论），模型给出的候选问题——</a:t>
-            </a:r>
-            <a:r>
-              <a:rPr sz="1200" b="1">
-                <a:solidFill>
-                  <a:srgbClr val="2F6B6B"/>
-                </a:solidFill>
-                <a:latin typeface="Segoe UI"/>
-                <a:ea typeface="Microsoft YaHei"/>
-                <a:cs typeface="Microsoft YaHei"/>
-              </a:rPr>
-              <a:t>注意它们都是问句，而且是原文没问过的</a:t>
-            </a:r>
-            <a:r>
-              <a:rPr sz="1200" b="0">
-                <a:solidFill>
-                  <a:srgbClr val="4A4F57"/>
-                </a:solidFill>
-                <a:latin typeface="Segoe UI"/>
-                <a:ea typeface="Microsoft YaHei"/>
-                <a:cs typeface="Microsoft YaHei"/>
-              </a:rPr>
-              <a:t>。</a:t>
+              <a:t>经验比结果更值得带走——下面三条都是被真实数据打出来的，不是设计时想到的。</a:t>
             </a:r>
           </a:p>
         </p:txBody>
@@ -5254,7 +6198,7 @@
                 <a:ea typeface="SimSun"/>
                 <a:cs typeface="SimSun"/>
               </a:rPr>
-              <a:t>候选 1 · 剂量差异</a:t>
+              <a:t>① 必须把「作者已提出」单独分出来</a:t>
             </a:r>
           </a:p>
           <a:p>
@@ -5272,7 +6216,51 @@
                 <a:ea typeface="Microsoft YaHei"/>
                 <a:cs typeface="Microsoft YaHei"/>
               </a:rPr>
-              <a:t>在不同剂量水平上，糖精（saccharin）、阿斯巴甜（aspartame）和安赛蜜（acesulfame K）对 CKD 风险的影响是否存在差异？</a:t>
+              <a:t>29 条方法学追问里 </a:t>
+            </a:r>
+            <a:r>
+              <a:rPr sz="1150" b="1">
+                <a:solidFill>
+                  <a:srgbClr val="2F6B6B"/>
+                </a:solidFill>
+                <a:latin typeface="Segoe UI"/>
+                <a:ea typeface="Microsoft YaHei"/>
+                <a:cs typeface="Microsoft YaHei"/>
+              </a:rPr>
+              <a:t>23 条的主题作者已在文中论及</a:t>
+            </a:r>
+            <a:r>
+              <a:rPr sz="1150" b="0">
+                <a:solidFill>
+                  <a:srgbClr val="4A4F57"/>
+                </a:solidFill>
+                <a:latin typeface="Segoe UI"/>
+                <a:ea typeface="Microsoft YaHei"/>
+                <a:cs typeface="Microsoft YaHei"/>
+              </a:rPr>
+              <a:t>。机器加的是</a:t>
+            </a:r>
+            <a:r>
+              <a:rPr sz="1150" b="1">
+                <a:solidFill>
+                  <a:srgbClr val="2F6B6B"/>
+                </a:solidFill>
+                <a:latin typeface="Segoe UI"/>
+                <a:ea typeface="Microsoft YaHei"/>
+                <a:cs typeface="Microsoft YaHei"/>
+              </a:rPr>
+              <a:t>可判形式</a:t>
+            </a:r>
+            <a:r>
+              <a:rPr sz="1150" b="0">
+                <a:solidFill>
+                  <a:srgbClr val="4A4F57"/>
+                </a:solidFill>
+                <a:latin typeface="Segoe UI"/>
+                <a:ea typeface="Microsoft YaHei"/>
+                <a:cs typeface="Microsoft YaHei"/>
+              </a:rPr>
+              <a:t>（滞后分析、E-value 门槛、RERI、回归校准…），不是话题本身。不分标就会把「复述」当成「发现」。</a:t>
             </a:r>
           </a:p>
           <a:p>
@@ -5290,7 +6278,7 @@
                 <a:ea typeface="SimSun"/>
                 <a:cs typeface="SimSun"/>
               </a:rPr>
-              <a:t>候选 2 · 时间滞后</a:t>
+              <a:t>② 领域包的价值在于「会算」</a:t>
             </a:r>
           </a:p>
           <a:p>
@@ -5308,7 +6296,29 @@
                 <a:ea typeface="Microsoft YaHei"/>
                 <a:cs typeface="Microsoft YaHei"/>
               </a:rPr>
-              <a:t>在该研究中，通过 24 小时膳食回顾评估人工甜味剂摄入量时是否存在时间滞后效应？</a:t>
+              <a:t>10 类缺口只是清单；真正有用的是</a:t>
+            </a:r>
+            <a:r>
+              <a:rPr sz="1150" b="1">
+                <a:solidFill>
+                  <a:srgbClr val="2F6B6B"/>
+                </a:solidFill>
+                <a:latin typeface="Segoe UI"/>
+                <a:ea typeface="Microsoft YaHei"/>
+                <a:cs typeface="Microsoft YaHei"/>
+              </a:rPr>
+              <a:t>从论文自报的 HR/CI 直接算出门槛</a:t>
+            </a:r>
+            <a:r>
+              <a:rPr sz="1150" b="0">
+                <a:solidFill>
+                  <a:srgbClr val="4A4F57"/>
+                </a:solidFill>
+                <a:latin typeface="Segoe UI"/>
+                <a:ea typeface="Microsoft YaHei"/>
+                <a:cs typeface="Microsoft YaHei"/>
+              </a:rPr>
+              <a:t>——这是任何读者都能复核的数，而不是一句「可能有残余混杂」。</a:t>
             </a:r>
           </a:p>
           <a:p>
@@ -5326,7 +6336,7 @@
                 <a:ea typeface="SimSun"/>
                 <a:cs typeface="SimSun"/>
               </a:rPr>
-              <a:t>候选 3 · 追问反直觉处</a:t>
+              <a:t>③ 门槛 ≠ 结论</a:t>
             </a:r>
           </a:p>
           <a:p>
@@ -5344,7 +6354,29 @@
                 <a:ea typeface="Microsoft YaHei"/>
                 <a:cs typeface="Microsoft YaHei"/>
               </a:rPr>
-              <a:t>为什么在高糖摄入水平上用人工甜味剂代替蔗糖并未降低肾病风险？</a:t>
+              <a:t>E-value 1.67 说的是「混杂要强到这个程度才能解释掉」，</a:t>
+            </a:r>
+            <a:r>
+              <a:rPr sz="1150" b="1">
+                <a:solidFill>
+                  <a:srgbClr val="2F6B6B"/>
+                </a:solidFill>
+                <a:latin typeface="Segoe UI"/>
+                <a:ea typeface="Microsoft YaHei"/>
+                <a:cs typeface="Microsoft YaHei"/>
+              </a:rPr>
+              <a:t>不是说效应是真的</a:t>
+            </a:r>
+            <a:r>
+              <a:rPr sz="1150" b="0">
+                <a:solidFill>
+                  <a:srgbClr val="4A4F57"/>
+                </a:solidFill>
+                <a:latin typeface="Segoe UI"/>
+                <a:ea typeface="Microsoft YaHei"/>
+                <a:cs typeface="Microsoft YaHei"/>
+              </a:rPr>
+              <a:t>，更推不出任何用药、摄入或诊断建议。这条边界必须写在产出里，而不是写在附录里。</a:t>
             </a:r>
           </a:p>
         </p:txBody>
@@ -5421,6 +6453,17 @@
               </a:spcAft>
             </a:pPr>
             <a:r>
+              <a:rPr sz="1000" b="0">
+                <a:solidFill>
+                  <a:srgbClr val="6B7078"/>
+                </a:solidFill>
+                <a:latin typeface="Segoe UI"/>
+                <a:ea typeface="Microsoft YaHei"/>
+                <a:cs typeface="Microsoft YaHei"/>
+              </a:rPr>
+              <a:t>门控：产出的每一条问题都带 </a:t>
+            </a:r>
+            <a:r>
               <a:rPr sz="1000" b="1">
                 <a:solidFill>
                   <a:srgbClr val="2F6B6B"/>
@@ -5429,7 +6472,7 @@
                 <a:ea typeface="Microsoft YaHei"/>
                 <a:cs typeface="Microsoft YaHei"/>
               </a:rPr>
-              <a:t>Holdout 对比</a:t>
+              <a:t>evidence</a:t>
             </a:r>
             <a:r>
               <a:rPr sz="1000" b="0">
@@ -5440,51 +6483,7 @@
                 <a:ea typeface="Microsoft YaHei"/>
                 <a:cs typeface="Microsoft YaHei"/>
               </a:rPr>
-              <a:t>：候选均值 reward </a:t>
-            </a:r>
-            <a:r>
-              <a:rPr sz="1000" b="1">
-                <a:solidFill>
-                  <a:srgbClr val="2F6B6B"/>
-                </a:solidFill>
-                <a:latin typeface="Segoe UI"/>
-                <a:ea typeface="Microsoft YaHei"/>
-                <a:cs typeface="Microsoft YaHei"/>
-              </a:rPr>
-              <a:t>0.7113</a:t>
-            </a:r>
-            <a:r>
-              <a:rPr sz="1000" b="0">
-                <a:solidFill>
-                  <a:srgbClr val="6B7078"/>
-                </a:solidFill>
-                <a:latin typeface="Segoe UI"/>
-                <a:ea typeface="Microsoft YaHei"/>
-                <a:cs typeface="Microsoft YaHei"/>
-              </a:rPr>
-              <a:t> vs v0.2 的 0.6888，配对头对 </a:t>
-            </a:r>
-            <a:r>
-              <a:rPr sz="1000" b="1">
-                <a:solidFill>
-                  <a:srgbClr val="2F6B6B"/>
-                </a:solidFill>
-                <a:latin typeface="Segoe UI"/>
-                <a:ea typeface="Microsoft YaHei"/>
-                <a:cs typeface="Microsoft YaHei"/>
-              </a:rPr>
-              <a:t>3:2:7</a:t>
-            </a:r>
-            <a:r>
-              <a:rPr sz="1000" b="0">
-                <a:solidFill>
-                  <a:srgbClr val="6B7078"/>
-                </a:solidFill>
-                <a:latin typeface="Segoe UI"/>
-                <a:ea typeface="Microsoft YaHei"/>
-                <a:cs typeface="Microsoft YaHei"/>
-              </a:rPr>
-              <a:t> 领先。换句话说，微调之后模型提出的问题，被判为「值得探究」的比例更高了。</a:t>
+              <a:t>（原文句），可逐条回原文核对。</a:t>
             </a:r>
           </a:p>
         </p:txBody>
@@ -5525,7 +6524,7 @@
                 <a:ea typeface="Microsoft YaHei"/>
                 <a:cs typeface="Microsoft YaHei"/>
               </a:rPr>
-              <a:t>13 / 24</a:t>
+              <a:t>13 / 26</a:t>
             </a:r>
           </a:p>
         </p:txBody>
@@ -5592,7 +6591,7 @@
                 <a:ea typeface="Microsoft YaHei"/>
                 <a:cs typeface="Microsoft YaHei"/>
               </a:rPr>
-              <a:t>三、dao 模型在生物医学的实践 · 经验与边界</a:t>
+              <a:t>三、dao 模型在生物医学的实践</a:t>
             </a:r>
           </a:p>
         </p:txBody>
@@ -5633,7 +6632,7 @@
                 <a:ea typeface="SimSun"/>
                 <a:cs typeface="SimSun"/>
               </a:rPr>
-              <a:t>这个模型做到了什么、还差什么</a:t>
+              <a:t>dao-v 0.3：一个专门用来提问的微调模型</a:t>
             </a:r>
           </a:p>
         </p:txBody>
@@ -5666,6 +6665,17 @@
               </a:spcAft>
             </a:pPr>
             <a:r>
+              <a:rPr sz="1200" b="1">
+                <a:solidFill>
+                  <a:srgbClr val="2F6B6B"/>
+                </a:solidFill>
+                <a:latin typeface="Segoe UI"/>
+                <a:ea typeface="Microsoft YaHei"/>
+                <a:cs typeface="Microsoft YaHei"/>
+              </a:rPr>
+              <a:t>v0.3 = v0.2 + RFT 后训练</a:t>
+            </a:r>
+            <a:r>
               <a:rPr sz="1200" b="0">
                 <a:solidFill>
                   <a:srgbClr val="4A4F57"/>
@@ -5674,7 +6684,7 @@
                 <a:ea typeface="Microsoft YaHei"/>
                 <a:cs typeface="Microsoft YaHei"/>
               </a:rPr>
-              <a:t>它已经能</a:t>
+              <a:t>（low-lr 训练 + LLM-as-judge 过滤数据）。它的任务不是回答问题，而是</a:t>
             </a:r>
             <a:r>
               <a:rPr sz="1200" b="1">
@@ -5685,7 +6695,7 @@
                 <a:ea typeface="Microsoft YaHei"/>
                 <a:cs typeface="Microsoft YaHei"/>
               </a:rPr>
-              <a:t>稳定产出真问题</a:t>
+              <a:t>从论文证据、方法局限与结果细节中，提出作者没有明说、但值得进一步探究的开放科学问题</a:t>
             </a:r>
             <a:r>
               <a:rPr sz="1200" b="0">
@@ -5696,21 +6706,45 @@
                 <a:ea typeface="Microsoft YaHei"/>
                 <a:cs typeface="Microsoft YaHei"/>
               </a:rPr>
-              <a:t>；但它的能力边界必须说清楚。</a:t>
-            </a:r>
-          </a:p>
-        </p:txBody>
-      </p:sp>
-      <p:sp>
-        <p:nvSpPr>
-          <p:cNvPr id="5" name="TextBox 4"/>
+              <a:t>。目前领域限制于生物医学。</a:t>
+            </a:r>
+          </a:p>
+        </p:txBody>
+      </p:sp>
+      <p:pic>
+        <p:nvPicPr>
+          <p:cNvPr id="5" name="Picture 4" descr="user_model_studio.png"/>
+          <p:cNvPicPr>
+            <a:picLocks noChangeAspect="1"/>
+          </p:cNvPicPr>
+          <p:nvPr/>
+        </p:nvPicPr>
+        <p:blipFill>
+          <a:blip r:embed="rId2"/>
+          <a:stretch>
+            <a:fillRect/>
+          </a:stretch>
+        </p:blipFill>
+        <p:spPr>
+          <a:xfrm>
+            <a:off x="4332897" y="2670048"/>
+            <a:ext cx="3523158" cy="2414016"/>
+          </a:xfrm>
+          <a:prstGeom prst="rect">
+            <a:avLst/>
+          </a:prstGeom>
+        </p:spPr>
+      </p:pic>
+      <p:sp>
+        <p:nvSpPr>
+          <p:cNvPr id="6" name="TextBox 5"/>
           <p:cNvSpPr txBox="1"/>
           <p:nvPr/>
         </p:nvSpPr>
         <p:spPr>
           <a:xfrm>
-            <a:off x="685800" y="2670048"/>
-            <a:ext cx="10607040" cy="3474720"/>
+            <a:off x="685800" y="5175504"/>
+            <a:ext cx="10817352" cy="548640"/>
           </a:xfrm>
           <a:prstGeom prst="rect">
             <a:avLst/>
@@ -5725,40 +6759,22 @@
           <a:p>
             <a:pPr>
               <a:spcAft>
-                <a:spcPts val="100"/>
-              </a:spcAft>
-            </a:pPr>
-            <a:r>
-              <a:rPr sz="1250" b="1">
-                <a:solidFill>
-                  <a:srgbClr val="16191D"/>
-                </a:solidFill>
-                <a:latin typeface="Source Han Serif SC"/>
-                <a:ea typeface="SimSun"/>
-                <a:cs typeface="SimSun"/>
-              </a:rPr>
-              <a:t>做到了：会问「反直觉处」</a:t>
-            </a:r>
-          </a:p>
-          <a:p>
-            <a:pPr>
-              <a:spcAft>
-                <a:spcPts val="900"/>
-              </a:spcAft>
-            </a:pPr>
-            <a:r>
-              <a:rPr sz="1150" b="0">
-                <a:solidFill>
-                  <a:srgbClr val="4A4F57"/>
-                </a:solidFill>
-                <a:latin typeface="Segoe UI"/>
-                <a:ea typeface="Microsoft YaHei"/>
-                <a:cs typeface="Microsoft YaHei"/>
-              </a:rPr>
-              <a:t>候选 3 是模型自己发现论文里的反直觉点——论文说「换代糖没有好处」，模型直接追问</a:t>
-            </a:r>
-            <a:r>
-              <a:rPr sz="1150" b="1">
+                <a:spcPts val="0"/>
+              </a:spcAft>
+            </a:pPr>
+            <a:r>
+              <a:rPr sz="900" b="0">
+                <a:solidFill>
+                  <a:srgbClr val="6B7078"/>
+                </a:solidFill>
+                <a:latin typeface="Segoe UI"/>
+                <a:ea typeface="Microsoft YaHei"/>
+                <a:cs typeface="Microsoft YaHei"/>
+              </a:rPr>
+              <a:t>ModelScope studio 上的</a:t>
+            </a:r>
+            <a:r>
+              <a:rPr sz="900" b="1">
                 <a:solidFill>
                   <a:srgbClr val="2F6B6B"/>
                 </a:solidFill>
@@ -5766,221 +6782,25 @@
                 <a:ea typeface="Microsoft YaHei"/>
                 <a:cs typeface="Microsoft YaHei"/>
               </a:rPr>
-              <a:t>为什么没有降低风险</a:t>
-            </a:r>
-            <a:r>
-              <a:rPr sz="1150" b="0">
-                <a:solidFill>
-                  <a:srgbClr val="4A4F57"/>
-                </a:solidFill>
-                <a:latin typeface="Segoe UI"/>
-                <a:ea typeface="Microsoft YaHei"/>
-                <a:cs typeface="Microsoft YaHei"/>
-              </a:rPr>
-              <a:t>。这不是复述，是找到了值得深挖的缝。</a:t>
-            </a:r>
-          </a:p>
-          <a:p>
-            <a:pPr>
-              <a:spcAft>
-                <a:spcPts val="100"/>
-              </a:spcAft>
-            </a:pPr>
-            <a:r>
-              <a:rPr sz="1250" b="1">
-                <a:solidFill>
-                  <a:srgbClr val="16191D"/>
-                </a:solidFill>
-                <a:latin typeface="Source Han Serif SC"/>
-                <a:ea typeface="SimSun"/>
-                <a:cs typeface="SimSun"/>
-              </a:rPr>
-              <a:t>做到了：问题带领域手艺</a:t>
-            </a:r>
-          </a:p>
-          <a:p>
-            <a:pPr>
-              <a:spcAft>
-                <a:spcPts val="900"/>
-              </a:spcAft>
-            </a:pPr>
-            <a:r>
-              <a:rPr sz="1150" b="0">
-                <a:solidFill>
-                  <a:srgbClr val="4A4F57"/>
-                </a:solidFill>
-                <a:latin typeface="Segoe UI"/>
-                <a:ea typeface="Microsoft YaHei"/>
-                <a:cs typeface="Microsoft YaHei"/>
-              </a:rPr>
-              <a:t>候选 1 问不同甜味剂</a:t>
-            </a:r>
-            <a:r>
-              <a:rPr sz="1150" b="1">
-                <a:solidFill>
-                  <a:srgbClr val="2F6B6B"/>
-                </a:solidFill>
-                <a:latin typeface="Segoe UI"/>
-                <a:ea typeface="Microsoft YaHei"/>
-                <a:cs typeface="Microsoft YaHei"/>
-              </a:rPr>
-              <a:t>种类</a:t>
-            </a:r>
-            <a:r>
-              <a:rPr sz="1150" b="0">
-                <a:solidFill>
-                  <a:srgbClr val="4A4F57"/>
-                </a:solidFill>
-                <a:latin typeface="Segoe UI"/>
-                <a:ea typeface="Microsoft YaHei"/>
-                <a:cs typeface="Microsoft YaHei"/>
-              </a:rPr>
-              <a:t>的差异，候选 2 问 24 小时膳食回顾的</a:t>
-            </a:r>
-            <a:r>
-              <a:rPr sz="1150" b="1">
-                <a:solidFill>
-                  <a:srgbClr val="2F6B6B"/>
-                </a:solidFill>
-                <a:latin typeface="Segoe UI"/>
-                <a:ea typeface="Microsoft YaHei"/>
-                <a:cs typeface="Microsoft YaHei"/>
-              </a:rPr>
-              <a:t>时间滞后</a:t>
-            </a:r>
-            <a:r>
-              <a:rPr sz="1150" b="0">
-                <a:solidFill>
-                  <a:srgbClr val="4A4F57"/>
-                </a:solidFill>
-                <a:latin typeface="Segoe UI"/>
-                <a:ea typeface="Microsoft YaHei"/>
-                <a:cs typeface="Microsoft YaHei"/>
-              </a:rPr>
-              <a:t>——这两条都是流行病学方法学里的真问题，不是泛泛而谈。</a:t>
-            </a:r>
-          </a:p>
-          <a:p>
-            <a:pPr>
-              <a:spcAft>
-                <a:spcPts val="100"/>
-              </a:spcAft>
-            </a:pPr>
-            <a:r>
-              <a:rPr sz="1250" b="1">
-                <a:solidFill>
-                  <a:srgbClr val="16191D"/>
-                </a:solidFill>
-                <a:latin typeface="Source Han Serif SC"/>
-                <a:ea typeface="SimSun"/>
-                <a:cs typeface="SimSun"/>
-              </a:rPr>
-              <a:t>边界一：只有生物医学</a:t>
-            </a:r>
-          </a:p>
-          <a:p>
-            <a:pPr>
-              <a:spcAft>
-                <a:spcPts val="900"/>
-              </a:spcAft>
-            </a:pPr>
-            <a:r>
-              <a:rPr sz="1150" b="0">
-                <a:solidFill>
-                  <a:srgbClr val="4A4F57"/>
-                </a:solidFill>
-                <a:latin typeface="Segoe UI"/>
-                <a:ea typeface="Microsoft YaHei"/>
-                <a:cs typeface="Microsoft YaHei"/>
-              </a:rPr>
-              <a:t>目前</a:t>
-            </a:r>
-            <a:r>
-              <a:rPr sz="1150" b="1">
-                <a:solidFill>
-                  <a:srgbClr val="2F6B6B"/>
-                </a:solidFill>
-                <a:latin typeface="Segoe UI"/>
-                <a:ea typeface="Microsoft YaHei"/>
-                <a:cs typeface="Microsoft YaHei"/>
-              </a:rPr>
-              <a:t>领域限制于生物医学</a:t>
-            </a:r>
-            <a:r>
-              <a:rPr sz="1150" b="0">
-                <a:solidFill>
-                  <a:srgbClr val="4A4F57"/>
-                </a:solidFill>
-                <a:latin typeface="Segoe UI"/>
-                <a:ea typeface="Microsoft YaHei"/>
-                <a:cs typeface="Microsoft YaHei"/>
-              </a:rPr>
-              <a:t>，靠的是领域语料与后训练；换领域需要重新做数据与训练。</a:t>
-            </a:r>
-          </a:p>
-          <a:p>
-            <a:pPr>
-              <a:spcAft>
-                <a:spcPts val="100"/>
-              </a:spcAft>
-            </a:pPr>
-            <a:r>
-              <a:rPr sz="1250" b="1">
-                <a:solidFill>
-                  <a:srgbClr val="16191D"/>
-                </a:solidFill>
-                <a:latin typeface="Source Han Serif SC"/>
-                <a:ea typeface="SimSun"/>
-                <a:cs typeface="SimSun"/>
-              </a:rPr>
-              <a:t>边界二：它只提问，不判定</a:t>
-            </a:r>
-          </a:p>
-          <a:p>
-            <a:pPr>
-              <a:spcAft>
-                <a:spcPts val="900"/>
-              </a:spcAft>
-            </a:pPr>
-            <a:r>
-              <a:rPr sz="1150" b="0">
-                <a:solidFill>
-                  <a:srgbClr val="4A4F57"/>
-                </a:solidFill>
-                <a:latin typeface="Segoe UI"/>
-                <a:ea typeface="Microsoft YaHei"/>
-                <a:cs typeface="Microsoft YaHei"/>
-              </a:rPr>
-              <a:t>模型负责「问得好」，</a:t>
-            </a:r>
-            <a:r>
-              <a:rPr sz="1150" b="1">
-                <a:solidFill>
-                  <a:srgbClr val="2F6B6B"/>
-                </a:solidFill>
-                <a:latin typeface="Segoe UI"/>
-                <a:ea typeface="Microsoft YaHei"/>
-                <a:cs typeface="Microsoft YaHei"/>
-              </a:rPr>
-              <a:t>判定交给判定器与人类</a:t>
-            </a:r>
-            <a:r>
-              <a:rPr sz="1150" b="0">
-                <a:solidFill>
-                  <a:srgbClr val="4A4F57"/>
-                </a:solidFill>
-                <a:latin typeface="Segoe UI"/>
-                <a:ea typeface="Microsoft YaHei"/>
-                <a:cs typeface="Microsoft YaHei"/>
-              </a:rPr>
-              <a:t>——它产出的候选仍需过四道门，不能自称发现。</a:t>
-            </a:r>
-          </a:p>
-        </p:txBody>
-      </p:sp>
-      <p:sp>
-        <p:nvSpPr>
-          <p:cNvPr id="6" name="Rectangle 5"/>
+              <a:t>真实运行界面</a:t>
+            </a:r>
+            <a:r>
+              <a:rPr sz="900" b="0">
+                <a:solidFill>
+                  <a:srgbClr val="6B7078"/>
+                </a:solidFill>
+                <a:latin typeface="Segoe UI"/>
+                <a:ea typeface="Microsoft YaHei"/>
+                <a:cs typeface="Microsoft YaHei"/>
+              </a:rPr>
+              <a:t>（Ask-Dao v0.3 · 生物医学知识发现机器）：左侧是论文的摘要 / 讨论 / 结论，右侧是模型现场生成的候选问题，底部可调候选数量与 temperature。</a:t>
+            </a:r>
+          </a:p>
+        </p:txBody>
+      </p:sp>
+      <p:sp>
+        <p:nvSpPr>
+          <p:cNvPr id="7" name="Rectangle 6"/>
           <p:cNvSpPr/>
           <p:nvPr/>
         </p:nvSpPr>
@@ -6024,7 +6844,7 @@
       </p:sp>
       <p:sp>
         <p:nvSpPr>
-          <p:cNvPr id="7" name="TextBox 6"/>
+          <p:cNvPr id="8" name="TextBox 7"/>
           <p:cNvSpPr txBox="1"/>
           <p:nvPr/>
         </p:nvSpPr>
@@ -6058,7 +6878,7 @@
                 <a:ea typeface="Microsoft YaHei"/>
                 <a:cs typeface="Microsoft YaHei"/>
               </a:rPr>
-              <a:t>分工：</a:t>
+              <a:t>地址：</a:t>
             </a:r>
             <a:r>
               <a:rPr sz="1000" b="1">
@@ -6069,7 +6889,7 @@
                 <a:ea typeface="Microsoft YaHei"/>
                 <a:cs typeface="Microsoft YaHei"/>
               </a:rPr>
-              <a:t>模型提问题 → 判定层筛真假 → 人类裁决要不要投入</a:t>
+              <a:t>modelscope.cn/studios/skopskp/dao-v-0.3</a:t>
             </a:r>
             <a:r>
               <a:rPr sz="1000" b="0">
@@ -6080,14 +6900,14 @@
                 <a:ea typeface="Microsoft YaHei"/>
                 <a:cs typeface="Microsoft YaHei"/>
               </a:rPr>
-              <a:t>。这也是为什么 N3 仍为 0：会提问不等于发现了世界新知识。</a:t>
-            </a:r>
-          </a:p>
-        </p:txBody>
-      </p:sp>
-      <p:sp>
-        <p:nvSpPr>
-          <p:cNvPr id="8" name="TextBox 7"/>
+              <a:t>。当前跑在免费 CPU 模式（每次生成约 30–90 秒），所以界面上把候选数调小。</a:t>
+            </a:r>
+          </a:p>
+        </p:txBody>
+      </p:sp>
+      <p:sp>
+        <p:nvSpPr>
+          <p:cNvPr id="9" name="TextBox 8"/>
           <p:cNvSpPr txBox="1"/>
           <p:nvPr/>
         </p:nvSpPr>
@@ -6121,7 +6941,7 @@
                 <a:ea typeface="Microsoft YaHei"/>
                 <a:cs typeface="Microsoft YaHei"/>
               </a:rPr>
-              <a:t>14 / 24</a:t>
+              <a:t>14 / 26</a:t>
             </a:r>
           </a:p>
         </p:txBody>
@@ -6188,7 +7008,7 @@
                 <a:ea typeface="Microsoft YaHei"/>
                 <a:cs typeface="Microsoft YaHei"/>
               </a:rPr>
-              <a:t>四、扩展的实践 · 想象路</a:t>
+              <a:t>三、dao 模型在生物医学的实践 · 它产出的问题</a:t>
             </a:r>
           </a:p>
         </p:txBody>
@@ -6229,7 +7049,7 @@
                 <a:ea typeface="SimSun"/>
                 <a:cs typeface="SimSun"/>
               </a:rPr>
-              <a:t>另一条路：把「造词」做成能跑完的流水线</a:t>
+              <a:t>模型现场生成的三个问题（原句）</a:t>
             </a:r>
           </a:p>
         </p:txBody>
@@ -6270,7 +7090,7 @@
                 <a:ea typeface="Microsoft YaHei"/>
                 <a:cs typeface="Microsoft YaHei"/>
               </a:rPr>
-              <a:t>想象路不是问题路的子功能，而是与它</a:t>
+              <a:t>同一个输入（就是上一篇论文的摘要 / 讨论 / 结论），模型给出的候选问题——</a:t>
             </a:r>
             <a:r>
               <a:rPr sz="1200" b="1">
@@ -6281,7 +7101,7 @@
                 <a:ea typeface="Microsoft YaHei"/>
                 <a:cs typeface="Microsoft YaHei"/>
               </a:rPr>
-              <a:t>并列的一条路</a:t>
+              <a:t>注意它们都是问句，而且是原文没问过的</a:t>
             </a:r>
             <a:r>
               <a:rPr sz="1200" b="0">
@@ -6292,67 +7112,21 @@
                 <a:ea typeface="Microsoft YaHei"/>
                 <a:cs typeface="Microsoft YaHei"/>
               </a:rPr>
-              <a:t>。6,642 个领域专业词组合，每个都要走完五步，产出的是</a:t>
-            </a:r>
-            <a:r>
-              <a:rPr sz="1200" b="1">
-                <a:solidFill>
-                  <a:srgbClr val="2F6B6B"/>
-                </a:solidFill>
-                <a:latin typeface="Segoe UI"/>
-                <a:ea typeface="Microsoft YaHei"/>
-                <a:cs typeface="Microsoft YaHei"/>
-              </a:rPr>
-              <a:t>被理解的概念</a:t>
-            </a:r>
-            <a:r>
-              <a:rPr sz="1200" b="0">
-                <a:solidFill>
-                  <a:srgbClr val="4A4F57"/>
-                </a:solidFill>
-                <a:latin typeface="Segoe UI"/>
-                <a:ea typeface="Microsoft YaHei"/>
-                <a:cs typeface="Microsoft YaHei"/>
-              </a:rPr>
               <a:t>。</a:t>
             </a:r>
           </a:p>
         </p:txBody>
       </p:sp>
-      <p:pic>
-        <p:nvPicPr>
-          <p:cNvPr id="5" name="Picture 4" descr="fig_pipeline5.png"/>
-          <p:cNvPicPr>
-            <a:picLocks noChangeAspect="1"/>
-          </p:cNvPicPr>
-          <p:nvPr/>
-        </p:nvPicPr>
-        <p:blipFill>
-          <a:blip r:embed="rId2"/>
-          <a:stretch>
-            <a:fillRect/>
-          </a:stretch>
-        </p:blipFill>
-        <p:spPr>
-          <a:xfrm>
-            <a:off x="1439967" y="2670048"/>
-            <a:ext cx="9309017" cy="2414016"/>
-          </a:xfrm>
-          <a:prstGeom prst="rect">
-            <a:avLst/>
-          </a:prstGeom>
-        </p:spPr>
-      </p:pic>
-      <p:sp>
-        <p:nvSpPr>
-          <p:cNvPr id="6" name="TextBox 5"/>
+      <p:sp>
+        <p:nvSpPr>
+          <p:cNvPr id="5" name="TextBox 4"/>
           <p:cNvSpPr txBox="1"/>
           <p:nvPr/>
         </p:nvSpPr>
         <p:spPr>
           <a:xfrm>
-            <a:off x="685800" y="5175504"/>
-            <a:ext cx="10817352" cy="548640"/>
+            <a:off x="685800" y="2670048"/>
+            <a:ext cx="10607040" cy="3474720"/>
           </a:xfrm>
           <a:prstGeom prst="rect">
             <a:avLst/>
@@ -6367,48 +7141,116 @@
           <a:p>
             <a:pPr>
               <a:spcAft>
-                <a:spcPts val="0"/>
-              </a:spcAft>
-            </a:pPr>
-            <a:r>
-              <a:rPr sz="900" b="0">
-                <a:solidFill>
-                  <a:srgbClr val="6B7078"/>
-                </a:solidFill>
-                <a:latin typeface="Segoe UI"/>
-                <a:ea typeface="Microsoft YaHei"/>
-                <a:cs typeface="Microsoft YaHei"/>
-              </a:rPr>
-              <a:t>五步流水线。原则：</a:t>
-            </a:r>
-            <a:r>
-              <a:rPr sz="900" b="1">
-                <a:solidFill>
-                  <a:srgbClr val="2F6B6B"/>
-                </a:solidFill>
-                <a:latin typeface="Segoe UI"/>
-                <a:ea typeface="Microsoft YaHei"/>
-                <a:cs typeface="Microsoft YaHei"/>
-              </a:rPr>
-              <a:t>每个词都有意义，只不过是我们缺少想象力，无法理解它</a:t>
-            </a:r>
-            <a:r>
-              <a:rPr sz="900" b="0">
-                <a:solidFill>
-                  <a:srgbClr val="6B7078"/>
-                </a:solidFill>
-                <a:latin typeface="Segoe UI"/>
-                <a:ea typeface="Microsoft YaHei"/>
-                <a:cs typeface="Microsoft YaHei"/>
-              </a:rPr>
-              <a:t>——因此不存在空想。</a:t>
-            </a:r>
-          </a:p>
-        </p:txBody>
-      </p:sp>
-      <p:sp>
-        <p:nvSpPr>
-          <p:cNvPr id="7" name="Rectangle 6"/>
+                <a:spcPts val="100"/>
+              </a:spcAft>
+            </a:pPr>
+            <a:r>
+              <a:rPr sz="1250" b="1">
+                <a:solidFill>
+                  <a:srgbClr val="16191D"/>
+                </a:solidFill>
+                <a:latin typeface="Source Han Serif SC"/>
+                <a:ea typeface="SimSun"/>
+                <a:cs typeface="SimSun"/>
+              </a:rPr>
+              <a:t>候选 1 · 剂量差异</a:t>
+            </a:r>
+          </a:p>
+          <a:p>
+            <a:pPr>
+              <a:spcAft>
+                <a:spcPts val="900"/>
+              </a:spcAft>
+            </a:pPr>
+            <a:r>
+              <a:rPr sz="1150" b="0">
+                <a:solidFill>
+                  <a:srgbClr val="4A4F57"/>
+                </a:solidFill>
+                <a:latin typeface="Segoe UI"/>
+                <a:ea typeface="Microsoft YaHei"/>
+                <a:cs typeface="Microsoft YaHei"/>
+              </a:rPr>
+              <a:t>在不同剂量水平上，糖精（saccharin）、阿斯巴甜（aspartame）和安赛蜜（acesulfame K）对 CKD 风险的影响是否存在差异？</a:t>
+            </a:r>
+          </a:p>
+          <a:p>
+            <a:pPr>
+              <a:spcAft>
+                <a:spcPts val="100"/>
+              </a:spcAft>
+            </a:pPr>
+            <a:r>
+              <a:rPr sz="1250" b="1">
+                <a:solidFill>
+                  <a:srgbClr val="16191D"/>
+                </a:solidFill>
+                <a:latin typeface="Source Han Serif SC"/>
+                <a:ea typeface="SimSun"/>
+                <a:cs typeface="SimSun"/>
+              </a:rPr>
+              <a:t>候选 2 · 时间滞后</a:t>
+            </a:r>
+          </a:p>
+          <a:p>
+            <a:pPr>
+              <a:spcAft>
+                <a:spcPts val="900"/>
+              </a:spcAft>
+            </a:pPr>
+            <a:r>
+              <a:rPr sz="1150" b="0">
+                <a:solidFill>
+                  <a:srgbClr val="4A4F57"/>
+                </a:solidFill>
+                <a:latin typeface="Segoe UI"/>
+                <a:ea typeface="Microsoft YaHei"/>
+                <a:cs typeface="Microsoft YaHei"/>
+              </a:rPr>
+              <a:t>在该研究中，通过 24 小时膳食回顾评估人工甜味剂摄入量时是否存在时间滞后效应？</a:t>
+            </a:r>
+          </a:p>
+          <a:p>
+            <a:pPr>
+              <a:spcAft>
+                <a:spcPts val="100"/>
+              </a:spcAft>
+            </a:pPr>
+            <a:r>
+              <a:rPr sz="1250" b="1">
+                <a:solidFill>
+                  <a:srgbClr val="16191D"/>
+                </a:solidFill>
+                <a:latin typeface="Source Han Serif SC"/>
+                <a:ea typeface="SimSun"/>
+                <a:cs typeface="SimSun"/>
+              </a:rPr>
+              <a:t>候选 3 · 追问反直觉处</a:t>
+            </a:r>
+          </a:p>
+          <a:p>
+            <a:pPr>
+              <a:spcAft>
+                <a:spcPts val="900"/>
+              </a:spcAft>
+            </a:pPr>
+            <a:r>
+              <a:rPr sz="1150" b="0">
+                <a:solidFill>
+                  <a:srgbClr val="4A4F57"/>
+                </a:solidFill>
+                <a:latin typeface="Segoe UI"/>
+                <a:ea typeface="Microsoft YaHei"/>
+                <a:cs typeface="Microsoft YaHei"/>
+              </a:rPr>
+              <a:t>为什么在高糖摄入水平上用人工甜味剂代替蔗糖并未降低肾病风险？</a:t>
+            </a:r>
+          </a:p>
+        </p:txBody>
+      </p:sp>
+      <p:sp>
+        <p:nvSpPr>
+          <p:cNvPr id="6" name="Rectangle 5"/>
           <p:cNvSpPr/>
           <p:nvPr/>
         </p:nvSpPr>
@@ -6452,7 +7294,7 @@
       </p:sp>
       <p:sp>
         <p:nvSpPr>
-          <p:cNvPr id="8" name="TextBox 7"/>
+          <p:cNvPr id="7" name="TextBox 6"/>
           <p:cNvSpPr txBox="1"/>
           <p:nvPr/>
         </p:nvSpPr>
@@ -6478,6 +7320,17 @@
               </a:spcAft>
             </a:pPr>
             <a:r>
+              <a:rPr sz="1000" b="1">
+                <a:solidFill>
+                  <a:srgbClr val="2F6B6B"/>
+                </a:solidFill>
+                <a:latin typeface="Segoe UI"/>
+                <a:ea typeface="Microsoft YaHei"/>
+                <a:cs typeface="Microsoft YaHei"/>
+              </a:rPr>
+              <a:t>Holdout 对比</a:t>
+            </a:r>
+            <a:r>
               <a:rPr sz="1000" b="0">
                 <a:solidFill>
                   <a:srgbClr val="6B7078"/>
@@ -6486,7 +7339,7 @@
                 <a:ea typeface="Microsoft YaHei"/>
                 <a:cs typeface="Microsoft YaHei"/>
               </a:rPr>
-              <a:t>版本线：v0.2 产品 → </a:t>
+              <a:t>：候选均值 reward </a:t>
             </a:r>
             <a:r>
               <a:rPr sz="1000" b="1">
@@ -6497,7 +7350,7 @@
                 <a:ea typeface="Microsoft YaHei"/>
                 <a:cs typeface="Microsoft YaHei"/>
               </a:rPr>
-              <a:t>v0.3.0 两条路</a:t>
+              <a:t>0.7113</a:t>
             </a:r>
             <a:r>
               <a:rPr sz="1000" b="0">
@@ -6508,14 +7361,36 @@
                 <a:ea typeface="Microsoft YaHei"/>
                 <a:cs typeface="Microsoft YaHei"/>
               </a:rPr>
-              <a:t> → v0.3.1 可视化/README → v0.4 问题树 → v0.5（问道）。</a:t>
-            </a:r>
-          </a:p>
-        </p:txBody>
-      </p:sp>
-      <p:sp>
-        <p:nvSpPr>
-          <p:cNvPr id="9" name="TextBox 8"/>
+              <a:t> vs v0.2 的 0.6888，配对头对 </a:t>
+            </a:r>
+            <a:r>
+              <a:rPr sz="1000" b="1">
+                <a:solidFill>
+                  <a:srgbClr val="2F6B6B"/>
+                </a:solidFill>
+                <a:latin typeface="Segoe UI"/>
+                <a:ea typeface="Microsoft YaHei"/>
+                <a:cs typeface="Microsoft YaHei"/>
+              </a:rPr>
+              <a:t>3:2:7</a:t>
+            </a:r>
+            <a:r>
+              <a:rPr sz="1000" b="0">
+                <a:solidFill>
+                  <a:srgbClr val="6B7078"/>
+                </a:solidFill>
+                <a:latin typeface="Segoe UI"/>
+                <a:ea typeface="Microsoft YaHei"/>
+                <a:cs typeface="Microsoft YaHei"/>
+              </a:rPr>
+              <a:t> 领先。换句话说，微调之后模型提出的问题，被判为「值得探究」的比例更高了。</a:t>
+            </a:r>
+          </a:p>
+        </p:txBody>
+      </p:sp>
+      <p:sp>
+        <p:nvSpPr>
+          <p:cNvPr id="8" name="TextBox 7"/>
           <p:cNvSpPr txBox="1"/>
           <p:nvPr/>
         </p:nvSpPr>
@@ -6549,7 +7424,7 @@
                 <a:ea typeface="Microsoft YaHei"/>
                 <a:cs typeface="Microsoft YaHei"/>
               </a:rPr>
-              <a:t>15 / 24</a:t>
+              <a:t>15 / 26</a:t>
             </a:r>
           </a:p>
         </p:txBody>
@@ -6616,7 +7491,7 @@
                 <a:ea typeface="Microsoft YaHei"/>
                 <a:cs typeface="Microsoft YaHei"/>
               </a:rPr>
-              <a:t>四、扩展的实践 · 问题路规模化</a:t>
+              <a:t>三、dao 模型在生物医学的实践 · 经验与边界</a:t>
             </a:r>
           </a:p>
         </p:txBody>
@@ -6657,7 +7532,7 @@
                 <a:ea typeface="SimSun"/>
                 <a:cs typeface="SimSun"/>
               </a:rPr>
-              <a:t>问题路：544 条问题覆盖 23 个领域</a:t>
+              <a:t>这个模型做到了什么、还差什么</a:t>
             </a:r>
           </a:p>
         </p:txBody>
@@ -6698,7 +7573,7 @@
                 <a:ea typeface="Microsoft YaHei"/>
                 <a:cs typeface="Microsoft YaHei"/>
               </a:rPr>
-              <a:t>这一代把「提问题」从零散试探变成</a:t>
+              <a:t>它已经能</a:t>
             </a:r>
             <a:r>
               <a:rPr sz="1200" b="1">
@@ -6709,7 +7584,7 @@
                 <a:ea typeface="Microsoft YaHei"/>
                 <a:cs typeface="Microsoft YaHei"/>
               </a:rPr>
-              <a:t>全领域并行扫描 + 分层问题树</a:t>
+              <a:t>稳定产出真问题</a:t>
             </a:r>
             <a:r>
               <a:rPr sz="1200" b="0">
@@ -6720,45 +7595,21 @@
                 <a:ea typeface="Microsoft YaHei"/>
                 <a:cs typeface="Microsoft YaHei"/>
               </a:rPr>
-              <a:t>，并第一次有了独立的裁决环节。</a:t>
-            </a:r>
-          </a:p>
-        </p:txBody>
-      </p:sp>
-      <p:pic>
-        <p:nvPicPr>
-          <p:cNvPr id="5" name="Picture 4" descr="fig_domains.png"/>
-          <p:cNvPicPr>
-            <a:picLocks noChangeAspect="1"/>
-          </p:cNvPicPr>
-          <p:nvPr/>
-        </p:nvPicPr>
-        <p:blipFill>
-          <a:blip r:embed="rId2"/>
-          <a:stretch>
-            <a:fillRect/>
-          </a:stretch>
-        </p:blipFill>
+              <a:t>；但它的能力边界必须说清楚。</a:t>
+            </a:r>
+          </a:p>
+        </p:txBody>
+      </p:sp>
+      <p:sp>
+        <p:nvSpPr>
+          <p:cNvPr id="5" name="TextBox 4"/>
+          <p:cNvSpPr txBox="1"/>
+          <p:nvPr/>
+        </p:nvSpPr>
         <p:spPr>
           <a:xfrm>
             <a:off x="685800" y="2670048"/>
-            <a:ext cx="3136529" cy="2414016"/>
-          </a:xfrm>
-          <a:prstGeom prst="rect">
-            <a:avLst/>
-          </a:prstGeom>
-        </p:spPr>
-      </p:pic>
-      <p:sp>
-        <p:nvSpPr>
-          <p:cNvPr id="6" name="TextBox 5"/>
-          <p:cNvSpPr txBox="1"/>
-          <p:nvPr/>
-        </p:nvSpPr>
-        <p:spPr>
-          <a:xfrm>
-            <a:off x="685800" y="5166360"/>
-            <a:ext cx="5623560" cy="548640"/>
+            <a:ext cx="10607040" cy="3474720"/>
           </a:xfrm>
           <a:prstGeom prst="rect">
             <a:avLst/>
@@ -6773,52 +7624,11 @@
           <a:p>
             <a:pPr>
               <a:spcAft>
-                <a:spcPts val="0"/>
-              </a:spcAft>
-            </a:pPr>
-            <a:r>
-              <a:rPr sz="900" b="0">
-                <a:solidFill>
-                  <a:srgbClr val="6B7078"/>
-                </a:solidFill>
-                <a:latin typeface="Segoe UI"/>
-                <a:ea typeface="Microsoft YaHei"/>
-                <a:cs typeface="Microsoft YaHei"/>
-              </a:rPr>
-              <a:t>544 条问题的领域分布（条数最多的前 14 个领域）。朱砂标出的是与生物 / 医学相关的领域。</a:t>
-            </a:r>
-          </a:p>
-        </p:txBody>
-      </p:sp>
-      <p:sp>
-        <p:nvSpPr>
-          <p:cNvPr id="7" name="TextBox 6"/>
-          <p:cNvSpPr txBox="1"/>
-          <p:nvPr/>
-        </p:nvSpPr>
-        <p:spPr>
-          <a:xfrm>
-            <a:off x="6629400" y="2624328"/>
-            <a:ext cx="4873752" cy="3566160"/>
-          </a:xfrm>
-          <a:prstGeom prst="rect">
-            <a:avLst/>
-          </a:prstGeom>
-          <a:noFill/>
-        </p:spPr>
-        <p:txBody>
-          <a:bodyPr wrap="square">
-            <a:spAutoFit/>
-          </a:bodyPr>
-          <a:lstStyle/>
-          <a:p>
-            <a:pPr>
-              <a:spcAft>
                 <a:spcPts val="100"/>
               </a:spcAft>
             </a:pPr>
             <a:r>
-              <a:rPr sz="1150" b="1">
+              <a:rPr sz="1250" b="1">
                 <a:solidFill>
                   <a:srgbClr val="16191D"/>
                 </a:solidFill>
@@ -6826,17 +7636,17 @@
                 <a:ea typeface="SimSun"/>
                 <a:cs typeface="SimSun"/>
               </a:rPr>
-              <a:t>全领域扫描</a:t>
-            </a:r>
-          </a:p>
-          <a:p>
-            <a:pPr>
-              <a:spcAft>
-                <a:spcPts val="800"/>
-              </a:spcAft>
-            </a:pPr>
-            <a:r>
-              <a:rPr sz="1050" b="0">
+              <a:t>做到了：会问「反直觉处」</a:t>
+            </a:r>
+          </a:p>
+          <a:p>
+            <a:pPr>
+              <a:spcAft>
+                <a:spcPts val="900"/>
+              </a:spcAft>
+            </a:pPr>
+            <a:r>
+              <a:rPr sz="1150" b="0">
                 <a:solidFill>
                   <a:srgbClr val="4A4F57"/>
                 </a:solidFill>
@@ -6844,7 +7654,29 @@
                 <a:ea typeface="Microsoft YaHei"/>
                 <a:cs typeface="Microsoft YaHei"/>
               </a:rPr>
-              <a:t>领域引擎并行产出，每个领域一份问题清单。</a:t>
+              <a:t>候选 3 是模型自己发现论文里的反直觉点——论文说「换代糖没有好处」，模型直接追问</a:t>
+            </a:r>
+            <a:r>
+              <a:rPr sz="1150" b="1">
+                <a:solidFill>
+                  <a:srgbClr val="2F6B6B"/>
+                </a:solidFill>
+                <a:latin typeface="Segoe UI"/>
+                <a:ea typeface="Microsoft YaHei"/>
+                <a:cs typeface="Microsoft YaHei"/>
+              </a:rPr>
+              <a:t>为什么没有降低风险</a:t>
+            </a:r>
+            <a:r>
+              <a:rPr sz="1150" b="0">
+                <a:solidFill>
+                  <a:srgbClr val="4A4F57"/>
+                </a:solidFill>
+                <a:latin typeface="Segoe UI"/>
+                <a:ea typeface="Microsoft YaHei"/>
+                <a:cs typeface="Microsoft YaHei"/>
+              </a:rPr>
+              <a:t>。这不是复述，是找到了值得深挖的缝。</a:t>
             </a:r>
           </a:p>
           <a:p>
@@ -6854,7 +7686,7 @@
               </a:spcAft>
             </a:pPr>
             <a:r>
-              <a:rPr sz="1150" b="1">
+              <a:rPr sz="1250" b="1">
                 <a:solidFill>
                   <a:srgbClr val="16191D"/>
                 </a:solidFill>
@@ -6862,17 +7694,17 @@
                 <a:ea typeface="SimSun"/>
                 <a:cs typeface="SimSun"/>
               </a:rPr>
-              <a:t>反例驱动</a:t>
-            </a:r>
-          </a:p>
-          <a:p>
-            <a:pPr>
-              <a:spcAft>
-                <a:spcPts val="800"/>
-              </a:spcAft>
-            </a:pPr>
-            <a:r>
-              <a:rPr sz="1050" b="0">
+              <a:t>做到了：问题带领域手艺</a:t>
+            </a:r>
+          </a:p>
+          <a:p>
+            <a:pPr>
+              <a:spcAft>
+                <a:spcPts val="900"/>
+              </a:spcAft>
+            </a:pPr>
+            <a:r>
+              <a:rPr sz="1150" b="0">
                 <a:solidFill>
                   <a:srgbClr val="4A4F57"/>
                 </a:solidFill>
@@ -6880,10 +7712,10 @@
                 <a:ea typeface="Microsoft YaHei"/>
                 <a:cs typeface="Microsoft YaHei"/>
               </a:rPr>
-              <a:t>专门提「机器结算不了」的问题——</a:t>
-            </a:r>
-            <a:r>
-              <a:rPr sz="1050" b="1">
+              <a:t>候选 1 问不同甜味剂</a:t>
+            </a:r>
+            <a:r>
+              <a:rPr sz="1150" b="1">
                 <a:solidFill>
                   <a:srgbClr val="2F6B6B"/>
                 </a:solidFill>
@@ -6891,10 +7723,10 @@
                 <a:ea typeface="Microsoft YaHei"/>
                 <a:cs typeface="Microsoft YaHei"/>
               </a:rPr>
-              <a:t>只提自己答不出的</a:t>
-            </a:r>
-            <a:r>
-              <a:rPr sz="1050" b="0">
+              <a:t>种类</a:t>
+            </a:r>
+            <a:r>
+              <a:rPr sz="1150" b="0">
                 <a:solidFill>
                   <a:srgbClr val="4A4F57"/>
                 </a:solidFill>
@@ -6902,7 +7734,29 @@
                 <a:ea typeface="Microsoft YaHei"/>
                 <a:cs typeface="Microsoft YaHei"/>
               </a:rPr>
-              <a:t>。</a:t>
+              <a:t>的差异，候选 2 问 24 小时膳食回顾的</a:t>
+            </a:r>
+            <a:r>
+              <a:rPr sz="1150" b="1">
+                <a:solidFill>
+                  <a:srgbClr val="2F6B6B"/>
+                </a:solidFill>
+                <a:latin typeface="Segoe UI"/>
+                <a:ea typeface="Microsoft YaHei"/>
+                <a:cs typeface="Microsoft YaHei"/>
+              </a:rPr>
+              <a:t>时间滞后</a:t>
+            </a:r>
+            <a:r>
+              <a:rPr sz="1150" b="0">
+                <a:solidFill>
+                  <a:srgbClr val="4A4F57"/>
+                </a:solidFill>
+                <a:latin typeface="Segoe UI"/>
+                <a:ea typeface="Microsoft YaHei"/>
+                <a:cs typeface="Microsoft YaHei"/>
+              </a:rPr>
+              <a:t>——这两条都是流行病学方法学里的真问题，不是泛泛而谈。</a:t>
             </a:r>
           </a:p>
           <a:p>
@@ -6912,7 +7766,7 @@
               </a:spcAft>
             </a:pPr>
             <a:r>
-              <a:rPr sz="1150" b="1">
+              <a:rPr sz="1250" b="1">
                 <a:solidFill>
                   <a:srgbClr val="16191D"/>
                 </a:solidFill>
@@ -6920,17 +7774,17 @@
                 <a:ea typeface="SimSun"/>
                 <a:cs typeface="SimSun"/>
               </a:rPr>
-              <a:t>问题树</a:t>
-            </a:r>
-          </a:p>
-          <a:p>
-            <a:pPr>
-              <a:spcAft>
-                <a:spcPts val="800"/>
-              </a:spcAft>
-            </a:pPr>
-            <a:r>
-              <a:rPr sz="1050" b="0">
+              <a:t>边界一：只有生物医学</a:t>
+            </a:r>
+          </a:p>
+          <a:p>
+            <a:pPr>
+              <a:spcAft>
+                <a:spcPts val="900"/>
+              </a:spcAft>
+            </a:pPr>
+            <a:r>
+              <a:rPr sz="1150" b="0">
                 <a:solidFill>
                   <a:srgbClr val="4A4F57"/>
                 </a:solidFill>
@@ -6938,7 +7792,29 @@
                 <a:ea typeface="Microsoft YaHei"/>
                 <a:cs typeface="Microsoft YaHei"/>
               </a:rPr>
-              <a:t>L0–L5 分层 + 谱系门：每爬一层必须机器实测。</a:t>
+              <a:t>目前</a:t>
+            </a:r>
+            <a:r>
+              <a:rPr sz="1150" b="1">
+                <a:solidFill>
+                  <a:srgbClr val="2F6B6B"/>
+                </a:solidFill>
+                <a:latin typeface="Segoe UI"/>
+                <a:ea typeface="Microsoft YaHei"/>
+                <a:cs typeface="Microsoft YaHei"/>
+              </a:rPr>
+              <a:t>领域限制于生物医学</a:t>
+            </a:r>
+            <a:r>
+              <a:rPr sz="1150" b="0">
+                <a:solidFill>
+                  <a:srgbClr val="4A4F57"/>
+                </a:solidFill>
+                <a:latin typeface="Segoe UI"/>
+                <a:ea typeface="Microsoft YaHei"/>
+                <a:cs typeface="Microsoft YaHei"/>
+              </a:rPr>
+              <a:t>，靠的是领域语料与后训练；换领域需要重新做数据与训练。</a:t>
             </a:r>
           </a:p>
           <a:p>
@@ -6948,7 +7824,7 @@
               </a:spcAft>
             </a:pPr>
             <a:r>
-              <a:rPr sz="1150" b="1">
+              <a:rPr sz="1250" b="1">
                 <a:solidFill>
                   <a:srgbClr val="16191D"/>
                 </a:solidFill>
@@ -6956,17 +7832,17 @@
                 <a:ea typeface="SimSun"/>
                 <a:cs typeface="SimSun"/>
               </a:rPr>
-              <a:t>入口多样</a:t>
-            </a:r>
-          </a:p>
-          <a:p>
-            <a:pPr>
-              <a:spcAft>
-                <a:spcPts val="800"/>
-              </a:spcAft>
-            </a:pPr>
-            <a:r>
-              <a:rPr sz="1050" b="0">
+              <a:t>边界二：它只提问，不判定</a:t>
+            </a:r>
+          </a:p>
+          <a:p>
+            <a:pPr>
+              <a:spcAft>
+                <a:spcPts val="900"/>
+              </a:spcAft>
+            </a:pPr>
+            <a:r>
+              <a:rPr sz="1150" b="0">
                 <a:solidFill>
                   <a:srgbClr val="4A4F57"/>
                 </a:solidFill>
@@ -6974,14 +7850,36 @@
                 <a:ea typeface="Microsoft YaHei"/>
                 <a:cs typeface="Microsoft YaHei"/>
               </a:rPr>
-              <a:t>外部信息（网页 / arXiv / 科学史）· 日常疑问 · 母题，都能成为问题的种子。</a:t>
-            </a:r>
-          </a:p>
-        </p:txBody>
-      </p:sp>
-      <p:sp>
-        <p:nvSpPr>
-          <p:cNvPr id="8" name="Rectangle 7"/>
+              <a:t>模型负责「问得好」，</a:t>
+            </a:r>
+            <a:r>
+              <a:rPr sz="1150" b="1">
+                <a:solidFill>
+                  <a:srgbClr val="2F6B6B"/>
+                </a:solidFill>
+                <a:latin typeface="Segoe UI"/>
+                <a:ea typeface="Microsoft YaHei"/>
+                <a:cs typeface="Microsoft YaHei"/>
+              </a:rPr>
+              <a:t>判定交给判定器与人类</a:t>
+            </a:r>
+            <a:r>
+              <a:rPr sz="1150" b="0">
+                <a:solidFill>
+                  <a:srgbClr val="4A4F57"/>
+                </a:solidFill>
+                <a:latin typeface="Segoe UI"/>
+                <a:ea typeface="Microsoft YaHei"/>
+                <a:cs typeface="Microsoft YaHei"/>
+              </a:rPr>
+              <a:t>——它产出的候选仍需过四道门，不能自称发现。</a:t>
+            </a:r>
+          </a:p>
+        </p:txBody>
+      </p:sp>
+      <p:sp>
+        <p:nvSpPr>
+          <p:cNvPr id="6" name="Rectangle 5"/>
           <p:cNvSpPr/>
           <p:nvPr/>
         </p:nvSpPr>
@@ -7025,7 +7923,7 @@
       </p:sp>
       <p:sp>
         <p:nvSpPr>
-          <p:cNvPr id="9" name="TextBox 8"/>
+          <p:cNvPr id="7" name="TextBox 6"/>
           <p:cNvSpPr txBox="1"/>
           <p:nvPr/>
         </p:nvSpPr>
@@ -7059,7 +7957,7 @@
                 <a:ea typeface="Microsoft YaHei"/>
                 <a:cs typeface="Microsoft YaHei"/>
               </a:rPr>
-              <a:t>产物：</a:t>
+              <a:t>分工：</a:t>
             </a:r>
             <a:r>
               <a:rPr sz="1000" b="1">
@@ -7070,7 +7968,7 @@
                 <a:ea typeface="Microsoft YaHei"/>
                 <a:cs typeface="Microsoft YaHei"/>
               </a:rPr>
-              <a:t>out/demo/discovery_manifest.json</a:t>
+              <a:t>模型提问题 → 判定层筛真假 → 人类裁决要不要投入</a:t>
             </a:r>
             <a:r>
               <a:rPr sz="1000" b="0">
@@ -7081,14 +7979,14 @@
                 <a:ea typeface="Microsoft YaHei"/>
                 <a:cs typeface="Microsoft YaHei"/>
               </a:rPr>
-              <a:t>（544 条，字段含 daily_question → scientific_question → judge_route）。</a:t>
-            </a:r>
-          </a:p>
-        </p:txBody>
-      </p:sp>
-      <p:sp>
-        <p:nvSpPr>
-          <p:cNvPr id="10" name="TextBox 9"/>
+              <a:t>。这也是为什么 N3 仍为 0：会提问不等于发现了世界新知识。</a:t>
+            </a:r>
+          </a:p>
+        </p:txBody>
+      </p:sp>
+      <p:sp>
+        <p:nvSpPr>
+          <p:cNvPr id="8" name="TextBox 7"/>
           <p:cNvSpPr txBox="1"/>
           <p:nvPr/>
         </p:nvSpPr>
@@ -7122,7 +8020,7 @@
                 <a:ea typeface="Microsoft YaHei"/>
                 <a:cs typeface="Microsoft YaHei"/>
               </a:rPr>
-              <a:t>16 / 24</a:t>
+              <a:t>16 / 26</a:t>
             </a:r>
           </a:p>
         </p:txBody>
@@ -7189,7 +8087,7 @@
                 <a:ea typeface="Microsoft YaHei"/>
                 <a:cs typeface="Microsoft YaHei"/>
               </a:rPr>
-              <a:t>四、扩展的实践 · 独立裁决</a:t>
+              <a:t>四、扩展的实践 · 想象路</a:t>
             </a:r>
           </a:p>
         </p:txBody>
@@ -7230,7 +8128,7 @@
                 <a:ea typeface="SimSun"/>
                 <a:cs typeface="SimSun"/>
               </a:rPr>
-              <a:t>独立裁决：15 个进制命题的判决</a:t>
+              <a:t>另一条路：把「造词」做成能跑完的流水线</a:t>
             </a:r>
           </a:p>
         </p:txBody>
@@ -7271,7 +8169,7 @@
                 <a:ea typeface="Microsoft YaHei"/>
                 <a:cs typeface="Microsoft YaHei"/>
               </a:rPr>
-              <a:t>这是全项目里最像「新知识」的一类产出，判据是</a:t>
+              <a:t>想象路不是问题路的子功能，而是与它</a:t>
             </a:r>
             <a:r>
               <a:rPr sz="1200" b="1">
@@ -7282,7 +8180,7 @@
                 <a:ea typeface="Microsoft YaHei"/>
                 <a:cs typeface="Microsoft YaHei"/>
               </a:rPr>
-              <a:t>数值汇合</a:t>
+              <a:t>并列的一条路</a:t>
             </a:r>
             <a:r>
               <a:rPr sz="1200" b="0">
@@ -7293,14 +8191,36 @@
                 <a:ea typeface="Microsoft YaHei"/>
                 <a:cs typeface="Microsoft YaHei"/>
               </a:rPr>
-              <a:t>，不是证明。换一套实现重算，结果必须一致。</a:t>
+              <a:t>。6,642 个领域专业词组合，每个都要走完五步，产出的是</a:t>
+            </a:r>
+            <a:r>
+              <a:rPr sz="1200" b="1">
+                <a:solidFill>
+                  <a:srgbClr val="2F6B6B"/>
+                </a:solidFill>
+                <a:latin typeface="Segoe UI"/>
+                <a:ea typeface="Microsoft YaHei"/>
+                <a:cs typeface="Microsoft YaHei"/>
+              </a:rPr>
+              <a:t>被理解的概念</a:t>
+            </a:r>
+            <a:r>
+              <a:rPr sz="1200" b="0">
+                <a:solidFill>
+                  <a:srgbClr val="4A4F57"/>
+                </a:solidFill>
+                <a:latin typeface="Segoe UI"/>
+                <a:ea typeface="Microsoft YaHei"/>
+                <a:cs typeface="Microsoft YaHei"/>
+              </a:rPr>
+              <a:t>。</a:t>
             </a:r>
           </a:p>
         </p:txBody>
       </p:sp>
       <p:pic>
         <p:nvPicPr>
-          <p:cNvPr id="5" name="Picture 4" descr="fig_harness.png"/>
+          <p:cNvPr id="5" name="Picture 4" descr="fig_pipeline5.png"/>
           <p:cNvPicPr>
             <a:picLocks noChangeAspect="1"/>
           </p:cNvPicPr>
@@ -7314,8 +8234,8 @@
         </p:blipFill>
         <p:spPr>
           <a:xfrm>
-            <a:off x="685800" y="2670048"/>
-            <a:ext cx="4148658" cy="2414016"/>
+            <a:off x="1439967" y="2670048"/>
+            <a:ext cx="9309017" cy="2414016"/>
           </a:xfrm>
           <a:prstGeom prst="rect">
             <a:avLst/>
@@ -7330,8 +8250,8 @@
         </p:nvSpPr>
         <p:spPr>
           <a:xfrm>
-            <a:off x="685800" y="5166360"/>
-            <a:ext cx="5623560" cy="548640"/>
+            <a:off x="685800" y="5175504"/>
+            <a:ext cx="10817352" cy="548640"/>
           </a:xfrm>
           <a:prstGeom prst="rect">
             <a:avLst/>
@@ -7358,7 +8278,7 @@
                 <a:ea typeface="Microsoft YaHei"/>
                 <a:cs typeface="Microsoft YaHei"/>
               </a:rPr>
-              <a:t>青 confirmed 13（例外集在 N1 档不再新增）· 青铜 open 1（例外仍在冒）· 朱砂 rejected 1（出现新例外）——</a:t>
+              <a:t>五步流水线。原则：</a:t>
             </a:r>
             <a:r>
               <a:rPr sz="900" b="1">
@@ -7369,7 +8289,7 @@
                 <a:ea typeface="Microsoft YaHei"/>
                 <a:cs typeface="Microsoft YaHei"/>
               </a:rPr>
-              <a:t>机器自己否掉了自己的命题</a:t>
+              <a:t>每个词都有意义，只不过是我们缺少想象力，无法理解它</a:t>
             </a:r>
             <a:r>
               <a:rPr sz="900" b="0">
@@ -7380,247 +8300,14 @@
                 <a:ea typeface="Microsoft YaHei"/>
                 <a:cs typeface="Microsoft YaHei"/>
               </a:rPr>
-              <a:t>。</a:t>
-            </a:r>
-          </a:p>
-        </p:txBody>
-      </p:sp>
-      <p:sp>
-        <p:nvSpPr>
-          <p:cNvPr id="7" name="TextBox 6"/>
-          <p:cNvSpPr txBox="1"/>
-          <p:nvPr/>
-        </p:nvSpPr>
-        <p:spPr>
-          <a:xfrm>
-            <a:off x="6629400" y="2624328"/>
-            <a:ext cx="4873752" cy="3566160"/>
-          </a:xfrm>
-          <a:prstGeom prst="rect">
-            <a:avLst/>
-          </a:prstGeom>
-          <a:noFill/>
-        </p:spPr>
-        <p:txBody>
-          <a:bodyPr wrap="square">
-            <a:spAutoFit/>
-          </a:bodyPr>
-          <a:lstStyle/>
-          <a:p>
-            <a:pPr>
-              <a:spcAft>
-                <a:spcPts val="100"/>
-              </a:spcAft>
-            </a:pPr>
-            <a:r>
-              <a:rPr sz="1150" b="1">
-                <a:solidFill>
-                  <a:srgbClr val="16191D"/>
-                </a:solidFill>
-                <a:latin typeface="Source Han Serif SC"/>
-                <a:ea typeface="SimSun"/>
-                <a:cs typeface="SimSun"/>
-              </a:rPr>
-              <a:t>命题</a:t>
-            </a:r>
-          </a:p>
-          <a:p>
-            <a:pPr>
-              <a:spcAft>
-                <a:spcPts val="800"/>
-              </a:spcAft>
-            </a:pPr>
-            <a:r>
-              <a:rPr sz="1050" b="0">
-                <a:solidFill>
-                  <a:srgbClr val="4A4F57"/>
-                </a:solidFill>
-                <a:latin typeface="Segoe UI"/>
-                <a:ea typeface="Microsoft YaHei"/>
-                <a:cs typeface="Microsoft YaHei"/>
-              </a:rPr>
-              <a:t>每个 n ≥ 4 可写为 base-b 回文数 + 素数；b ≥ 4 时例外集有限且很小。</a:t>
-            </a:r>
-          </a:p>
-          <a:p>
-            <a:pPr>
-              <a:spcAft>
-                <a:spcPts val="100"/>
-              </a:spcAft>
-            </a:pPr>
-            <a:r>
-              <a:rPr sz="1150" b="1">
-                <a:solidFill>
-                  <a:srgbClr val="16191D"/>
-                </a:solidFill>
-                <a:latin typeface="Source Han Serif SC"/>
-                <a:ea typeface="SimSun"/>
-                <a:cs typeface="SimSun"/>
-              </a:rPr>
-              <a:t>判据</a:t>
-            </a:r>
-          </a:p>
-          <a:p>
-            <a:pPr>
-              <a:spcAft>
-                <a:spcPts val="800"/>
-              </a:spcAft>
-            </a:pPr>
-            <a:r>
-              <a:rPr sz="1050" b="0">
-                <a:solidFill>
-                  <a:srgbClr val="4A4F57"/>
-                </a:solidFill>
-                <a:latin typeface="Segoe UI"/>
-                <a:ea typeface="Microsoft YaHei"/>
-                <a:cs typeface="Microsoft YaHei"/>
-              </a:rPr>
-              <a:t>N0 = 5×10⁶ → N1 = 10⁷，两档的例外集是否汇合、有没有冒出新例外。</a:t>
-            </a:r>
-          </a:p>
-          <a:p>
-            <a:pPr>
-              <a:spcAft>
-                <a:spcPts val="100"/>
-              </a:spcAft>
-            </a:pPr>
-            <a:r>
-              <a:rPr sz="1150" b="1">
-                <a:solidFill>
-                  <a:srgbClr val="16191D"/>
-                </a:solidFill>
-                <a:latin typeface="Source Han Serif SC"/>
-                <a:ea typeface="SimSun"/>
-                <a:cs typeface="SimSun"/>
-              </a:rPr>
-              <a:t>边界推进</a:t>
-            </a:r>
-          </a:p>
-          <a:p>
-            <a:pPr>
-              <a:spcAft>
-                <a:spcPts val="800"/>
-              </a:spcAft>
-            </a:pPr>
-            <a:r>
-              <a:rPr sz="1050" b="0">
-                <a:solidFill>
-                  <a:srgbClr val="4A4F57"/>
-                </a:solidFill>
-                <a:latin typeface="Segoe UI"/>
-                <a:ea typeface="Microsoft YaHei"/>
-                <a:cs typeface="Microsoft YaHei"/>
-              </a:rPr>
-              <a:t>base 10 推到 </a:t>
-            </a:r>
-            <a:r>
-              <a:rPr sz="1050" b="1">
-                <a:solidFill>
-                  <a:srgbClr val="2F6B6B"/>
-                </a:solidFill>
-                <a:latin typeface="Segoe UI"/>
-                <a:ea typeface="Microsoft YaHei"/>
-                <a:cs typeface="Microsoft YaHei"/>
-              </a:rPr>
-              <a:t>10⁸ 零例外</a:t>
-            </a:r>
-            <a:r>
-              <a:rPr sz="1050" b="0">
-                <a:solidFill>
-                  <a:srgbClr val="4A4F57"/>
-                </a:solidFill>
-                <a:latin typeface="Segoe UI"/>
-                <a:ea typeface="Microsoft YaHei"/>
-                <a:cs typeface="Microsoft YaHei"/>
-              </a:rPr>
-              <a:t>（人类讨论此前止于 ~10⁶），两种独立实现交叉验证。</a:t>
-            </a:r>
-          </a:p>
-          <a:p>
-            <a:pPr>
-              <a:spcAft>
-                <a:spcPts val="100"/>
-              </a:spcAft>
-            </a:pPr>
-            <a:r>
-              <a:rPr sz="1150" b="1">
-                <a:solidFill>
-                  <a:srgbClr val="16191D"/>
-                </a:solidFill>
-                <a:latin typeface="Source Han Serif SC"/>
-                <a:ea typeface="SimSun"/>
-                <a:cs typeface="SimSun"/>
-              </a:rPr>
-              <a:t>自我更正</a:t>
-            </a:r>
-          </a:p>
-          <a:p>
-            <a:pPr>
-              <a:spcAft>
-                <a:spcPts val="800"/>
-              </a:spcAft>
-            </a:pPr>
-            <a:r>
-              <a:rPr sz="1050" b="0">
-                <a:solidFill>
-                  <a:srgbClr val="4A4F57"/>
-                </a:solidFill>
-                <a:latin typeface="Segoe UI"/>
-                <a:ea typeface="Microsoft YaHei"/>
-                <a:cs typeface="Microsoft YaHei"/>
-              </a:rPr>
-              <a:t>旧账本曾记 base 4 有 20 万个例外，真值 </a:t>
-            </a:r>
-            <a:r>
-              <a:rPr sz="1050" b="1">
-                <a:solidFill>
-                  <a:srgbClr val="2F6B6B"/>
-                </a:solidFill>
-                <a:latin typeface="Segoe UI"/>
-                <a:ea typeface="Microsoft YaHei"/>
-                <a:cs typeface="Microsoft YaHei"/>
-              </a:rPr>
-              <a:t>5</a:t>
-            </a:r>
-            <a:r>
-              <a:rPr sz="1050" b="0">
-                <a:solidFill>
-                  <a:srgbClr val="4A4F57"/>
-                </a:solidFill>
-                <a:latin typeface="Segoe UI"/>
-                <a:ea typeface="Microsoft YaHei"/>
-                <a:cs typeface="Microsoft YaHei"/>
-              </a:rPr>
-              <a:t>——</a:t>
-            </a:r>
-            <a:r>
-              <a:rPr sz="1050" b="1">
-                <a:solidFill>
-                  <a:srgbClr val="2F6B6B"/>
-                </a:solidFill>
-                <a:latin typeface="Segoe UI"/>
-                <a:ea typeface="Microsoft YaHei"/>
-                <a:cs typeface="Microsoft YaHei"/>
-              </a:rPr>
-              <a:t>错的是账本，不是结论</a:t>
-            </a:r>
-            <a:r>
-              <a:rPr sz="1050" b="0">
-                <a:solidFill>
-                  <a:srgbClr val="4A4F57"/>
-                </a:solidFill>
-                <a:latin typeface="Segoe UI"/>
-                <a:ea typeface="Microsoft YaHei"/>
-                <a:cs typeface="Microsoft YaHei"/>
-              </a:rPr>
-              <a:t>，并出更正页。</a:t>
-            </a:r>
-          </a:p>
-        </p:txBody>
-      </p:sp>
-      <p:sp>
-        <p:nvSpPr>
-          <p:cNvPr id="8" name="Rectangle 7"/>
+              <a:t>——因此不存在空想。</a:t>
+            </a:r>
+          </a:p>
+        </p:txBody>
+      </p:sp>
+      <p:sp>
+        <p:nvSpPr>
+          <p:cNvPr id="7" name="Rectangle 6"/>
           <p:cNvSpPr/>
           <p:nvPr/>
         </p:nvSpPr>
@@ -7664,7 +8351,7 @@
       </p:sp>
       <p:sp>
         <p:nvSpPr>
-          <p:cNvPr id="9" name="TextBox 8"/>
+          <p:cNvPr id="8" name="TextBox 7"/>
           <p:cNvSpPr txBox="1"/>
           <p:nvPr/>
         </p:nvSpPr>
@@ -7698,7 +8385,7 @@
                 <a:ea typeface="Microsoft YaHei"/>
                 <a:cs typeface="Microsoft YaHei"/>
               </a:rPr>
-              <a:t>分级：N0 已知 → N1 大概率已知 → N2 疑似未见 → N3 世界新。</a:t>
+              <a:t>版本线：v0.2 产品 → </a:t>
             </a:r>
             <a:r>
               <a:rPr sz="1000" b="1">
@@ -7709,14 +8396,25 @@
                 <a:ea typeface="Microsoft YaHei"/>
                 <a:cs typeface="Microsoft YaHei"/>
               </a:rPr>
-              <a:t>N3 至今仍为 0。</a:t>
-            </a:r>
-          </a:p>
-        </p:txBody>
-      </p:sp>
-      <p:sp>
-        <p:nvSpPr>
-          <p:cNvPr id="10" name="TextBox 9"/>
+              <a:t>v0.3.0 两条路</a:t>
+            </a:r>
+            <a:r>
+              <a:rPr sz="1000" b="0">
+                <a:solidFill>
+                  <a:srgbClr val="6B7078"/>
+                </a:solidFill>
+                <a:latin typeface="Segoe UI"/>
+                <a:ea typeface="Microsoft YaHei"/>
+                <a:cs typeface="Microsoft YaHei"/>
+              </a:rPr>
+              <a:t> → v0.3.1 可视化/README → v0.4 问题树 → v0.5（问道）。</a:t>
+            </a:r>
+          </a:p>
+        </p:txBody>
+      </p:sp>
+      <p:sp>
+        <p:nvSpPr>
+          <p:cNvPr id="9" name="TextBox 8"/>
           <p:cNvSpPr txBox="1"/>
           <p:nvPr/>
         </p:nvSpPr>
@@ -7750,7 +8448,7 @@
                 <a:ea typeface="Microsoft YaHei"/>
                 <a:cs typeface="Microsoft YaHei"/>
               </a:rPr>
-              <a:t>17 / 24</a:t>
+              <a:t>17 / 26</a:t>
             </a:r>
           </a:p>
         </p:txBody>
@@ -7817,7 +8515,7 @@
                 <a:ea typeface="Microsoft YaHei"/>
                 <a:cs typeface="Microsoft YaHei"/>
               </a:rPr>
-              <a:t>四、扩展的实践 · 经验</a:t>
+              <a:t>四、扩展的实践 · 问题路规模化</a:t>
             </a:r>
           </a:p>
         </p:txBody>
@@ -7858,7 +8556,7 @@
                 <a:ea typeface="SimSun"/>
                 <a:cs typeface="SimSun"/>
               </a:rPr>
-              <a:t>系统侧学到的两件事</a:t>
+              <a:t>问题路：544 条问题覆盖 23 个领域</a:t>
             </a:r>
           </a:p>
         </p:txBody>
@@ -7899,21 +8597,67 @@
                 <a:ea typeface="Microsoft YaHei"/>
                 <a:cs typeface="Microsoft YaHei"/>
               </a:rPr>
-              <a:t>这两条都是「机器自己试出来」的，而不是从外部抄来的方法论。</a:t>
-            </a:r>
-          </a:p>
-        </p:txBody>
-      </p:sp>
-      <p:sp>
-        <p:nvSpPr>
-          <p:cNvPr id="5" name="TextBox 4"/>
+              <a:t>这一代把「提问题」从零散试探变成</a:t>
+            </a:r>
+            <a:r>
+              <a:rPr sz="1200" b="1">
+                <a:solidFill>
+                  <a:srgbClr val="2F6B6B"/>
+                </a:solidFill>
+                <a:latin typeface="Segoe UI"/>
+                <a:ea typeface="Microsoft YaHei"/>
+                <a:cs typeface="Microsoft YaHei"/>
+              </a:rPr>
+              <a:t>全领域并行扫描 + 分层问题树</a:t>
+            </a:r>
+            <a:r>
+              <a:rPr sz="1200" b="0">
+                <a:solidFill>
+                  <a:srgbClr val="4A4F57"/>
+                </a:solidFill>
+                <a:latin typeface="Segoe UI"/>
+                <a:ea typeface="Microsoft YaHei"/>
+                <a:cs typeface="Microsoft YaHei"/>
+              </a:rPr>
+              <a:t>，并第一次有了独立的裁决环节。</a:t>
+            </a:r>
+          </a:p>
+        </p:txBody>
+      </p:sp>
+      <p:pic>
+        <p:nvPicPr>
+          <p:cNvPr id="5" name="Picture 4" descr="fig_domains.png"/>
+          <p:cNvPicPr>
+            <a:picLocks noChangeAspect="1"/>
+          </p:cNvPicPr>
+          <p:nvPr/>
+        </p:nvPicPr>
+        <p:blipFill>
+          <a:blip r:embed="rId2"/>
+          <a:stretch>
+            <a:fillRect/>
+          </a:stretch>
+        </p:blipFill>
+        <p:spPr>
+          <a:xfrm>
+            <a:off x="685800" y="2670048"/>
+            <a:ext cx="3136529" cy="2414016"/>
+          </a:xfrm>
+          <a:prstGeom prst="rect">
+            <a:avLst/>
+          </a:prstGeom>
+        </p:spPr>
+      </p:pic>
+      <p:sp>
+        <p:nvSpPr>
+          <p:cNvPr id="6" name="TextBox 5"/>
           <p:cNvSpPr txBox="1"/>
           <p:nvPr/>
         </p:nvSpPr>
         <p:spPr>
           <a:xfrm>
-            <a:off x="685800" y="2670048"/>
-            <a:ext cx="10607040" cy="3474720"/>
+            <a:off x="685800" y="5166360"/>
+            <a:ext cx="5623560" cy="548640"/>
           </a:xfrm>
           <a:prstGeom prst="rect">
             <a:avLst/>
@@ -7928,11 +8672,52 @@
           <a:p>
             <a:pPr>
               <a:spcAft>
+                <a:spcPts val="0"/>
+              </a:spcAft>
+            </a:pPr>
+            <a:r>
+              <a:rPr sz="900" b="0">
+                <a:solidFill>
+                  <a:srgbClr val="6B7078"/>
+                </a:solidFill>
+                <a:latin typeface="Segoe UI"/>
+                <a:ea typeface="Microsoft YaHei"/>
+                <a:cs typeface="Microsoft YaHei"/>
+              </a:rPr>
+              <a:t>544 条问题的领域分布（条数最多的前 14 个领域）。朱砂标出的是与生物 / 医学相关的领域。</a:t>
+            </a:r>
+          </a:p>
+        </p:txBody>
+      </p:sp>
+      <p:sp>
+        <p:nvSpPr>
+          <p:cNvPr id="7" name="TextBox 6"/>
+          <p:cNvSpPr txBox="1"/>
+          <p:nvPr/>
+        </p:nvSpPr>
+        <p:spPr>
+          <a:xfrm>
+            <a:off x="6629400" y="2624328"/>
+            <a:ext cx="4873752" cy="3566160"/>
+          </a:xfrm>
+          <a:prstGeom prst="rect">
+            <a:avLst/>
+          </a:prstGeom>
+          <a:noFill/>
+        </p:spPr>
+        <p:txBody>
+          <a:bodyPr wrap="square">
+            <a:spAutoFit/>
+          </a:bodyPr>
+          <a:lstStyle/>
+          <a:p>
+            <a:pPr>
+              <a:spcAft>
                 <a:spcPts val="100"/>
               </a:spcAft>
             </a:pPr>
             <a:r>
-              <a:rPr sz="1250" b="1">
+              <a:rPr sz="1150" b="1">
                 <a:solidFill>
                   <a:srgbClr val="16191D"/>
                 </a:solidFill>
@@ -7940,17 +8725,17 @@
                 <a:ea typeface="SimSun"/>
                 <a:cs typeface="SimSun"/>
               </a:rPr>
-              <a:t>① 独立实现比自证更有用</a:t>
-            </a:r>
-          </a:p>
-          <a:p>
-            <a:pPr>
-              <a:spcAft>
-                <a:spcPts val="900"/>
-              </a:spcAft>
-            </a:pPr>
-            <a:r>
-              <a:rPr sz="1150" b="0">
+              <a:t>全领域扫描</a:t>
+            </a:r>
+          </a:p>
+          <a:p>
+            <a:pPr>
+              <a:spcAft>
+                <a:spcPts val="800"/>
+              </a:spcAft>
+            </a:pPr>
+            <a:r>
+              <a:rPr sz="1050" b="0">
                 <a:solidFill>
                   <a:srgbClr val="4A4F57"/>
                 </a:solidFill>
@@ -7958,39 +8743,17 @@
                 <a:ea typeface="Microsoft YaHei"/>
                 <a:cs typeface="Microsoft YaHei"/>
               </a:rPr>
-              <a:t>同一命题换一套实现重算（另写 FFT 版本复算 base 3–47），</a:t>
-            </a:r>
+              <a:t>领域引擎并行产出，每个领域一份问题清单。</a:t>
+            </a:r>
+          </a:p>
+          <a:p>
+            <a:pPr>
+              <a:spcAft>
+                <a:spcPts val="100"/>
+              </a:spcAft>
+            </a:pPr>
             <a:r>
               <a:rPr sz="1150" b="1">
-                <a:solidFill>
-                  <a:srgbClr val="2F6B6B"/>
-                </a:solidFill>
-                <a:latin typeface="Segoe UI"/>
-                <a:ea typeface="Microsoft YaHei"/>
-                <a:cs typeface="Microsoft YaHei"/>
-              </a:rPr>
-              <a:t>b=3 的 68 个例外清单逐项一致</a:t>
-            </a:r>
-            <a:r>
-              <a:rPr sz="1150" b="0">
-                <a:solidFill>
-                  <a:srgbClr val="4A4F57"/>
-                </a:solidFill>
-                <a:latin typeface="Segoe UI"/>
-                <a:ea typeface="Microsoft YaHei"/>
-                <a:cs typeface="Microsoft YaHei"/>
-              </a:rPr>
-              <a:t>才敢认。自证只能发现笔误，换实现能发现口径错。</a:t>
-            </a:r>
-          </a:p>
-          <a:p>
-            <a:pPr>
-              <a:spcAft>
-                <a:spcPts val="100"/>
-              </a:spcAft>
-            </a:pPr>
-            <a:r>
-              <a:rPr sz="1250" b="1">
                 <a:solidFill>
                   <a:srgbClr val="16191D"/>
                 </a:solidFill>
@@ -7998,17 +8761,17 @@
                 <a:ea typeface="SimSun"/>
                 <a:cs typeface="SimSun"/>
               </a:rPr>
-              <a:t>② 账本必须可作废</a:t>
-            </a:r>
-          </a:p>
-          <a:p>
-            <a:pPr>
-              <a:spcAft>
-                <a:spcPts val="900"/>
-              </a:spcAft>
-            </a:pPr>
-            <a:r>
-              <a:rPr sz="1150" b="0">
+              <a:t>反例驱动</a:t>
+            </a:r>
+          </a:p>
+          <a:p>
+            <a:pPr>
+              <a:spcAft>
+                <a:spcPts val="800"/>
+              </a:spcAft>
+            </a:pPr>
+            <a:r>
+              <a:rPr sz="1050" b="0">
                 <a:solidFill>
                   <a:srgbClr val="4A4F57"/>
                 </a:solidFill>
@@ -8016,21 +8779,57 @@
                 <a:ea typeface="Microsoft YaHei"/>
                 <a:cs typeface="Microsoft YaHei"/>
               </a:rPr>
-              <a:t>旧账本记 base 4 有 20 万个例外，真值是 5。</a:t>
-            </a:r>
+              <a:t>专门提「机器结算不了」的问题——</a:t>
+            </a:r>
+            <a:r>
+              <a:rPr sz="1050" b="1">
+                <a:solidFill>
+                  <a:srgbClr val="2F6B6B"/>
+                </a:solidFill>
+                <a:latin typeface="Segoe UI"/>
+                <a:ea typeface="Microsoft YaHei"/>
+                <a:cs typeface="Microsoft YaHei"/>
+              </a:rPr>
+              <a:t>只提自己答不出的</a:t>
+            </a:r>
+            <a:r>
+              <a:rPr sz="1050" b="0">
+                <a:solidFill>
+                  <a:srgbClr val="4A4F57"/>
+                </a:solidFill>
+                <a:latin typeface="Segoe UI"/>
+                <a:ea typeface="Microsoft YaHei"/>
+                <a:cs typeface="Microsoft YaHei"/>
+              </a:rPr>
+              <a:t>。</a:t>
+            </a:r>
+          </a:p>
+          <a:p>
+            <a:pPr>
+              <a:spcAft>
+                <a:spcPts val="100"/>
+              </a:spcAft>
+            </a:pPr>
             <a:r>
               <a:rPr sz="1150" b="1">
                 <a:solidFill>
-                  <a:srgbClr val="2F6B6B"/>
-                </a:solidFill>
-                <a:latin typeface="Segoe UI"/>
-                <a:ea typeface="Microsoft YaHei"/>
-                <a:cs typeface="Microsoft YaHei"/>
-              </a:rPr>
-              <a:t>记错账比算错数更危险</a:t>
-            </a:r>
-            <a:r>
-              <a:rPr sz="1150" b="0">
+                  <a:srgbClr val="16191D"/>
+                </a:solidFill>
+                <a:latin typeface="Source Han Serif SC"/>
+                <a:ea typeface="SimSun"/>
+                <a:cs typeface="SimSun"/>
+              </a:rPr>
+              <a:t>问题树</a:t>
+            </a:r>
+          </a:p>
+          <a:p>
+            <a:pPr>
+              <a:spcAft>
+                <a:spcPts val="800"/>
+              </a:spcAft>
+            </a:pPr>
+            <a:r>
+              <a:rPr sz="1050" b="0">
                 <a:solidFill>
                   <a:srgbClr val="4A4F57"/>
                 </a:solidFill>
@@ -8038,21 +8837,35 @@
                 <a:ea typeface="Microsoft YaHei"/>
                 <a:cs typeface="Microsoft YaHei"/>
               </a:rPr>
-              <a:t>——所以有了 </a:t>
-            </a:r>
+              <a:t>L0–L5 分层 + 谱系门：每爬一层必须机器实测。</a:t>
+            </a:r>
+          </a:p>
+          <a:p>
+            <a:pPr>
+              <a:spcAft>
+                <a:spcPts val="100"/>
+              </a:spcAft>
+            </a:pPr>
             <a:r>
               <a:rPr sz="1150" b="1">
                 <a:solidFill>
-                  <a:srgbClr val="2F6B6B"/>
-                </a:solidFill>
-                <a:latin typeface="Segoe UI"/>
-                <a:ea typeface="Microsoft YaHei"/>
-                <a:cs typeface="Microsoft YaHei"/>
-              </a:rPr>
-              <a:t>docs/novelty_ledger_corrections.md</a:t>
-            </a:r>
-            <a:r>
-              <a:rPr sz="1150" b="0">
+                  <a:srgbClr val="16191D"/>
+                </a:solidFill>
+                <a:latin typeface="Source Han Serif SC"/>
+                <a:ea typeface="SimSun"/>
+                <a:cs typeface="SimSun"/>
+              </a:rPr>
+              <a:t>入口多样</a:t>
+            </a:r>
+          </a:p>
+          <a:p>
+            <a:pPr>
+              <a:spcAft>
+                <a:spcPts val="800"/>
+              </a:spcAft>
+            </a:pPr>
+            <a:r>
+              <a:rPr sz="1050" b="0">
                 <a:solidFill>
                   <a:srgbClr val="4A4F57"/>
                 </a:solidFill>
@@ -8060,14 +8873,14 @@
                 <a:ea typeface="Microsoft YaHei"/>
                 <a:cs typeface="Microsoft YaHei"/>
               </a:rPr>
-              <a:t>，对 1,219 处标注 + 三套独立复算 + 作废声明。</a:t>
-            </a:r>
-          </a:p>
-        </p:txBody>
-      </p:sp>
-      <p:sp>
-        <p:nvSpPr>
-          <p:cNvPr id="6" name="Rectangle 5"/>
+              <a:t>外部信息（网页 / arXiv / 科学史）· 日常疑问 · 母题，都能成为问题的种子。</a:t>
+            </a:r>
+          </a:p>
+        </p:txBody>
+      </p:sp>
+      <p:sp>
+        <p:nvSpPr>
+          <p:cNvPr id="8" name="Rectangle 7"/>
           <p:cNvSpPr/>
           <p:nvPr/>
         </p:nvSpPr>
@@ -8111,7 +8924,7 @@
       </p:sp>
       <p:sp>
         <p:nvSpPr>
-          <p:cNvPr id="7" name="TextBox 6"/>
+          <p:cNvPr id="9" name="TextBox 8"/>
           <p:cNvSpPr txBox="1"/>
           <p:nvPr/>
         </p:nvSpPr>
@@ -8145,7 +8958,7 @@
                 <a:ea typeface="Microsoft YaHei"/>
                 <a:cs typeface="Microsoft YaHei"/>
               </a:rPr>
-              <a:t>纪律：机器答不出的问题要</a:t>
+              <a:t>产物：</a:t>
             </a:r>
             <a:r>
               <a:rPr sz="1000" b="1">
@@ -8156,7 +8969,7 @@
                 <a:ea typeface="Microsoft YaHei"/>
                 <a:cs typeface="Microsoft YaHei"/>
               </a:rPr>
-              <a:t>明确写「悬置」</a:t>
+              <a:t>out/demo/discovery_manifest.json</a:t>
             </a:r>
             <a:r>
               <a:rPr sz="1000" b="0">
@@ -8167,14 +8980,14 @@
                 <a:ea typeface="Microsoft YaHei"/>
                 <a:cs typeface="Microsoft YaHei"/>
               </a:rPr>
-              <a:t>，不能悄悄丢掉，也不能包装成结论。</a:t>
-            </a:r>
-          </a:p>
-        </p:txBody>
-      </p:sp>
-      <p:sp>
-        <p:nvSpPr>
-          <p:cNvPr id="8" name="TextBox 7"/>
+              <a:t>（544 条，字段含 daily_question → scientific_question → judge_route）。</a:t>
+            </a:r>
+          </a:p>
+        </p:txBody>
+      </p:sp>
+      <p:sp>
+        <p:nvSpPr>
+          <p:cNvPr id="10" name="TextBox 9"/>
           <p:cNvSpPr txBox="1"/>
           <p:nvPr/>
         </p:nvSpPr>
@@ -8208,7 +9021,7 @@
                 <a:ea typeface="Microsoft YaHei"/>
                 <a:cs typeface="Microsoft YaHei"/>
               </a:rPr>
-              <a:t>18 / 24</a:t>
+              <a:t>18 / 26</a:t>
             </a:r>
           </a:p>
         </p:txBody>
@@ -8275,7 +9088,7 @@
                 <a:ea typeface="Microsoft YaHei"/>
                 <a:cs typeface="Microsoft YaHei"/>
               </a:rPr>
-              <a:t>四、扩展的实践 · 跨域融合</a:t>
+              <a:t>四、扩展的实践 · 独立裁决</a:t>
             </a:r>
           </a:p>
         </p:txBody>
@@ -8316,7 +9129,7 @@
                 <a:ea typeface="SimSun"/>
                 <a:cs typeface="SimSun"/>
               </a:rPr>
-              <a:t>领域融合：27 个领域 → 144 座结构桥梁</a:t>
+              <a:t>独立裁决：15 个进制命题的判决</a:t>
             </a:r>
           </a:p>
         </p:txBody>
@@ -8357,7 +9170,7 @@
                 <a:ea typeface="Microsoft YaHei"/>
                 <a:cs typeface="Microsoft YaHei"/>
               </a:rPr>
-              <a:t>融合不是把两个领域的词拼在一起，而是找</a:t>
+              <a:t>这是全项目里最像「新知识」的一类产出，判据是</a:t>
             </a:r>
             <a:r>
               <a:rPr sz="1200" b="1">
@@ -8368,7 +9181,7 @@
                 <a:ea typeface="Microsoft YaHei"/>
                 <a:cs typeface="Microsoft YaHei"/>
               </a:rPr>
-              <a:t>共享结构</a:t>
+              <a:t>数值汇合</a:t>
             </a:r>
             <a:r>
               <a:rPr sz="1200" b="0">
@@ -8379,36 +9192,14 @@
                 <a:ea typeface="Microsoft YaHei"/>
                 <a:cs typeface="Microsoft YaHei"/>
               </a:rPr>
-              <a:t>；没有共享结构的配对判为</a:t>
-            </a:r>
-            <a:r>
-              <a:rPr sz="1200" b="1">
-                <a:solidFill>
-                  <a:srgbClr val="2F6B6B"/>
-                </a:solidFill>
-                <a:latin typeface="Segoe UI"/>
-                <a:ea typeface="Microsoft YaHei"/>
-                <a:cs typeface="Microsoft YaHei"/>
-              </a:rPr>
-              <a:t>空洞笛卡尔积</a:t>
-            </a:r>
-            <a:r>
-              <a:rPr sz="1200" b="0">
-                <a:solidFill>
-                  <a:srgbClr val="4A4F57"/>
-                </a:solidFill>
-                <a:latin typeface="Segoe UI"/>
-                <a:ea typeface="Microsoft YaHei"/>
-                <a:cs typeface="Microsoft YaHei"/>
-              </a:rPr>
-              <a:t>，不计入桥梁。</a:t>
+              <a:t>，不是证明。换一套实现重算，结果必须一致。</a:t>
             </a:r>
           </a:p>
         </p:txBody>
       </p:sp>
       <p:pic>
         <p:nvPicPr>
-          <p:cNvPr id="5" name="Picture 4" descr="fig_fusion.png"/>
+          <p:cNvPr id="5" name="Picture 4" descr="fig_harness.png"/>
           <p:cNvPicPr>
             <a:picLocks noChangeAspect="1"/>
           </p:cNvPicPr>
@@ -8423,7 +9214,7 @@
         <p:spPr>
           <a:xfrm>
             <a:off x="685800" y="2670048"/>
-            <a:ext cx="4763715" cy="2414016"/>
+            <a:ext cx="4148658" cy="2414016"/>
           </a:xfrm>
           <a:prstGeom prst="rect">
             <a:avLst/>
@@ -8466,7 +9257,29 @@
                 <a:ea typeface="Microsoft YaHei"/>
                 <a:cs typeface="Microsoft YaHei"/>
               </a:rPr>
-              <a:t>27 个领域两两配对得 702 个组合，其中 144 个被判定为共享结构 → 144 个跨域候选（全部可算）。</a:t>
+              <a:t>青 confirmed 13（例外集在 N1 档不再新增）· 青铜 open 1（例外仍在冒）· 朱砂 rejected 1（出现新例外）——</a:t>
+            </a:r>
+            <a:r>
+              <a:rPr sz="900" b="1">
+                <a:solidFill>
+                  <a:srgbClr val="2F6B6B"/>
+                </a:solidFill>
+                <a:latin typeface="Segoe UI"/>
+                <a:ea typeface="Microsoft YaHei"/>
+                <a:cs typeface="Microsoft YaHei"/>
+              </a:rPr>
+              <a:t>机器自己否掉了自己的命题</a:t>
+            </a:r>
+            <a:r>
+              <a:rPr sz="900" b="0">
+                <a:solidFill>
+                  <a:srgbClr val="6B7078"/>
+                </a:solidFill>
+                <a:latin typeface="Segoe UI"/>
+                <a:ea typeface="Microsoft YaHei"/>
+                <a:cs typeface="Microsoft YaHei"/>
+              </a:rPr>
+              <a:t>。</a:t>
             </a:r>
           </a:p>
         </p:txBody>
@@ -8507,7 +9320,7 @@
                 <a:ea typeface="SimSun"/>
                 <a:cs typeface="SimSun"/>
               </a:rPr>
-              <a:t>为什么不是排列组合</a:t>
+              <a:t>命题</a:t>
             </a:r>
           </a:p>
           <a:p>
@@ -8525,29 +9338,7 @@
                 <a:ea typeface="Microsoft YaHei"/>
                 <a:cs typeface="Microsoft YaHei"/>
               </a:rPr>
-              <a:t>两个领域没共享结构时，拼出来的问题是</a:t>
-            </a:r>
-            <a:r>
-              <a:rPr sz="1050" b="1">
-                <a:solidFill>
-                  <a:srgbClr val="2F6B6B"/>
-                </a:solidFill>
-                <a:latin typeface="Segoe UI"/>
-                <a:ea typeface="Microsoft YaHei"/>
-                <a:cs typeface="Microsoft YaHei"/>
-              </a:rPr>
-              <a:t>套话</a:t>
-            </a:r>
-            <a:r>
-              <a:rPr sz="1050" b="0">
-                <a:solidFill>
-                  <a:srgbClr val="4A4F57"/>
-                </a:solidFill>
-                <a:latin typeface="Segoe UI"/>
-                <a:ea typeface="Microsoft YaHei"/>
-                <a:cs typeface="Microsoft YaHei"/>
-              </a:rPr>
-              <a:t>，不是问题。</a:t>
+              <a:t>每个 n ≥ 4 可写为 base-b 回文数 + 素数；b ≥ 4 时例外集有限且很小。</a:t>
             </a:r>
           </a:p>
           <a:p>
@@ -8565,7 +9356,7 @@
                 <a:ea typeface="SimSun"/>
                 <a:cs typeface="SimSun"/>
               </a:rPr>
-              <a:t>生物相关的融合</a:t>
+              <a:t>判据</a:t>
             </a:r>
           </a:p>
           <a:p>
@@ -8583,29 +9374,7 @@
                 <a:ea typeface="Microsoft YaHei"/>
                 <a:cs typeface="Microsoft YaHei"/>
               </a:rPr>
-              <a:t>跨域候选里有</a:t>
-            </a:r>
-            <a:r>
-              <a:rPr sz="1050" b="1">
-                <a:solidFill>
-                  <a:srgbClr val="2F6B6B"/>
-                </a:solidFill>
-                <a:latin typeface="Segoe UI"/>
-                <a:ea typeface="Microsoft YaHei"/>
-                <a:cs typeface="Microsoft YaHei"/>
-              </a:rPr>
-              <a:t>牵涉生物学的桥梁</a:t>
-            </a:r>
-            <a:r>
-              <a:rPr sz="1050" b="0">
-                <a:solidFill>
-                  <a:srgbClr val="4A4F57"/>
-                </a:solidFill>
-                <a:latin typeface="Segoe UI"/>
-                <a:ea typeface="Microsoft YaHei"/>
-                <a:cs typeface="Microsoft YaHei"/>
-              </a:rPr>
-              <a:t>（如「用数论方法问生物对象」），这类候选直接落到可算的判定路由上。</a:t>
+              <a:t>N0 = 5×10⁶ → N1 = 10⁷，两档的例外集是否汇合、有没有冒出新例外。</a:t>
             </a:r>
           </a:p>
           <a:p>
@@ -8623,7 +9392,7 @@
                 <a:ea typeface="SimSun"/>
                 <a:cs typeface="SimSun"/>
               </a:rPr>
-              <a:t>每条都实跑过</a:t>
+              <a:t>边界推进</a:t>
             </a:r>
           </a:p>
           <a:p>
@@ -8641,7 +9410,7 @@
                 <a:ea typeface="Microsoft YaHei"/>
                 <a:cs typeface="Microsoft YaHei"/>
               </a:rPr>
-              <a:t>144 条候选</a:t>
+              <a:t>base 10 推到 </a:t>
             </a:r>
             <a:r>
               <a:rPr sz="1050" b="1">
@@ -8652,7 +9421,7 @@
                 <a:ea typeface="Microsoft YaHei"/>
                 <a:cs typeface="Microsoft YaHei"/>
               </a:rPr>
-              <a:t>全部标注为「可算」</a:t>
+              <a:t>10⁸ 零例外</a:t>
             </a:r>
             <a:r>
               <a:rPr sz="1050" b="0">
@@ -8663,7 +9432,87 @@
                 <a:ea typeface="Microsoft YaHei"/>
                 <a:cs typeface="Microsoft YaHei"/>
               </a:rPr>
-              <a:t>，各带一条判定路由。</a:t>
+              <a:t>（人类讨论此前止于 ~10⁶），两种独立实现交叉验证。</a:t>
+            </a:r>
+          </a:p>
+          <a:p>
+            <a:pPr>
+              <a:spcAft>
+                <a:spcPts val="100"/>
+              </a:spcAft>
+            </a:pPr>
+            <a:r>
+              <a:rPr sz="1150" b="1">
+                <a:solidFill>
+                  <a:srgbClr val="16191D"/>
+                </a:solidFill>
+                <a:latin typeface="Source Han Serif SC"/>
+                <a:ea typeface="SimSun"/>
+                <a:cs typeface="SimSun"/>
+              </a:rPr>
+              <a:t>自我更正</a:t>
+            </a:r>
+          </a:p>
+          <a:p>
+            <a:pPr>
+              <a:spcAft>
+                <a:spcPts val="800"/>
+              </a:spcAft>
+            </a:pPr>
+            <a:r>
+              <a:rPr sz="1050" b="0">
+                <a:solidFill>
+                  <a:srgbClr val="4A4F57"/>
+                </a:solidFill>
+                <a:latin typeface="Segoe UI"/>
+                <a:ea typeface="Microsoft YaHei"/>
+                <a:cs typeface="Microsoft YaHei"/>
+              </a:rPr>
+              <a:t>旧账本曾记 base 4 有 20 万个例外，真值 </a:t>
+            </a:r>
+            <a:r>
+              <a:rPr sz="1050" b="1">
+                <a:solidFill>
+                  <a:srgbClr val="2F6B6B"/>
+                </a:solidFill>
+                <a:latin typeface="Segoe UI"/>
+                <a:ea typeface="Microsoft YaHei"/>
+                <a:cs typeface="Microsoft YaHei"/>
+              </a:rPr>
+              <a:t>5</a:t>
+            </a:r>
+            <a:r>
+              <a:rPr sz="1050" b="0">
+                <a:solidFill>
+                  <a:srgbClr val="4A4F57"/>
+                </a:solidFill>
+                <a:latin typeface="Segoe UI"/>
+                <a:ea typeface="Microsoft YaHei"/>
+                <a:cs typeface="Microsoft YaHei"/>
+              </a:rPr>
+              <a:t>——</a:t>
+            </a:r>
+            <a:r>
+              <a:rPr sz="1050" b="1">
+                <a:solidFill>
+                  <a:srgbClr val="2F6B6B"/>
+                </a:solidFill>
+                <a:latin typeface="Segoe UI"/>
+                <a:ea typeface="Microsoft YaHei"/>
+                <a:cs typeface="Microsoft YaHei"/>
+              </a:rPr>
+              <a:t>错的是账本，不是结论</a:t>
+            </a:r>
+            <a:r>
+              <a:rPr sz="1050" b="0">
+                <a:solidFill>
+                  <a:srgbClr val="4A4F57"/>
+                </a:solidFill>
+                <a:latin typeface="Segoe UI"/>
+                <a:ea typeface="Microsoft YaHei"/>
+                <a:cs typeface="Microsoft YaHei"/>
+              </a:rPr>
+              <a:t>，并出更正页。</a:t>
             </a:r>
           </a:p>
         </p:txBody>
@@ -8748,7 +9597,7 @@
                 <a:ea typeface="Microsoft YaHei"/>
                 <a:cs typeface="Microsoft YaHei"/>
               </a:rPr>
-              <a:t>产物：</a:t>
+              <a:t>分级：N0 已知 → N1 大概率已知 → N2 疑似未见 → N3 世界新。</a:t>
             </a:r>
             <a:r>
               <a:rPr sz="1000" b="1">
@@ -8759,18 +9608,7 @@
                 <a:ea typeface="Microsoft YaHei"/>
                 <a:cs typeface="Microsoft YaHei"/>
               </a:rPr>
-              <a:t>out/demo/field_fusion.json</a:t>
-            </a:r>
-            <a:r>
-              <a:rPr sz="1000" b="0">
-                <a:solidFill>
-                  <a:srgbClr val="6B7078"/>
-                </a:solidFill>
-                <a:latin typeface="Segoe UI"/>
-                <a:ea typeface="Microsoft YaHei"/>
-                <a:cs typeface="Microsoft YaHei"/>
-              </a:rPr>
-              <a:t>（fields / total_pairs / cross_hot / candidates）。</a:t>
+              <a:t>N3 至今仍为 0。</a:t>
             </a:r>
           </a:p>
         </p:txBody>
@@ -8811,7 +9649,7 @@
                 <a:ea typeface="Microsoft YaHei"/>
                 <a:cs typeface="Microsoft YaHei"/>
               </a:rPr>
-              <a:t>19 / 24</a:t>
+              <a:t>19 / 26</a:t>
             </a:r>
           </a:p>
         </p:txBody>
@@ -9586,7 +10424,7 @@
                 <a:ea typeface="Microsoft YaHei"/>
                 <a:cs typeface="Microsoft YaHei"/>
               </a:rPr>
-              <a:t>02 / 24</a:t>
+              <a:t>02 / 26</a:t>
             </a:r>
           </a:p>
         </p:txBody>
@@ -9653,7 +10491,7 @@
                 <a:ea typeface="Microsoft YaHei"/>
                 <a:cs typeface="Microsoft YaHei"/>
               </a:rPr>
-              <a:t>四、扩展的实践 · 校准自己</a:t>
+              <a:t>四、扩展的实践 · 经验</a:t>
             </a:r>
           </a:p>
         </p:txBody>
@@ -9694,7 +10532,7 @@
                 <a:ea typeface="SimSun"/>
                 <a:cs typeface="SimSun"/>
               </a:rPr>
-              <a:t>同一套判据，换领域照样跑</a:t>
+              <a:t>系统侧学到的两件事</a:t>
             </a:r>
           </a:p>
         </p:txBody>
@@ -9735,67 +10573,21 @@
                 <a:ea typeface="Microsoft YaHei"/>
                 <a:cs typeface="Microsoft YaHei"/>
               </a:rPr>
-              <a:t>复核性结果的价值是</a:t>
-            </a:r>
-            <a:r>
-              <a:rPr sz="1200" b="1">
-                <a:solidFill>
-                  <a:srgbClr val="2F6B6B"/>
-                </a:solidFill>
-                <a:latin typeface="Segoe UI"/>
-                <a:ea typeface="Microsoft YaHei"/>
-                <a:cs typeface="Microsoft YaHei"/>
-              </a:rPr>
-              <a:t>校准自己</a:t>
-            </a:r>
-            <a:r>
-              <a:rPr sz="1200" b="0">
-                <a:solidFill>
-                  <a:srgbClr val="4A4F57"/>
-                </a:solidFill>
-                <a:latin typeface="Segoe UI"/>
-                <a:ea typeface="Microsoft YaHei"/>
-                <a:cs typeface="Microsoft YaHei"/>
-              </a:rPr>
-              <a:t>：机器重算出的已知结果对上了，才有资格谈没见过的那部分。</a:t>
-            </a:r>
-          </a:p>
-        </p:txBody>
-      </p:sp>
-      <p:pic>
-        <p:nvPicPr>
-          <p:cNvPr id="5" name="Picture 4" descr="fig_rediscovery.png"/>
-          <p:cNvPicPr>
-            <a:picLocks noChangeAspect="1"/>
-          </p:cNvPicPr>
-          <p:nvPr/>
-        </p:nvPicPr>
-        <p:blipFill>
-          <a:blip r:embed="rId2"/>
-          <a:stretch>
-            <a:fillRect/>
-          </a:stretch>
-        </p:blipFill>
+              <a:t>这两条都是「机器自己试出来」的，而不是从外部抄来的方法论。</a:t>
+            </a:r>
+          </a:p>
+        </p:txBody>
+      </p:sp>
+      <p:sp>
+        <p:nvSpPr>
+          <p:cNvPr id="5" name="TextBox 4"/>
+          <p:cNvSpPr txBox="1"/>
+          <p:nvPr/>
+        </p:nvSpPr>
         <p:spPr>
           <a:xfrm>
             <a:off x="685800" y="2670048"/>
-            <a:ext cx="4592434" cy="2414016"/>
-          </a:xfrm>
-          <a:prstGeom prst="rect">
-            <a:avLst/>
-          </a:prstGeom>
-        </p:spPr>
-      </p:pic>
-      <p:sp>
-        <p:nvSpPr>
-          <p:cNvPr id="6" name="TextBox 5"/>
-          <p:cNvSpPr txBox="1"/>
-          <p:nvPr/>
-        </p:nvSpPr>
-        <p:spPr>
-          <a:xfrm>
-            <a:off x="685800" y="5166360"/>
-            <a:ext cx="5623560" cy="548640"/>
+            <a:ext cx="10607040" cy="3474720"/>
           </a:xfrm>
           <a:prstGeom prst="rect">
             <a:avLst/>
@@ -9810,52 +10602,11 @@
           <a:p>
             <a:pPr>
               <a:spcAft>
-                <a:spcPts val="0"/>
-              </a:spcAft>
-            </a:pPr>
-            <a:r>
-              <a:rPr sz="900" b="0">
-                <a:solidFill>
-                  <a:srgbClr val="6B7078"/>
-                </a:solidFill>
-                <a:latin typeface="Segoe UI"/>
-                <a:ea typeface="Microsoft YaHei"/>
-                <a:cs typeface="Microsoft YaHei"/>
-              </a:rPr>
-              <a:t>三项与已知文献/数据库对表通过（音乐集合类 224 与 Forte 一致；多完全数与 OEIS A007539 一致；base 10 覆盖两种实现交叉验证）。</a:t>
-            </a:r>
-          </a:p>
-        </p:txBody>
-      </p:sp>
-      <p:sp>
-        <p:nvSpPr>
-          <p:cNvPr id="7" name="TextBox 6"/>
-          <p:cNvSpPr txBox="1"/>
-          <p:nvPr/>
-        </p:nvSpPr>
-        <p:spPr>
-          <a:xfrm>
-            <a:off x="6629400" y="2624328"/>
-            <a:ext cx="4873752" cy="3566160"/>
-          </a:xfrm>
-          <a:prstGeom prst="rect">
-            <a:avLst/>
-          </a:prstGeom>
-          <a:noFill/>
-        </p:spPr>
-        <p:txBody>
-          <a:bodyPr wrap="square">
-            <a:spAutoFit/>
-          </a:bodyPr>
-          <a:lstStyle/>
-          <a:p>
-            <a:pPr>
-              <a:spcAft>
                 <a:spcPts val="100"/>
               </a:spcAft>
             </a:pPr>
             <a:r>
-              <a:rPr sz="1150" b="1">
+              <a:rPr sz="1250" b="1">
                 <a:solidFill>
                   <a:srgbClr val="16191D"/>
                 </a:solidFill>
@@ -9863,17 +10614,17 @@
                 <a:ea typeface="SimSun"/>
                 <a:cs typeface="SimSun"/>
               </a:rPr>
-              <a:t>数学 · 序列结构</a:t>
-            </a:r>
-          </a:p>
-          <a:p>
-            <a:pPr>
-              <a:spcAft>
-                <a:spcPts val="800"/>
-              </a:spcAft>
-            </a:pPr>
-            <a:r>
-              <a:rPr sz="1050" b="0">
+              <a:t>① 独立实现比自证更有用</a:t>
+            </a:r>
+          </a:p>
+          <a:p>
+            <a:pPr>
+              <a:spcAft>
+                <a:spcPts val="900"/>
+              </a:spcAft>
+            </a:pPr>
+            <a:r>
+              <a:rPr sz="1150" b="0">
                 <a:solidFill>
                   <a:srgbClr val="4A4F57"/>
                 </a:solidFill>
@@ -9881,7 +10632,29 @@
                 <a:ea typeface="Microsoft YaHei"/>
                 <a:cs typeface="Microsoft YaHei"/>
               </a:rPr>
-              <a:t>Collatz 链长、多边形数覆盖、5×5 二值纹样 D4 轨道数——可迭代枚举复算。</a:t>
+              <a:t>同一命题换一套实现重算（另写 FFT 版本复算 base 3–47），</a:t>
+            </a:r>
+            <a:r>
+              <a:rPr sz="1150" b="1">
+                <a:solidFill>
+                  <a:srgbClr val="2F6B6B"/>
+                </a:solidFill>
+                <a:latin typeface="Segoe UI"/>
+                <a:ea typeface="Microsoft YaHei"/>
+                <a:cs typeface="Microsoft YaHei"/>
+              </a:rPr>
+              <a:t>b=3 的 68 个例外清单逐项一致</a:t>
+            </a:r>
+            <a:r>
+              <a:rPr sz="1150" b="0">
+                <a:solidFill>
+                  <a:srgbClr val="4A4F57"/>
+                </a:solidFill>
+                <a:latin typeface="Segoe UI"/>
+                <a:ea typeface="Microsoft YaHei"/>
+                <a:cs typeface="Microsoft YaHei"/>
+              </a:rPr>
+              <a:t>才敢认。自证只能发现笔误，换实现能发现口径错。</a:t>
             </a:r>
           </a:p>
           <a:p>
@@ -9891,7 +10664,7 @@
               </a:spcAft>
             </a:pPr>
             <a:r>
-              <a:rPr sz="1150" b="1">
+              <a:rPr sz="1250" b="1">
                 <a:solidFill>
                   <a:srgbClr val="16191D"/>
                 </a:solidFill>
@@ -9899,17 +10672,17 @@
                 <a:ea typeface="SimSun"/>
                 <a:cs typeface="SimSun"/>
               </a:rPr>
-              <a:t>音乐 · 集合类</a:t>
-            </a:r>
-          </a:p>
-          <a:p>
-            <a:pPr>
-              <a:spcAft>
-                <a:spcPts val="800"/>
-              </a:spcAft>
-            </a:pPr>
-            <a:r>
-              <a:rPr sz="1050" b="0">
+              <a:t>② 账本必须可作废</a:t>
+            </a:r>
+          </a:p>
+          <a:p>
+            <a:pPr>
+              <a:spcAft>
+                <a:spcPts val="900"/>
+              </a:spcAft>
+            </a:pPr>
+            <a:r>
+              <a:rPr sz="1150" b="0">
                 <a:solidFill>
                   <a:srgbClr val="4A4F57"/>
                 </a:solidFill>
@@ -9917,10 +10690,10 @@
                 <a:ea typeface="Microsoft YaHei"/>
                 <a:cs typeface="Microsoft YaHei"/>
               </a:rPr>
-              <a:t>Tn/TnI 集合类 </a:t>
-            </a:r>
-            <a:r>
-              <a:rPr sz="1050" b="1">
+              <a:t>旧账本记 base 4 有 20 万个例外，真值是 5。</a:t>
+            </a:r>
+            <a:r>
+              <a:rPr sz="1150" b="1">
                 <a:solidFill>
                   <a:srgbClr val="2F6B6B"/>
                 </a:solidFill>
@@ -9928,10 +10701,10 @@
                 <a:ea typeface="Microsoft YaHei"/>
                 <a:cs typeface="Microsoft YaHei"/>
               </a:rPr>
-              <a:t>224</a:t>
-            </a:r>
-            <a:r>
-              <a:rPr sz="1050" b="0">
+              <a:t>记错账比算错数更危险</a:t>
+            </a:r>
+            <a:r>
+              <a:rPr sz="1150" b="0">
                 <a:solidFill>
                   <a:srgbClr val="4A4F57"/>
                 </a:solidFill>
@@ -9939,10 +10712,10 @@
                 <a:ea typeface="Microsoft YaHei"/>
                 <a:cs typeface="Microsoft YaHei"/>
               </a:rPr>
-              <a:t>（与 Forte 224 一致）；最大熵集合类</a:t>
-            </a:r>
-            <a:r>
-              <a:rPr sz="1050" b="1">
+              <a:t>——所以有了 </a:t>
+            </a:r>
+            <a:r>
+              <a:rPr sz="1150" b="1">
                 <a:solidFill>
                   <a:srgbClr val="2F6B6B"/>
                 </a:solidFill>
@@ -9950,10 +10723,10 @@
                 <a:ea typeface="Microsoft YaHei"/>
                 <a:cs typeface="Microsoft YaHei"/>
               </a:rPr>
-              <a:t>恰 2 个</a:t>
-            </a:r>
-            <a:r>
-              <a:rPr sz="1050" b="0">
+              <a:t>docs/novelty_ledger_corrections.md</a:t>
+            </a:r>
+            <a:r>
+              <a:rPr sz="1150" b="0">
                 <a:solidFill>
                   <a:srgbClr val="4A4F57"/>
                 </a:solidFill>
@@ -9961,108 +10734,14 @@
                 <a:ea typeface="Microsoft YaHei"/>
                 <a:cs typeface="Microsoft YaHei"/>
               </a:rPr>
-              <a:t>。</a:t>
-            </a:r>
-          </a:p>
-          <a:p>
-            <a:pPr>
-              <a:spcAft>
-                <a:spcPts val="100"/>
-              </a:spcAft>
-            </a:pPr>
-            <a:r>
-              <a:rPr sz="1150" b="1">
-                <a:solidFill>
-                  <a:srgbClr val="16191D"/>
-                </a:solidFill>
-                <a:latin typeface="Source Han Serif SC"/>
-                <a:ea typeface="SimSun"/>
-                <a:cs typeface="SimSun"/>
-              </a:rPr>
-              <a:t>记录 · 多完全数</a:t>
-            </a:r>
-          </a:p>
-          <a:p>
-            <a:pPr>
-              <a:spcAft>
-                <a:spcPts val="800"/>
-              </a:spcAft>
-            </a:pPr>
-            <a:r>
-              <a:rPr sz="1050" b="0">
-                <a:solidFill>
-                  <a:srgbClr val="4A4F57"/>
-                </a:solidFill>
-                <a:latin typeface="Segoe UI"/>
-                <a:ea typeface="Microsoft YaHei"/>
-                <a:cs typeface="Microsoft YaHei"/>
-              </a:rPr>
-              <a:t>k=2,3,4：{6,28,496,8128} / {120,672,523776} / {30240,32760}（对齐 A007539）。</a:t>
-            </a:r>
-          </a:p>
-          <a:p>
-            <a:pPr>
-              <a:spcAft>
-                <a:spcPts val="100"/>
-              </a:spcAft>
-            </a:pPr>
-            <a:r>
-              <a:rPr sz="1150" b="1">
-                <a:solidFill>
-                  <a:srgbClr val="16191D"/>
-                </a:solidFill>
-                <a:latin typeface="Source Han Serif SC"/>
-                <a:ea typeface="SimSun"/>
-                <a:cs typeface="SimSun"/>
-              </a:rPr>
-              <a:t>未见候选分级</a:t>
-            </a:r>
-          </a:p>
-          <a:p>
-            <a:pPr>
-              <a:spcAft>
-                <a:spcPts val="800"/>
-              </a:spcAft>
-            </a:pPr>
-            <a:r>
-              <a:rPr sz="1050" b="0">
-                <a:solidFill>
-                  <a:srgbClr val="4A4F57"/>
-                </a:solidFill>
-                <a:latin typeface="Segoe UI"/>
-                <a:ea typeface="Microsoft YaHei"/>
-                <a:cs typeface="Microsoft YaHei"/>
-              </a:rPr>
-              <a:t>独立 5 · 强 34 · 弱 0 · 短 2——</a:t>
-            </a:r>
-            <a:r>
-              <a:rPr sz="1050" b="1">
-                <a:solidFill>
-                  <a:srgbClr val="2F6B6B"/>
-                </a:solidFill>
-                <a:latin typeface="Segoe UI"/>
-                <a:ea typeface="Microsoft YaHei"/>
-                <a:cs typeface="Microsoft YaHei"/>
-              </a:rPr>
-              <a:t>这只是 OEIS 沉默 + 机制非平凡，不是文献门，更不是显著性证书</a:t>
-            </a:r>
-            <a:r>
-              <a:rPr sz="1050" b="0">
-                <a:solidFill>
-                  <a:srgbClr val="4A4F57"/>
-                </a:solidFill>
-                <a:latin typeface="Segoe UI"/>
-                <a:ea typeface="Microsoft YaHei"/>
-                <a:cs typeface="Microsoft YaHei"/>
-              </a:rPr>
-              <a:t>。</a:t>
-            </a:r>
-          </a:p>
-        </p:txBody>
-      </p:sp>
-      <p:sp>
-        <p:nvSpPr>
-          <p:cNvPr id="8" name="Rectangle 7"/>
+              <a:t>，对 1,219 处标注 + 三套独立复算 + 作废声明。</a:t>
+            </a:r>
+          </a:p>
+        </p:txBody>
+      </p:sp>
+      <p:sp>
+        <p:nvSpPr>
+          <p:cNvPr id="6" name="Rectangle 5"/>
           <p:cNvSpPr/>
           <p:nvPr/>
         </p:nvSpPr>
@@ -10106,7 +10785,7 @@
       </p:sp>
       <p:sp>
         <p:nvSpPr>
-          <p:cNvPr id="9" name="TextBox 8"/>
+          <p:cNvPr id="7" name="TextBox 6"/>
           <p:cNvSpPr txBox="1"/>
           <p:nvPr/>
         </p:nvSpPr>
@@ -10140,14 +10819,36 @@
                 <a:ea typeface="Microsoft YaHei"/>
                 <a:cs typeface="Microsoft YaHei"/>
               </a:rPr>
-              <a:t>诚实标注：分级不等于新颖性；它只说明「在参照系里没见到」，需要人工或文献门复核。</a:t>
-            </a:r>
-          </a:p>
-        </p:txBody>
-      </p:sp>
-      <p:sp>
-        <p:nvSpPr>
-          <p:cNvPr id="10" name="TextBox 9"/>
+              <a:t>纪律：机器答不出的问题要</a:t>
+            </a:r>
+            <a:r>
+              <a:rPr sz="1000" b="1">
+                <a:solidFill>
+                  <a:srgbClr val="2F6B6B"/>
+                </a:solidFill>
+                <a:latin typeface="Segoe UI"/>
+                <a:ea typeface="Microsoft YaHei"/>
+                <a:cs typeface="Microsoft YaHei"/>
+              </a:rPr>
+              <a:t>明确写「悬置」</a:t>
+            </a:r>
+            <a:r>
+              <a:rPr sz="1000" b="0">
+                <a:solidFill>
+                  <a:srgbClr val="6B7078"/>
+                </a:solidFill>
+                <a:latin typeface="Segoe UI"/>
+                <a:ea typeface="Microsoft YaHei"/>
+                <a:cs typeface="Microsoft YaHei"/>
+              </a:rPr>
+              <a:t>，不能悄悄丢掉，也不能包装成结论。</a:t>
+            </a:r>
+          </a:p>
+        </p:txBody>
+      </p:sp>
+      <p:sp>
+        <p:nvSpPr>
+          <p:cNvPr id="8" name="TextBox 7"/>
           <p:cNvSpPr txBox="1"/>
           <p:nvPr/>
         </p:nvSpPr>
@@ -10181,7 +10882,7 @@
                 <a:ea typeface="Microsoft YaHei"/>
                 <a:cs typeface="Microsoft YaHei"/>
               </a:rPr>
-              <a:t>20 / 24</a:t>
+              <a:t>20 / 26</a:t>
             </a:r>
           </a:p>
         </p:txBody>
@@ -10248,7 +10949,7 @@
                 <a:ea typeface="Microsoft YaHei"/>
                 <a:cs typeface="Microsoft YaHei"/>
               </a:rPr>
-              <a:t>四、扩展的实践 · 经验检索桥</a:t>
+              <a:t>四、扩展的实践 · 跨域融合</a:t>
             </a:r>
           </a:p>
         </p:txBody>
@@ -10289,7 +10990,7 @@
                 <a:ea typeface="SimSun"/>
                 <a:cs typeface="SimSun"/>
               </a:rPr>
-              <a:t>经验检索桥：6,642 个组合词接上现实经验</a:t>
+              <a:t>领域融合：27 个领域 → 144 座结构桥梁</a:t>
             </a:r>
           </a:p>
         </p:txBody>
@@ -10330,7 +11031,7 @@
                 <a:ea typeface="Microsoft YaHei"/>
                 <a:cs typeface="Microsoft YaHei"/>
               </a:rPr>
-              <a:t>桥的作用是让想象力</a:t>
+              <a:t>融合不是把两个领域的词拼在一起，而是找</a:t>
             </a:r>
             <a:r>
               <a:rPr sz="1200" b="1">
@@ -10341,7 +11042,7 @@
                 <a:ea typeface="Microsoft YaHei"/>
                 <a:cs typeface="Microsoft YaHei"/>
               </a:rPr>
-              <a:t>有据可依</a:t>
+              <a:t>共享结构</a:t>
             </a:r>
             <a:r>
               <a:rPr sz="1200" b="0">
@@ -10352,7 +11053,7 @@
                 <a:ea typeface="Microsoft YaHei"/>
                 <a:cs typeface="Microsoft YaHei"/>
               </a:rPr>
-              <a:t>，而不是当裁判。检索未见</a:t>
+              <a:t>；没有共享结构的配对判为</a:t>
             </a:r>
             <a:r>
               <a:rPr sz="1200" b="1">
@@ -10363,7 +11064,7 @@
                 <a:ea typeface="Microsoft YaHei"/>
                 <a:cs typeface="Microsoft YaHei"/>
               </a:rPr>
-              <a:t>不等于</a:t>
+              <a:t>空洞笛卡尔积</a:t>
             </a:r>
             <a:r>
               <a:rPr sz="1200" b="0">
@@ -10374,14 +11075,14 @@
                 <a:ea typeface="Microsoft YaHei"/>
                 <a:cs typeface="Microsoft YaHei"/>
               </a:rPr>
-              <a:t>概念为假；见不到也不阻止理解。</a:t>
+              <a:t>，不计入桥梁。</a:t>
             </a:r>
           </a:p>
         </p:txBody>
       </p:sp>
       <p:pic>
         <p:nvPicPr>
-          <p:cNvPr id="5" name="Picture 4" descr="fig_bridge.png"/>
+          <p:cNvPr id="5" name="Picture 4" descr="fig_fusion.png"/>
           <p:cNvPicPr>
             <a:picLocks noChangeAspect="1"/>
           </p:cNvPicPr>
@@ -10396,7 +11097,7 @@
         <p:spPr>
           <a:xfrm>
             <a:off x="685800" y="2670048"/>
-            <a:ext cx="4755269" cy="2414016"/>
+            <a:ext cx="4763715" cy="2414016"/>
           </a:xfrm>
           <a:prstGeom prst="rect">
             <a:avLst/>
@@ -10439,7 +11140,7 @@
                 <a:ea typeface="Microsoft YaHei"/>
                 <a:cs typeface="Microsoft YaHei"/>
               </a:rPr>
-              <a:t>6,642 个组合词过双通道检索：词条通道命中 558 个，其中已建成独立条目仅 37 个；抓成语料 49 个词条，写出经验锚点 7 处。</a:t>
+              <a:t>27 个领域两两配对得 702 个组合，其中 144 个被判定为共享结构 → 144 个跨域候选（全部可算）。</a:t>
             </a:r>
           </a:p>
         </p:txBody>
@@ -10480,7 +11181,7 @@
                 <a:ea typeface="SimSun"/>
                 <a:cs typeface="SimSun"/>
               </a:rPr>
-              <a:t>命中率本身就是发现</a:t>
+              <a:t>为什么不是排列组合</a:t>
             </a:r>
           </a:p>
           <a:p>
@@ -10498,7 +11199,7 @@
                 <a:ea typeface="Microsoft YaHei"/>
                 <a:cs typeface="Microsoft YaHei"/>
               </a:rPr>
-              <a:t>词条通道命中约 8.4%，已建成独立条目约 0.6%。</a:t>
+              <a:t>两个领域没共享结构时，拼出来的问题是</a:t>
             </a:r>
             <a:r>
               <a:rPr sz="1050" b="1">
@@ -10509,7 +11210,18 @@
                 <a:ea typeface="Microsoft YaHei"/>
                 <a:cs typeface="Microsoft YaHei"/>
               </a:rPr>
-              <a:t>「检索未见」是常态，不是发现。</a:t>
+              <a:t>套话</a:t>
+            </a:r>
+            <a:r>
+              <a:rPr sz="1050" b="0">
+                <a:solidFill>
+                  <a:srgbClr val="4A4F57"/>
+                </a:solidFill>
+                <a:latin typeface="Segoe UI"/>
+                <a:ea typeface="Microsoft YaHei"/>
+                <a:cs typeface="Microsoft YaHei"/>
+              </a:rPr>
+              <a:t>，不是问题。</a:t>
             </a:r>
           </a:p>
           <a:p>
@@ -10527,7 +11239,7 @@
                 <a:ea typeface="SimSun"/>
                 <a:cs typeface="SimSun"/>
               </a:rPr>
-              <a:t>桥不改变判定</a:t>
+              <a:t>生物相关的融合</a:t>
             </a:r>
           </a:p>
           <a:p>
@@ -10545,7 +11257,29 @@
                 <a:ea typeface="Microsoft YaHei"/>
                 <a:cs typeface="Microsoft YaHei"/>
               </a:rPr>
-              <a:t>过桥不改变任何判定；检索失败即退化为无锚点，概念照样成立（判据是「被理解」）。</a:t>
+              <a:t>跨域候选里有</a:t>
+            </a:r>
+            <a:r>
+              <a:rPr sz="1050" b="1">
+                <a:solidFill>
+                  <a:srgbClr val="2F6B6B"/>
+                </a:solidFill>
+                <a:latin typeface="Segoe UI"/>
+                <a:ea typeface="Microsoft YaHei"/>
+                <a:cs typeface="Microsoft YaHei"/>
+              </a:rPr>
+              <a:t>牵涉生物学的桥梁</a:t>
+            </a:r>
+            <a:r>
+              <a:rPr sz="1050" b="0">
+                <a:solidFill>
+                  <a:srgbClr val="4A4F57"/>
+                </a:solidFill>
+                <a:latin typeface="Segoe UI"/>
+                <a:ea typeface="Microsoft YaHei"/>
+                <a:cs typeface="Microsoft YaHei"/>
+              </a:rPr>
+              <a:t>（如「用数论方法问生物对象」），这类候选直接落到可算的判定路由上。</a:t>
             </a:r>
           </a:p>
           <a:p>
@@ -10563,7 +11297,7 @@
                 <a:ea typeface="SimSun"/>
                 <a:cs typeface="SimSun"/>
               </a:rPr>
-              <a:t>默认不过桥</a:t>
+              <a:t>每条都实跑过</a:t>
             </a:r>
           </a:p>
           <a:p>
@@ -10581,7 +11315,29 @@
                 <a:ea typeface="Microsoft YaHei"/>
                 <a:cs typeface="Microsoft YaHei"/>
               </a:rPr>
-              <a:t>默认只对少数指定组合写锚点；全量检索需要显式开关。</a:t>
+              <a:t>144 条候选</a:t>
+            </a:r>
+            <a:r>
+              <a:rPr sz="1050" b="1">
+                <a:solidFill>
+                  <a:srgbClr val="2F6B6B"/>
+                </a:solidFill>
+                <a:latin typeface="Segoe UI"/>
+                <a:ea typeface="Microsoft YaHei"/>
+                <a:cs typeface="Microsoft YaHei"/>
+              </a:rPr>
+              <a:t>全部标注为「可算」</a:t>
+            </a:r>
+            <a:r>
+              <a:rPr sz="1050" b="0">
+                <a:solidFill>
+                  <a:srgbClr val="4A4F57"/>
+                </a:solidFill>
+                <a:latin typeface="Segoe UI"/>
+                <a:ea typeface="Microsoft YaHei"/>
+                <a:cs typeface="Microsoft YaHei"/>
+              </a:rPr>
+              <a:t>，各带一条判定路由。</a:t>
             </a:r>
           </a:p>
         </p:txBody>
@@ -10677,7 +11433,7 @@
                 <a:ea typeface="Microsoft YaHei"/>
                 <a:cs typeface="Microsoft YaHei"/>
               </a:rPr>
-              <a:t>out/demo/browser_mass_search.json</a:t>
+              <a:t>out/demo/field_fusion.json</a:t>
             </a:r>
             <a:r>
               <a:rPr sz="1000" b="0">
@@ -10688,51 +11444,7 @@
                 <a:ea typeface="Microsoft YaHei"/>
                 <a:cs typeface="Microsoft YaHei"/>
               </a:rPr>
-              <a:t> · </a:t>
-            </a:r>
-            <a:r>
-              <a:rPr sz="1000" b="1">
-                <a:solidFill>
-                  <a:srgbClr val="2F6B6B"/>
-                </a:solidFill>
-                <a:latin typeface="Segoe UI"/>
-                <a:ea typeface="Microsoft YaHei"/>
-                <a:cs typeface="Microsoft YaHei"/>
-              </a:rPr>
-              <a:t>data/wiki/</a:t>
-            </a:r>
-            <a:r>
-              <a:rPr sz="1000" b="0">
-                <a:solidFill>
-                  <a:srgbClr val="6B7078"/>
-                </a:solidFill>
-                <a:latin typeface="Segoe UI"/>
-                <a:ea typeface="Microsoft YaHei"/>
-                <a:cs typeface="Microsoft YaHei"/>
-              </a:rPr>
-              <a:t>（语料）· </a:t>
-            </a:r>
-            <a:r>
-              <a:rPr sz="1000" b="1">
-                <a:solidFill>
-                  <a:srgbClr val="2F6B6B"/>
-                </a:solidFill>
-                <a:latin typeface="Segoe UI"/>
-                <a:ea typeface="Microsoft YaHei"/>
-                <a:cs typeface="Microsoft YaHei"/>
-              </a:rPr>
-              <a:t>out/demo/word_understand.json</a:t>
-            </a:r>
-            <a:r>
-              <a:rPr sz="1000" b="0">
-                <a:solidFill>
-                  <a:srgbClr val="6B7078"/>
-                </a:solidFill>
-                <a:latin typeface="Segoe UI"/>
-                <a:ea typeface="Microsoft YaHei"/>
-                <a:cs typeface="Microsoft YaHei"/>
-              </a:rPr>
-              <a:t>（锚点）。</a:t>
+              <a:t>（fields / total_pairs / cross_hot / candidates）。</a:t>
             </a:r>
           </a:p>
         </p:txBody>
@@ -10773,7 +11485,7 @@
                 <a:ea typeface="Microsoft YaHei"/>
                 <a:cs typeface="Microsoft YaHei"/>
               </a:rPr>
-              <a:t>21 / 24</a:t>
+              <a:t>21 / 26</a:t>
             </a:r>
           </a:p>
         </p:txBody>
@@ -10840,7 +11552,7 @@
                 <a:ea typeface="Microsoft YaHei"/>
                 <a:cs typeface="Microsoft YaHei"/>
               </a:rPr>
-              <a:t>五、接下来的方向</a:t>
+              <a:t>四、扩展的实践 · 校准自己</a:t>
             </a:r>
           </a:p>
         </p:txBody>
@@ -10881,7 +11593,7 @@
                 <a:ea typeface="SimSun"/>
                 <a:cs typeface="SimSun"/>
               </a:rPr>
-              <a:t>多模态实体提取：让图像与声音进入两条路</a:t>
+              <a:t>同一套判据，换领域照样跑</a:t>
             </a:r>
           </a:p>
         </p:txBody>
@@ -10922,7 +11634,7 @@
                 <a:ea typeface="Microsoft YaHei"/>
                 <a:cs typeface="Microsoft YaHei"/>
               </a:rPr>
-              <a:t>现在经验</a:t>
+              <a:t>复核性结果的价值是</a:t>
             </a:r>
             <a:r>
               <a:rPr sz="1200" b="1">
@@ -10933,7 +11645,7 @@
                 <a:ea typeface="Microsoft YaHei"/>
                 <a:cs typeface="Microsoft YaHei"/>
               </a:rPr>
-              <a:t>只能以文字进入</a:t>
+              <a:t>校准自己</a:t>
             </a:r>
             <a:r>
               <a:rPr sz="1200" b="0">
@@ -10944,36 +11656,14 @@
                 <a:ea typeface="Microsoft YaHei"/>
                 <a:cs typeface="Microsoft YaHei"/>
               </a:rPr>
-              <a:t>系统；图像与声音还没有进入两条路的入口。下一步是把这个「反向」补上——</a:t>
-            </a:r>
-            <a:r>
-              <a:rPr sz="1200" b="1">
-                <a:solidFill>
-                  <a:srgbClr val="2F6B6B"/>
-                </a:solidFill>
-                <a:latin typeface="Segoe UI"/>
-                <a:ea typeface="Microsoft YaHei"/>
-                <a:cs typeface="Microsoft YaHei"/>
-              </a:rPr>
-              <a:t>尚未实现</a:t>
-            </a:r>
-            <a:r>
-              <a:rPr sz="1200" b="0">
-                <a:solidFill>
-                  <a:srgbClr val="4A4F57"/>
-                </a:solidFill>
-                <a:latin typeface="Segoe UI"/>
-                <a:ea typeface="Microsoft YaHei"/>
-                <a:cs typeface="Microsoft YaHei"/>
-              </a:rPr>
-              <a:t>。</a:t>
+              <a:t>：机器重算出的已知结果对上了，才有资格谈没见过的那部分。</a:t>
             </a:r>
           </a:p>
         </p:txBody>
       </p:sp>
       <p:pic>
         <p:nvPicPr>
-          <p:cNvPr id="5" name="Picture 4" descr="fig_multimodal.png"/>
+          <p:cNvPr id="5" name="Picture 4" descr="fig_rediscovery.png"/>
           <p:cNvPicPr>
             <a:picLocks noChangeAspect="1"/>
           </p:cNvPicPr>
@@ -10987,8 +11677,8 @@
         </p:blipFill>
         <p:spPr>
           <a:xfrm>
-            <a:off x="2298644" y="2670048"/>
-            <a:ext cx="7591664" cy="2414016"/>
+            <a:off x="685800" y="2670048"/>
+            <a:ext cx="4592434" cy="2414016"/>
           </a:xfrm>
           <a:prstGeom prst="rect">
             <a:avLst/>
@@ -11003,8 +11693,8 @@
         </p:nvSpPr>
         <p:spPr>
           <a:xfrm>
-            <a:off x="685800" y="5175504"/>
-            <a:ext cx="10817352" cy="548640"/>
+            <a:off x="685800" y="5166360"/>
+            <a:ext cx="5623560" cy="548640"/>
           </a:xfrm>
           <a:prstGeom prst="rect">
             <a:avLst/>
@@ -11031,10 +11721,105 @@
                 <a:ea typeface="Microsoft YaHei"/>
                 <a:cs typeface="Microsoft YaHei"/>
               </a:rPr>
-              <a:t>实线 = 现在能做的（文字 → 问题 / 概念）。虚线 = 目标（图像 / 声音 → 直接抽实体 → 两条路的入口）。</a:t>
-            </a:r>
-            <a:r>
-              <a:rPr sz="900" b="1">
+              <a:t>三项与已知文献/数据库对表通过（音乐集合类 224 与 Forte 一致；多完全数与 OEIS A007539 一致；base 10 覆盖两种实现交叉验证）。</a:t>
+            </a:r>
+          </a:p>
+        </p:txBody>
+      </p:sp>
+      <p:sp>
+        <p:nvSpPr>
+          <p:cNvPr id="7" name="TextBox 6"/>
+          <p:cNvSpPr txBox="1"/>
+          <p:nvPr/>
+        </p:nvSpPr>
+        <p:spPr>
+          <a:xfrm>
+            <a:off x="6629400" y="2624328"/>
+            <a:ext cx="4873752" cy="3566160"/>
+          </a:xfrm>
+          <a:prstGeom prst="rect">
+            <a:avLst/>
+          </a:prstGeom>
+          <a:noFill/>
+        </p:spPr>
+        <p:txBody>
+          <a:bodyPr wrap="square">
+            <a:spAutoFit/>
+          </a:bodyPr>
+          <a:lstStyle/>
+          <a:p>
+            <a:pPr>
+              <a:spcAft>
+                <a:spcPts val="100"/>
+              </a:spcAft>
+            </a:pPr>
+            <a:r>
+              <a:rPr sz="1150" b="1">
+                <a:solidFill>
+                  <a:srgbClr val="16191D"/>
+                </a:solidFill>
+                <a:latin typeface="Source Han Serif SC"/>
+                <a:ea typeface="SimSun"/>
+                <a:cs typeface="SimSun"/>
+              </a:rPr>
+              <a:t>数学 · 序列结构</a:t>
+            </a:r>
+          </a:p>
+          <a:p>
+            <a:pPr>
+              <a:spcAft>
+                <a:spcPts val="800"/>
+              </a:spcAft>
+            </a:pPr>
+            <a:r>
+              <a:rPr sz="1050" b="0">
+                <a:solidFill>
+                  <a:srgbClr val="4A4F57"/>
+                </a:solidFill>
+                <a:latin typeface="Segoe UI"/>
+                <a:ea typeface="Microsoft YaHei"/>
+                <a:cs typeface="Microsoft YaHei"/>
+              </a:rPr>
+              <a:t>Collatz 链长、多边形数覆盖、5×5 二值纹样 D4 轨道数——可迭代枚举复算。</a:t>
+            </a:r>
+          </a:p>
+          <a:p>
+            <a:pPr>
+              <a:spcAft>
+                <a:spcPts val="100"/>
+              </a:spcAft>
+            </a:pPr>
+            <a:r>
+              <a:rPr sz="1150" b="1">
+                <a:solidFill>
+                  <a:srgbClr val="16191D"/>
+                </a:solidFill>
+                <a:latin typeface="Source Han Serif SC"/>
+                <a:ea typeface="SimSun"/>
+                <a:cs typeface="SimSun"/>
+              </a:rPr>
+              <a:t>音乐 · 集合类</a:t>
+            </a:r>
+          </a:p>
+          <a:p>
+            <a:pPr>
+              <a:spcAft>
+                <a:spcPts val="800"/>
+              </a:spcAft>
+            </a:pPr>
+            <a:r>
+              <a:rPr sz="1050" b="0">
+                <a:solidFill>
+                  <a:srgbClr val="4A4F57"/>
+                </a:solidFill>
+                <a:latin typeface="Segoe UI"/>
+                <a:ea typeface="Microsoft YaHei"/>
+                <a:cs typeface="Microsoft YaHei"/>
+              </a:rPr>
+              <a:t>Tn/TnI 集合类 </a:t>
+            </a:r>
+            <a:r>
+              <a:rPr sz="1050" b="1">
                 <a:solidFill>
                   <a:srgbClr val="2F6B6B"/>
                 </a:solidFill>
@@ -11042,14 +11827,141 @@
                 <a:ea typeface="Microsoft YaHei"/>
                 <a:cs typeface="Microsoft YaHei"/>
               </a:rPr>
-              <a:t>虚线框内是目标，不是成果。</a:t>
-            </a:r>
-          </a:p>
-        </p:txBody>
-      </p:sp>
-      <p:sp>
-        <p:nvSpPr>
-          <p:cNvPr id="7" name="Rectangle 6"/>
+              <a:t>224</a:t>
+            </a:r>
+            <a:r>
+              <a:rPr sz="1050" b="0">
+                <a:solidFill>
+                  <a:srgbClr val="4A4F57"/>
+                </a:solidFill>
+                <a:latin typeface="Segoe UI"/>
+                <a:ea typeface="Microsoft YaHei"/>
+                <a:cs typeface="Microsoft YaHei"/>
+              </a:rPr>
+              <a:t>（与 Forte 224 一致）；最大熵集合类</a:t>
+            </a:r>
+            <a:r>
+              <a:rPr sz="1050" b="1">
+                <a:solidFill>
+                  <a:srgbClr val="2F6B6B"/>
+                </a:solidFill>
+                <a:latin typeface="Segoe UI"/>
+                <a:ea typeface="Microsoft YaHei"/>
+                <a:cs typeface="Microsoft YaHei"/>
+              </a:rPr>
+              <a:t>恰 2 个</a:t>
+            </a:r>
+            <a:r>
+              <a:rPr sz="1050" b="0">
+                <a:solidFill>
+                  <a:srgbClr val="4A4F57"/>
+                </a:solidFill>
+                <a:latin typeface="Segoe UI"/>
+                <a:ea typeface="Microsoft YaHei"/>
+                <a:cs typeface="Microsoft YaHei"/>
+              </a:rPr>
+              <a:t>。</a:t>
+            </a:r>
+          </a:p>
+          <a:p>
+            <a:pPr>
+              <a:spcAft>
+                <a:spcPts val="100"/>
+              </a:spcAft>
+            </a:pPr>
+            <a:r>
+              <a:rPr sz="1150" b="1">
+                <a:solidFill>
+                  <a:srgbClr val="16191D"/>
+                </a:solidFill>
+                <a:latin typeface="Source Han Serif SC"/>
+                <a:ea typeface="SimSun"/>
+                <a:cs typeface="SimSun"/>
+              </a:rPr>
+              <a:t>记录 · 多完全数</a:t>
+            </a:r>
+          </a:p>
+          <a:p>
+            <a:pPr>
+              <a:spcAft>
+                <a:spcPts val="800"/>
+              </a:spcAft>
+            </a:pPr>
+            <a:r>
+              <a:rPr sz="1050" b="0">
+                <a:solidFill>
+                  <a:srgbClr val="4A4F57"/>
+                </a:solidFill>
+                <a:latin typeface="Segoe UI"/>
+                <a:ea typeface="Microsoft YaHei"/>
+                <a:cs typeface="Microsoft YaHei"/>
+              </a:rPr>
+              <a:t>k=2,3,4：{6,28,496,8128} / {120,672,523776} / {30240,32760}（对齐 A007539）。</a:t>
+            </a:r>
+          </a:p>
+          <a:p>
+            <a:pPr>
+              <a:spcAft>
+                <a:spcPts val="100"/>
+              </a:spcAft>
+            </a:pPr>
+            <a:r>
+              <a:rPr sz="1150" b="1">
+                <a:solidFill>
+                  <a:srgbClr val="16191D"/>
+                </a:solidFill>
+                <a:latin typeface="Source Han Serif SC"/>
+                <a:ea typeface="SimSun"/>
+                <a:cs typeface="SimSun"/>
+              </a:rPr>
+              <a:t>未见候选分级</a:t>
+            </a:r>
+          </a:p>
+          <a:p>
+            <a:pPr>
+              <a:spcAft>
+                <a:spcPts val="800"/>
+              </a:spcAft>
+            </a:pPr>
+            <a:r>
+              <a:rPr sz="1050" b="0">
+                <a:solidFill>
+                  <a:srgbClr val="4A4F57"/>
+                </a:solidFill>
+                <a:latin typeface="Segoe UI"/>
+                <a:ea typeface="Microsoft YaHei"/>
+                <a:cs typeface="Microsoft YaHei"/>
+              </a:rPr>
+              <a:t>独立 5 · 强 34 · 弱 0 · 短 2——</a:t>
+            </a:r>
+            <a:r>
+              <a:rPr sz="1050" b="1">
+                <a:solidFill>
+                  <a:srgbClr val="2F6B6B"/>
+                </a:solidFill>
+                <a:latin typeface="Segoe UI"/>
+                <a:ea typeface="Microsoft YaHei"/>
+                <a:cs typeface="Microsoft YaHei"/>
+              </a:rPr>
+              <a:t>这只是 OEIS 沉默 + 机制非平凡，不是文献门，更不是显著性证书</a:t>
+            </a:r>
+            <a:r>
+              <a:rPr sz="1050" b="0">
+                <a:solidFill>
+                  <a:srgbClr val="4A4F57"/>
+                </a:solidFill>
+                <a:latin typeface="Segoe UI"/>
+                <a:ea typeface="Microsoft YaHei"/>
+                <a:cs typeface="Microsoft YaHei"/>
+              </a:rPr>
+              <a:t>。</a:t>
+            </a:r>
+          </a:p>
+        </p:txBody>
+      </p:sp>
+      <p:sp>
+        <p:nvSpPr>
+          <p:cNvPr id="8" name="Rectangle 7"/>
           <p:cNvSpPr/>
           <p:nvPr/>
         </p:nvSpPr>
@@ -11093,7 +12005,7 @@
       </p:sp>
       <p:sp>
         <p:nvSpPr>
-          <p:cNvPr id="8" name="TextBox 7"/>
+          <p:cNvPr id="9" name="TextBox 8"/>
           <p:cNvSpPr txBox="1"/>
           <p:nvPr/>
         </p:nvSpPr>
@@ -11127,58 +12039,14 @@
                 <a:ea typeface="Microsoft YaHei"/>
                 <a:cs typeface="Microsoft YaHei"/>
               </a:rPr>
-              <a:t>已有最小闭环：</a:t>
-            </a:r>
-            <a:r>
-              <a:rPr sz="1000" b="1">
-                <a:solidFill>
-                  <a:srgbClr val="2F6B6B"/>
-                </a:solidFill>
-                <a:latin typeface="Segoe UI"/>
-                <a:ea typeface="Microsoft YaHei"/>
-                <a:cs typeface="Microsoft YaHei"/>
-              </a:rPr>
-              <a:t>perceive</a:t>
-            </a:r>
-            <a:r>
-              <a:rPr sz="1000" b="0">
-                <a:solidFill>
-                  <a:srgbClr val="6B7078"/>
-                </a:solidFill>
-                <a:latin typeface="Segoe UI"/>
-                <a:ea typeface="Microsoft YaHei"/>
-                <a:cs typeface="Microsoft YaHei"/>
-              </a:rPr>
-              <a:t> 能把图像 → 结构特征 → 带判定路由的问题；但它抽取的是</a:t>
-            </a:r>
-            <a:r>
-              <a:rPr sz="1000" b="1">
-                <a:solidFill>
-                  <a:srgbClr val="2F6B6B"/>
-                </a:solidFill>
-                <a:latin typeface="Segoe UI"/>
-                <a:ea typeface="Microsoft YaHei"/>
-                <a:cs typeface="Microsoft YaHei"/>
-              </a:rPr>
-              <a:t>结构特征</a:t>
-            </a:r>
-            <a:r>
-              <a:rPr sz="1000" b="0">
-                <a:solidFill>
-                  <a:srgbClr val="6B7078"/>
-                </a:solidFill>
-                <a:latin typeface="Segoe UI"/>
-                <a:ea typeface="Microsoft YaHei"/>
-                <a:cs typeface="Microsoft YaHei"/>
-              </a:rPr>
-              <a:t>，还不是实体。</a:t>
-            </a:r>
-          </a:p>
-        </p:txBody>
-      </p:sp>
-      <p:sp>
-        <p:nvSpPr>
-          <p:cNvPr id="9" name="TextBox 8"/>
+              <a:t>诚实标注：分级不等于新颖性；它只说明「在参照系里没见到」，需要人工或文献门复核。</a:t>
+            </a:r>
+          </a:p>
+        </p:txBody>
+      </p:sp>
+      <p:sp>
+        <p:nvSpPr>
+          <p:cNvPr id="10" name="TextBox 9"/>
           <p:cNvSpPr txBox="1"/>
           <p:nvPr/>
         </p:nvSpPr>
@@ -11212,7 +12080,7 @@
                 <a:ea typeface="Microsoft YaHei"/>
                 <a:cs typeface="Microsoft YaHei"/>
               </a:rPr>
-              <a:t>22 / 24</a:t>
+              <a:t>22 / 26</a:t>
             </a:r>
           </a:p>
         </p:txBody>
@@ -11279,7 +12147,7 @@
                 <a:ea typeface="Microsoft YaHei"/>
                 <a:cs typeface="Microsoft YaHei"/>
               </a:rPr>
-              <a:t>五、遇到的瓶颈</a:t>
+              <a:t>四、扩展的实践 · 经验检索桥</a:t>
             </a:r>
           </a:p>
         </p:txBody>
@@ -11320,7 +12188,7 @@
                 <a:ea typeface="SimSun"/>
                 <a:cs typeface="SimSun"/>
               </a:rPr>
-              <a:t>尚未发现 N3 级新问题</a:t>
+              <a:t>经验检索桥：6,642 个组合词接上现实经验</a:t>
             </a:r>
           </a:p>
         </p:txBody>
@@ -11361,7 +12229,7 @@
                 <a:ea typeface="Microsoft YaHei"/>
                 <a:cs typeface="Microsoft YaHei"/>
               </a:rPr>
-              <a:t>问题是真的、量也很大；但</a:t>
+              <a:t>桥的作用是让想象力</a:t>
             </a:r>
             <a:r>
               <a:rPr sz="1200" b="1">
@@ -11372,7 +12240,7 @@
                 <a:ea typeface="Microsoft YaHei"/>
                 <a:cs typeface="Microsoft YaHei"/>
               </a:rPr>
-              <a:t>「真的」不等于「新的」</a:t>
+              <a:t>有据可依</a:t>
             </a:r>
             <a:r>
               <a:rPr sz="1200" b="0">
@@ -11383,14 +12251,36 @@
                 <a:ea typeface="Microsoft YaHei"/>
                 <a:cs typeface="Microsoft YaHei"/>
               </a:rPr>
-              <a:t>。这台机器停在这一步。</a:t>
+              <a:t>，而不是当裁判。检索未见</a:t>
+            </a:r>
+            <a:r>
+              <a:rPr sz="1200" b="1">
+                <a:solidFill>
+                  <a:srgbClr val="2F6B6B"/>
+                </a:solidFill>
+                <a:latin typeface="Segoe UI"/>
+                <a:ea typeface="Microsoft YaHei"/>
+                <a:cs typeface="Microsoft YaHei"/>
+              </a:rPr>
+              <a:t>不等于</a:t>
+            </a:r>
+            <a:r>
+              <a:rPr sz="1200" b="0">
+                <a:solidFill>
+                  <a:srgbClr val="4A4F57"/>
+                </a:solidFill>
+                <a:latin typeface="Segoe UI"/>
+                <a:ea typeface="Microsoft YaHei"/>
+                <a:cs typeface="Microsoft YaHei"/>
+              </a:rPr>
+              <a:t>概念为假；见不到也不阻止理解。</a:t>
             </a:r>
           </a:p>
         </p:txBody>
       </p:sp>
       <p:pic>
         <p:nvPicPr>
-          <p:cNvPr id="5" name="Picture 4" descr="fig_bottleneck.png"/>
+          <p:cNvPr id="5" name="Picture 4" descr="fig_bridge.png"/>
           <p:cNvPicPr>
             <a:picLocks noChangeAspect="1"/>
           </p:cNvPicPr>
@@ -11404,8 +12294,8 @@
         </p:blipFill>
         <p:spPr>
           <a:xfrm>
-            <a:off x="2091599" y="2670048"/>
-            <a:ext cx="8005754" cy="2414016"/>
+            <a:off x="685800" y="2670048"/>
+            <a:ext cx="4755269" cy="2414016"/>
           </a:xfrm>
           <a:prstGeom prst="rect">
             <a:avLst/>
@@ -11420,8 +12310,8 @@
         </p:nvSpPr>
         <p:spPr>
           <a:xfrm>
-            <a:off x="685800" y="5175504"/>
-            <a:ext cx="10817352" cy="548640"/>
+            <a:off x="685800" y="5166360"/>
+            <a:ext cx="5623560" cy="548640"/>
           </a:xfrm>
           <a:prstGeom prst="rect">
             <a:avLst/>
@@ -11448,14 +12338,156 @@
                 <a:ea typeface="Microsoft YaHei"/>
                 <a:cs typeface="Microsoft YaHei"/>
               </a:rPr>
-              <a:t>「N3 = 0」在账本里被独立记下 11 次，从未改变。各行的单位不同，因此不做同轴对比。</a:t>
-            </a:r>
-          </a:p>
-        </p:txBody>
-      </p:sp>
-      <p:sp>
-        <p:nvSpPr>
-          <p:cNvPr id="7" name="Rectangle 6"/>
+              <a:t>6,642 个组合词过双通道检索：词条通道命中 558 个，其中已建成独立条目仅 37 个；抓成语料 49 个词条，写出经验锚点 7 处。</a:t>
+            </a:r>
+          </a:p>
+        </p:txBody>
+      </p:sp>
+      <p:sp>
+        <p:nvSpPr>
+          <p:cNvPr id="7" name="TextBox 6"/>
+          <p:cNvSpPr txBox="1"/>
+          <p:nvPr/>
+        </p:nvSpPr>
+        <p:spPr>
+          <a:xfrm>
+            <a:off x="6629400" y="2624328"/>
+            <a:ext cx="4873752" cy="3566160"/>
+          </a:xfrm>
+          <a:prstGeom prst="rect">
+            <a:avLst/>
+          </a:prstGeom>
+          <a:noFill/>
+        </p:spPr>
+        <p:txBody>
+          <a:bodyPr wrap="square">
+            <a:spAutoFit/>
+          </a:bodyPr>
+          <a:lstStyle/>
+          <a:p>
+            <a:pPr>
+              <a:spcAft>
+                <a:spcPts val="100"/>
+              </a:spcAft>
+            </a:pPr>
+            <a:r>
+              <a:rPr sz="1150" b="1">
+                <a:solidFill>
+                  <a:srgbClr val="16191D"/>
+                </a:solidFill>
+                <a:latin typeface="Source Han Serif SC"/>
+                <a:ea typeface="SimSun"/>
+                <a:cs typeface="SimSun"/>
+              </a:rPr>
+              <a:t>命中率本身就是发现</a:t>
+            </a:r>
+          </a:p>
+          <a:p>
+            <a:pPr>
+              <a:spcAft>
+                <a:spcPts val="800"/>
+              </a:spcAft>
+            </a:pPr>
+            <a:r>
+              <a:rPr sz="1050" b="0">
+                <a:solidFill>
+                  <a:srgbClr val="4A4F57"/>
+                </a:solidFill>
+                <a:latin typeface="Segoe UI"/>
+                <a:ea typeface="Microsoft YaHei"/>
+                <a:cs typeface="Microsoft YaHei"/>
+              </a:rPr>
+              <a:t>词条通道命中约 8.4%，已建成独立条目约 0.6%。</a:t>
+            </a:r>
+            <a:r>
+              <a:rPr sz="1050" b="1">
+                <a:solidFill>
+                  <a:srgbClr val="2F6B6B"/>
+                </a:solidFill>
+                <a:latin typeface="Segoe UI"/>
+                <a:ea typeface="Microsoft YaHei"/>
+                <a:cs typeface="Microsoft YaHei"/>
+              </a:rPr>
+              <a:t>「检索未见」是常态，不是发现。</a:t>
+            </a:r>
+          </a:p>
+          <a:p>
+            <a:pPr>
+              <a:spcAft>
+                <a:spcPts val="100"/>
+              </a:spcAft>
+            </a:pPr>
+            <a:r>
+              <a:rPr sz="1150" b="1">
+                <a:solidFill>
+                  <a:srgbClr val="16191D"/>
+                </a:solidFill>
+                <a:latin typeface="Source Han Serif SC"/>
+                <a:ea typeface="SimSun"/>
+                <a:cs typeface="SimSun"/>
+              </a:rPr>
+              <a:t>桥不改变判定</a:t>
+            </a:r>
+          </a:p>
+          <a:p>
+            <a:pPr>
+              <a:spcAft>
+                <a:spcPts val="800"/>
+              </a:spcAft>
+            </a:pPr>
+            <a:r>
+              <a:rPr sz="1050" b="0">
+                <a:solidFill>
+                  <a:srgbClr val="4A4F57"/>
+                </a:solidFill>
+                <a:latin typeface="Segoe UI"/>
+                <a:ea typeface="Microsoft YaHei"/>
+                <a:cs typeface="Microsoft YaHei"/>
+              </a:rPr>
+              <a:t>过桥不改变任何判定；检索失败即退化为无锚点，概念照样成立（判据是「被理解」）。</a:t>
+            </a:r>
+          </a:p>
+          <a:p>
+            <a:pPr>
+              <a:spcAft>
+                <a:spcPts val="100"/>
+              </a:spcAft>
+            </a:pPr>
+            <a:r>
+              <a:rPr sz="1150" b="1">
+                <a:solidFill>
+                  <a:srgbClr val="16191D"/>
+                </a:solidFill>
+                <a:latin typeface="Source Han Serif SC"/>
+                <a:ea typeface="SimSun"/>
+                <a:cs typeface="SimSun"/>
+              </a:rPr>
+              <a:t>默认不过桥</a:t>
+            </a:r>
+          </a:p>
+          <a:p>
+            <a:pPr>
+              <a:spcAft>
+                <a:spcPts val="800"/>
+              </a:spcAft>
+            </a:pPr>
+            <a:r>
+              <a:rPr sz="1050" b="0">
+                <a:solidFill>
+                  <a:srgbClr val="4A4F57"/>
+                </a:solidFill>
+                <a:latin typeface="Segoe UI"/>
+                <a:ea typeface="Microsoft YaHei"/>
+                <a:cs typeface="Microsoft YaHei"/>
+              </a:rPr>
+              <a:t>默认只对少数指定组合写锚点；全量检索需要显式开关。</a:t>
+            </a:r>
+          </a:p>
+        </p:txBody>
+      </p:sp>
+      <p:sp>
+        <p:nvSpPr>
+          <p:cNvPr id="8" name="Rectangle 7"/>
           <p:cNvSpPr/>
           <p:nvPr/>
         </p:nvSpPr>
@@ -11499,7 +12531,7 @@
       </p:sp>
       <p:sp>
         <p:nvSpPr>
-          <p:cNvPr id="8" name="TextBox 7"/>
+          <p:cNvPr id="9" name="TextBox 8"/>
           <p:cNvSpPr txBox="1"/>
           <p:nvPr/>
         </p:nvSpPr>
@@ -11525,6 +12557,17 @@
               </a:spcAft>
             </a:pPr>
             <a:r>
+              <a:rPr sz="1000" b="0">
+                <a:solidFill>
+                  <a:srgbClr val="6B7078"/>
+                </a:solidFill>
+                <a:latin typeface="Segoe UI"/>
+                <a:ea typeface="Microsoft YaHei"/>
+                <a:cs typeface="Microsoft YaHei"/>
+              </a:rPr>
+              <a:t>产物：</a:t>
+            </a:r>
+            <a:r>
               <a:rPr sz="1000" b="1">
                 <a:solidFill>
                   <a:srgbClr val="2F6B6B"/>
@@ -11533,7 +12576,7 @@
                 <a:ea typeface="Microsoft YaHei"/>
                 <a:cs typeface="Microsoft YaHei"/>
               </a:rPr>
-              <a:t>差距的具体位置</a:t>
+              <a:t>out/demo/browser_mass_search.json</a:t>
             </a:r>
             <a:r>
               <a:rPr sz="1000" b="0">
@@ -11544,7 +12587,7 @@
                 <a:ea typeface="Microsoft YaHei"/>
                 <a:cs typeface="Microsoft YaHei"/>
               </a:rPr>
-              <a:t>：机器能判的问题里，多数主题</a:t>
+              <a:t> · </a:t>
             </a:r>
             <a:r>
               <a:rPr sz="1000" b="1">
@@ -11555,7 +12598,7 @@
                 <a:ea typeface="Microsoft YaHei"/>
                 <a:cs typeface="Microsoft YaHei"/>
               </a:rPr>
-              <a:t>前人已经问过</a:t>
+              <a:t>data/wiki/</a:t>
             </a:r>
             <a:r>
               <a:rPr sz="1000" b="0">
@@ -11566,7 +12609,7 @@
                 <a:ea typeface="Microsoft YaHei"/>
                 <a:cs typeface="Microsoft YaHei"/>
               </a:rPr>
-              <a:t>；真正缺的不是产能，而是</a:t>
+              <a:t>（语料）· </a:t>
             </a:r>
             <a:r>
               <a:rPr sz="1000" b="1">
@@ -11577,7 +12620,7 @@
                 <a:ea typeface="Microsoft YaHei"/>
                 <a:cs typeface="Microsoft YaHei"/>
               </a:rPr>
-              <a:t>能穿过显著性证书、且前人没问过</a:t>
+              <a:t>out/demo/word_understand.json</a:t>
             </a:r>
             <a:r>
               <a:rPr sz="1000" b="0">
@@ -11588,14 +12631,14 @@
                 <a:ea typeface="Microsoft YaHei"/>
                 <a:cs typeface="Microsoft YaHei"/>
               </a:rPr>
-              <a:t>的那一格。下一步要把力气放在「显著性证书」这道门上，而不是继续加产能。</a:t>
-            </a:r>
-          </a:p>
-        </p:txBody>
-      </p:sp>
-      <p:sp>
-        <p:nvSpPr>
-          <p:cNvPr id="9" name="TextBox 8"/>
+              <a:t>（锚点）。</a:t>
+            </a:r>
+          </a:p>
+        </p:txBody>
+      </p:sp>
+      <p:sp>
+        <p:nvSpPr>
+          <p:cNvPr id="10" name="TextBox 9"/>
           <p:cNvSpPr txBox="1"/>
           <p:nvPr/>
         </p:nvSpPr>
@@ -11629,7 +12672,7 @@
                 <a:ea typeface="Microsoft YaHei"/>
                 <a:cs typeface="Microsoft YaHei"/>
               </a:rPr>
-              <a:t>23 / 24</a:t>
+              <a:t>23 / 26</a:t>
             </a:r>
           </a:p>
         </p:txBody>
@@ -11668,7 +12711,7 @@
         </p:nvSpPr>
         <p:spPr>
           <a:xfrm>
-            <a:off x="685800" y="1170432"/>
+            <a:off x="685800" y="548640"/>
             <a:ext cx="10789920" cy="310896"/>
           </a:xfrm>
           <a:prstGeom prst="rect">
@@ -11696,7 +12739,7 @@
                 <a:ea typeface="Microsoft YaHei"/>
                 <a:cs typeface="Microsoft YaHei"/>
               </a:rPr>
-              <a:t>ASK-DAO-MACHINE</a:t>
+              <a:t>五、接下来的方向</a:t>
             </a:r>
           </a:p>
         </p:txBody>
@@ -11709,7 +12752,7 @@
         </p:nvSpPr>
         <p:spPr>
           <a:xfrm>
-            <a:off x="685800" y="1600200"/>
+            <a:off x="685800" y="896112"/>
             <a:ext cx="10789920" cy="1554480"/>
           </a:xfrm>
           <a:prstGeom prst="rect">
@@ -11729,7 +12772,7 @@
               </a:spcAft>
             </a:pPr>
             <a:r>
-              <a:rPr sz="3600" b="1">
+              <a:rPr sz="2700" b="1">
                 <a:solidFill>
                   <a:srgbClr val="16191D"/>
                 </a:solidFill>
@@ -11737,7 +12780,7 @@
                 <a:ea typeface="SimSun"/>
                 <a:cs typeface="SimSun"/>
               </a:rPr>
-              <a:t>谢谢</a:t>
+              <a:t>多模态实体提取：让图像与声音进入两条路</a:t>
             </a:r>
           </a:p>
         </p:txBody>
@@ -11750,7 +12793,7 @@
         </p:nvSpPr>
         <p:spPr>
           <a:xfrm>
-            <a:off x="685800" y="3063240"/>
+            <a:off x="685800" y="1828800"/>
             <a:ext cx="10515600" cy="914400"/>
           </a:xfrm>
           <a:prstGeom prst="rect">
@@ -11778,21 +12821,89 @@
                 <a:ea typeface="Microsoft YaHei"/>
                 <a:cs typeface="Microsoft YaHei"/>
               </a:rPr>
-              <a:t>问道 · ask-dao-machine · MIT License · 全部数字可用仓库里的命令复现</a:t>
-            </a:r>
-          </a:p>
-        </p:txBody>
-      </p:sp>
-      <p:sp>
-        <p:nvSpPr>
-          <p:cNvPr id="5" name="TextBox 4"/>
+              <a:t>现在经验</a:t>
+            </a:r>
+            <a:r>
+              <a:rPr sz="1200" b="1">
+                <a:solidFill>
+                  <a:srgbClr val="2F6B6B"/>
+                </a:solidFill>
+                <a:latin typeface="Segoe UI"/>
+                <a:ea typeface="Microsoft YaHei"/>
+                <a:cs typeface="Microsoft YaHei"/>
+              </a:rPr>
+              <a:t>只能以文字进入</a:t>
+            </a:r>
+            <a:r>
+              <a:rPr sz="1200" b="0">
+                <a:solidFill>
+                  <a:srgbClr val="4A4F57"/>
+                </a:solidFill>
+                <a:latin typeface="Segoe UI"/>
+                <a:ea typeface="Microsoft YaHei"/>
+                <a:cs typeface="Microsoft YaHei"/>
+              </a:rPr>
+              <a:t>系统；图像与声音还没有进入两条路的入口。下一步是把这个「反向」补上——</a:t>
+            </a:r>
+            <a:r>
+              <a:rPr sz="1200" b="1">
+                <a:solidFill>
+                  <a:srgbClr val="2F6B6B"/>
+                </a:solidFill>
+                <a:latin typeface="Segoe UI"/>
+                <a:ea typeface="Microsoft YaHei"/>
+                <a:cs typeface="Microsoft YaHei"/>
+              </a:rPr>
+              <a:t>尚未实现</a:t>
+            </a:r>
+            <a:r>
+              <a:rPr sz="1200" b="0">
+                <a:solidFill>
+                  <a:srgbClr val="4A4F57"/>
+                </a:solidFill>
+                <a:latin typeface="Segoe UI"/>
+                <a:ea typeface="Microsoft YaHei"/>
+                <a:cs typeface="Microsoft YaHei"/>
+              </a:rPr>
+              <a:t>。</a:t>
+            </a:r>
+          </a:p>
+        </p:txBody>
+      </p:sp>
+      <p:pic>
+        <p:nvPicPr>
+          <p:cNvPr id="5" name="Picture 4" descr="fig_multimodal.png"/>
+          <p:cNvPicPr>
+            <a:picLocks noChangeAspect="1"/>
+          </p:cNvPicPr>
+          <p:nvPr/>
+        </p:nvPicPr>
+        <p:blipFill>
+          <a:blip r:embed="rId2"/>
+          <a:stretch>
+            <a:fillRect/>
+          </a:stretch>
+        </p:blipFill>
+        <p:spPr>
+          <a:xfrm>
+            <a:off x="2298644" y="2670048"/>
+            <a:ext cx="7591664" cy="2414016"/>
+          </a:xfrm>
+          <a:prstGeom prst="rect">
+            <a:avLst/>
+          </a:prstGeom>
+        </p:spPr>
+      </p:pic>
+      <p:sp>
+        <p:nvSpPr>
+          <p:cNvPr id="6" name="TextBox 5"/>
           <p:cNvSpPr txBox="1"/>
           <p:nvPr/>
         </p:nvSpPr>
         <p:spPr>
           <a:xfrm>
-            <a:off x="685800" y="3977640"/>
-            <a:ext cx="10607040" cy="2377440"/>
+            <a:off x="685800" y="5175504"/>
+            <a:ext cx="10817352" cy="548640"/>
           </a:xfrm>
           <a:prstGeom prst="rect">
             <a:avLst/>
@@ -11807,195 +12918,88 @@
           <a:p>
             <a:pPr>
               <a:spcAft>
-                <a:spcPts val="600"/>
-              </a:spcAft>
-            </a:pPr>
-            <a:r>
-              <a:rPr sz="1150" b="0">
+                <a:spcPts val="0"/>
+              </a:spcAft>
+            </a:pPr>
+            <a:r>
+              <a:rPr sz="900" b="0">
+                <a:solidFill>
+                  <a:srgbClr val="6B7078"/>
+                </a:solidFill>
+                <a:latin typeface="Segoe UI"/>
+                <a:ea typeface="Microsoft YaHei"/>
+                <a:cs typeface="Microsoft YaHei"/>
+              </a:rPr>
+              <a:t>实线 = 现在能做的（文字 → 问题 / 概念）。虚线 = 目标（图像 / 声音 → 直接抽实体 → 两条路的入口）。</a:t>
+            </a:r>
+            <a:r>
+              <a:rPr sz="900" b="1">
                 <a:solidFill>
                   <a:srgbClr val="2F6B6B"/>
                 </a:solidFill>
                 <a:latin typeface="Segoe UI"/>
                 <a:ea typeface="Microsoft YaHei"/>
                 <a:cs typeface="Microsoft YaHei"/>
-                <a:hlinkClick r:id="rId2"/>
-              </a:rPr>
-              <a:t>项目站点　</a:t>
-            </a:r>
-            <a:r>
-              <a:rPr sz="1150" b="1">
-                <a:solidFill>
-                  <a:srgbClr val="2F6B6B"/>
-                </a:solidFill>
-                <a:latin typeface="Segoe UI"/>
-                <a:ea typeface="Microsoft YaHei"/>
-                <a:cs typeface="Microsoft YaHei"/>
-              </a:rPr>
-              <a:t>https://shikunpneg.github.io/ask-dao-machine/</a:t>
-            </a:r>
-          </a:p>
-          <a:p>
-            <a:pPr>
-              <a:spcAft>
-                <a:spcPts val="600"/>
-              </a:spcAft>
-            </a:pPr>
-            <a:r>
-              <a:rPr sz="1150" b="0">
-                <a:solidFill>
-                  <a:srgbClr val="2F6B6B"/>
-                </a:solidFill>
-                <a:latin typeface="Segoe UI"/>
-                <a:ea typeface="Microsoft YaHei"/>
-                <a:cs typeface="Microsoft YaHei"/>
-                <a:hlinkClick r:id="rId3"/>
-              </a:rPr>
-              <a:t>命令行文档　</a:t>
-            </a:r>
-            <a:r>
-              <a:rPr sz="1150" b="1">
-                <a:solidFill>
-                  <a:srgbClr val="2F6B6B"/>
-                </a:solidFill>
-                <a:latin typeface="Segoe UI"/>
-                <a:ea typeface="Microsoft YaHei"/>
-                <a:cs typeface="Microsoft YaHei"/>
-              </a:rPr>
-              <a:t>https://shikunpneg.github.io/ask-dao-machine/guide/cli.html</a:t>
-            </a:r>
-          </a:p>
-          <a:p>
-            <a:pPr>
-              <a:spcAft>
-                <a:spcPts val="600"/>
-              </a:spcAft>
-            </a:pPr>
-            <a:r>
-              <a:rPr sz="1150" b="0">
-                <a:solidFill>
-                  <a:srgbClr val="2F6B6B"/>
-                </a:solidFill>
-                <a:latin typeface="Segoe UI"/>
-                <a:ea typeface="Microsoft YaHei"/>
-                <a:cs typeface="Microsoft YaHei"/>
-                <a:hlinkClick r:id="rId4"/>
-              </a:rPr>
-              <a:t>生物医学完整演示　</a:t>
-            </a:r>
-            <a:r>
-              <a:rPr sz="1150" b="1">
-                <a:solidFill>
-                  <a:srgbClr val="2F6B6B"/>
-                </a:solidFill>
-                <a:latin typeface="Segoe UI"/>
-                <a:ea typeface="Microsoft YaHei"/>
-                <a:cs typeface="Microsoft YaHei"/>
-              </a:rPr>
-              <a:t>https://shikunpneg.github.io/ask-dao-machine/guide/demo-biomed.html</a:t>
-            </a:r>
-          </a:p>
-          <a:p>
-            <a:pPr>
-              <a:spcAft>
-                <a:spcPts val="600"/>
-              </a:spcAft>
-            </a:pPr>
-            <a:r>
-              <a:rPr sz="1150" b="0">
-                <a:solidFill>
-                  <a:srgbClr val="2F6B6B"/>
-                </a:solidFill>
-                <a:latin typeface="Segoe UI"/>
-                <a:ea typeface="Microsoft YaHei"/>
-                <a:cs typeface="Microsoft YaHei"/>
-                <a:hlinkClick r:id="rId5"/>
-              </a:rPr>
-              <a:t>结果与证据手册　</a:t>
-            </a:r>
-            <a:r>
-              <a:rPr sz="1150" b="1">
-                <a:solidFill>
-                  <a:srgbClr val="2F6B6B"/>
-                </a:solidFill>
-                <a:latin typeface="Segoe UI"/>
-                <a:ea typeface="Microsoft YaHei"/>
-                <a:cs typeface="Microsoft YaHei"/>
-              </a:rPr>
-              <a:t>https://shikunpneg.github.io/ask-dao-machine/guide/results.html</a:t>
-            </a:r>
-          </a:p>
-          <a:p>
-            <a:pPr>
-              <a:spcAft>
-                <a:spcPts val="600"/>
-              </a:spcAft>
-            </a:pPr>
-            <a:r>
-              <a:rPr sz="1150" b="0">
-                <a:solidFill>
-                  <a:srgbClr val="2F6B6B"/>
-                </a:solidFill>
-                <a:latin typeface="Segoe UI"/>
-                <a:ea typeface="Microsoft YaHei"/>
-                <a:cs typeface="Microsoft YaHei"/>
-                <a:hlinkClick r:id="rId6"/>
-              </a:rPr>
-              <a:t>ModelScope · dao-v-0.3　</a:t>
-            </a:r>
-            <a:r>
-              <a:rPr sz="1150" b="1">
-                <a:solidFill>
-                  <a:srgbClr val="2F6B6B"/>
-                </a:solidFill>
-                <a:latin typeface="Segoe UI"/>
-                <a:ea typeface="Microsoft YaHei"/>
-                <a:cs typeface="Microsoft YaHei"/>
-              </a:rPr>
-              <a:t>https://www.modelscope.cn/studios/skopskp/dao-v-0.3</a:t>
-            </a:r>
-          </a:p>
-          <a:p>
-            <a:pPr>
-              <a:spcAft>
-                <a:spcPts val="600"/>
-              </a:spcAft>
-            </a:pPr>
-            <a:r>
-              <a:rPr sz="1150" b="0">
-                <a:solidFill>
-                  <a:srgbClr val="2F6B6B"/>
-                </a:solidFill>
-                <a:latin typeface="Segoe UI"/>
-                <a:ea typeface="Microsoft YaHei"/>
-                <a:cs typeface="Microsoft YaHei"/>
-                <a:hlinkClick r:id="rId7"/>
-              </a:rPr>
-              <a:t>GitHub　</a:t>
-            </a:r>
-            <a:r>
-              <a:rPr sz="1150" b="1">
-                <a:solidFill>
-                  <a:srgbClr val="2F6B6B"/>
-                </a:solidFill>
-                <a:latin typeface="Segoe UI"/>
-                <a:ea typeface="Microsoft YaHei"/>
-                <a:cs typeface="Microsoft YaHei"/>
-              </a:rPr>
-              <a:t>https://github.com/shikunpneg/ask-dao</a:t>
-            </a:r>
-          </a:p>
-        </p:txBody>
-      </p:sp>
-      <p:sp>
-        <p:nvSpPr>
-          <p:cNvPr id="6" name="TextBox 5"/>
+              </a:rPr>
+              <a:t>虚线框内是目标，不是成果。</a:t>
+            </a:r>
+          </a:p>
+        </p:txBody>
+      </p:sp>
+      <p:sp>
+        <p:nvSpPr>
+          <p:cNvPr id="7" name="Rectangle 6"/>
+          <p:cNvSpPr/>
+          <p:nvPr/>
+        </p:nvSpPr>
+        <p:spPr>
+          <a:xfrm>
+            <a:off x="685800" y="5815584"/>
+            <a:ext cx="10789920" cy="9525"/>
+          </a:xfrm>
+          <a:prstGeom prst="rect">
+            <a:avLst/>
+          </a:prstGeom>
+          <a:solidFill>
+            <a:srgbClr val="C9C2B4"/>
+          </a:solidFill>
+          <a:ln>
+            <a:noFill/>
+          </a:ln>
+          <a:effectLst/>
+        </p:spPr>
+        <p:style>
+          <a:lnRef idx="1">
+            <a:schemeClr val="accent1"/>
+          </a:lnRef>
+          <a:fillRef idx="3">
+            <a:schemeClr val="accent1"/>
+          </a:fillRef>
+          <a:effectRef idx="2">
+            <a:schemeClr val="accent1"/>
+          </a:effectRef>
+          <a:fontRef idx="minor">
+            <a:schemeClr val="lt1"/>
+          </a:fontRef>
+        </p:style>
+        <p:txBody>
+          <a:bodyPr rtlCol="0" anchor="ctr"/>
+          <a:lstStyle/>
+          <a:p>
+            <a:pPr algn="ctr"/>
+          </a:p>
+        </p:txBody>
+      </p:sp>
+      <p:sp>
+        <p:nvSpPr>
+          <p:cNvPr id="8" name="TextBox 7"/>
           <p:cNvSpPr txBox="1"/>
           <p:nvPr/>
         </p:nvSpPr>
         <p:spPr>
           <a:xfrm>
-            <a:off x="685800" y="5760720"/>
-            <a:ext cx="10607040" cy="365760"/>
+            <a:off x="685800" y="5897880"/>
+            <a:ext cx="10424160" cy="731520"/>
           </a:xfrm>
           <a:prstGeom prst="rect">
             <a:avLst/>
@@ -12014,29 +13018,222 @@
               </a:spcAft>
             </a:pPr>
             <a:r>
-              <a:rPr sz="1200" b="0">
+              <a:rPr sz="1000" b="0">
+                <a:solidFill>
+                  <a:srgbClr val="6B7078"/>
+                </a:solidFill>
+                <a:latin typeface="Segoe UI"/>
+                <a:ea typeface="Microsoft YaHei"/>
+                <a:cs typeface="Microsoft YaHei"/>
+              </a:rPr>
+              <a:t>已有最小闭环：</a:t>
+            </a:r>
+            <a:r>
+              <a:rPr sz="1000" b="1">
                 <a:solidFill>
                   <a:srgbClr val="2F6B6B"/>
+                </a:solidFill>
+                <a:latin typeface="Segoe UI"/>
+                <a:ea typeface="Microsoft YaHei"/>
+                <a:cs typeface="Microsoft YaHei"/>
+              </a:rPr>
+              <a:t>perceive</a:t>
+            </a:r>
+            <a:r>
+              <a:rPr sz="1000" b="0">
+                <a:solidFill>
+                  <a:srgbClr val="6B7078"/>
+                </a:solidFill>
+                <a:latin typeface="Segoe UI"/>
+                <a:ea typeface="Microsoft YaHei"/>
+                <a:cs typeface="Microsoft YaHei"/>
+              </a:rPr>
+              <a:t> 能把图像 → 结构特征 → 带判定路由的问题；但它抽取的是</a:t>
+            </a:r>
+            <a:r>
+              <a:rPr sz="1000" b="1">
+                <a:solidFill>
+                  <a:srgbClr val="2F6B6B"/>
+                </a:solidFill>
+                <a:latin typeface="Segoe UI"/>
+                <a:ea typeface="Microsoft YaHei"/>
+                <a:cs typeface="Microsoft YaHei"/>
+              </a:rPr>
+              <a:t>结构特征</a:t>
+            </a:r>
+            <a:r>
+              <a:rPr sz="1000" b="0">
+                <a:solidFill>
+                  <a:srgbClr val="6B7078"/>
+                </a:solidFill>
+                <a:latin typeface="Segoe UI"/>
+                <a:ea typeface="Microsoft YaHei"/>
+                <a:cs typeface="Microsoft YaHei"/>
+              </a:rPr>
+              <a:t>，还不是实体。</a:t>
+            </a:r>
+          </a:p>
+        </p:txBody>
+      </p:sp>
+      <p:sp>
+        <p:nvSpPr>
+          <p:cNvPr id="9" name="TextBox 8"/>
+          <p:cNvSpPr txBox="1"/>
+          <p:nvPr/>
+        </p:nvSpPr>
+        <p:spPr>
+          <a:xfrm>
+            <a:off x="10424160" y="6355080"/>
+            <a:ext cx="1051560" cy="274320"/>
+          </a:xfrm>
+          <a:prstGeom prst="rect">
+            <a:avLst/>
+          </a:prstGeom>
+          <a:noFill/>
+        </p:spPr>
+        <p:txBody>
+          <a:bodyPr wrap="square">
+            <a:spAutoFit/>
+          </a:bodyPr>
+          <a:lstStyle/>
+          <a:p>
+            <a:pPr algn="r">
+              <a:spcAft>
+                <a:spcPts val="0"/>
+              </a:spcAft>
+            </a:pPr>
+            <a:r>
+              <a:rPr sz="950" b="0">
+                <a:solidFill>
+                  <a:srgbClr val="9A7B3F"/>
+                </a:solidFill>
+                <a:latin typeface="Segoe UI"/>
+                <a:ea typeface="Microsoft YaHei"/>
+                <a:cs typeface="Microsoft YaHei"/>
+              </a:rPr>
+              <a:t>24 / 26</a:t>
+            </a:r>
+          </a:p>
+        </p:txBody>
+      </p:sp>
+    </p:spTree>
+  </p:cSld>
+  <p:clrMapOvr>
+    <a:masterClrMapping/>
+  </p:clrMapOvr>
+</p:sld>
+</file>
+
+<file path=ppt/slides/slide25.xml><?xml version="1.0" encoding="utf-8"?>
+<p:sld xmlns:a="http://schemas.openxmlformats.org/drawingml/2006/main" xmlns:p="http://schemas.openxmlformats.org/presentationml/2006/main" xmlns:r="http://schemas.openxmlformats.org/officeDocument/2006/relationships">
+  <p:cSld>
+    <p:bg>
+      <p:bgPr>
+        <a:solidFill>
+          <a:srgbClr val="F6F2E9"/>
+        </a:solidFill>
+        <a:effectLst/>
+      </p:bgPr>
+    </p:bg>
+    <p:spTree>
+      <p:nvGrpSpPr>
+        <p:cNvPr id="1" name=""/>
+        <p:cNvGrpSpPr/>
+        <p:nvPr/>
+      </p:nvGrpSpPr>
+      <p:grpSpPr/>
+      <p:sp>
+        <p:nvSpPr>
+          <p:cNvPr id="2" name="TextBox 1"/>
+          <p:cNvSpPr txBox="1"/>
+          <p:nvPr/>
+        </p:nvSpPr>
+        <p:spPr>
+          <a:xfrm>
+            <a:off x="685800" y="548640"/>
+            <a:ext cx="10789920" cy="310896"/>
+          </a:xfrm>
+          <a:prstGeom prst="rect">
+            <a:avLst/>
+          </a:prstGeom>
+          <a:noFill/>
+        </p:spPr>
+        <p:txBody>
+          <a:bodyPr wrap="square">
+            <a:spAutoFit/>
+          </a:bodyPr>
+          <a:lstStyle/>
+          <a:p>
+            <a:pPr>
+              <a:spcAft>
+                <a:spcPts val="0"/>
+              </a:spcAft>
+            </a:pPr>
+            <a:r>
+              <a:rPr sz="1050" b="1">
+                <a:solidFill>
+                  <a:srgbClr val="9A7B3F"/>
+                </a:solidFill>
+                <a:latin typeface="Segoe UI"/>
+                <a:ea typeface="Microsoft YaHei"/>
+                <a:cs typeface="Microsoft YaHei"/>
+              </a:rPr>
+              <a:t>五、遇到的瓶颈</a:t>
+            </a:r>
+          </a:p>
+        </p:txBody>
+      </p:sp>
+      <p:sp>
+        <p:nvSpPr>
+          <p:cNvPr id="3" name="TextBox 2"/>
+          <p:cNvSpPr txBox="1"/>
+          <p:nvPr/>
+        </p:nvSpPr>
+        <p:spPr>
+          <a:xfrm>
+            <a:off x="685800" y="896112"/>
+            <a:ext cx="10789920" cy="1554480"/>
+          </a:xfrm>
+          <a:prstGeom prst="rect">
+            <a:avLst/>
+          </a:prstGeom>
+          <a:noFill/>
+        </p:spPr>
+        <p:txBody>
+          <a:bodyPr wrap="square">
+            <a:spAutoFit/>
+          </a:bodyPr>
+          <a:lstStyle/>
+          <a:p>
+            <a:pPr>
+              <a:spcAft>
+                <a:spcPts val="200"/>
+              </a:spcAft>
+            </a:pPr>
+            <a:r>
+              <a:rPr sz="2700" b="1">
+                <a:solidFill>
+                  <a:srgbClr val="16191D"/>
                 </a:solidFill>
                 <a:latin typeface="Source Han Serif SC"/>
                 <a:ea typeface="SimSun"/>
                 <a:cs typeface="SimSun"/>
               </a:rPr>
-              <a:t>道生一，一生二，二生三，三生万物</a:t>
-            </a:r>
-          </a:p>
-        </p:txBody>
-      </p:sp>
-      <p:sp>
-        <p:nvSpPr>
-          <p:cNvPr id="7" name="TextBox 6"/>
+              <a:t>尚未发现 N3 级新问题</a:t>
+            </a:r>
+          </a:p>
+        </p:txBody>
+      </p:sp>
+      <p:sp>
+        <p:nvSpPr>
+          <p:cNvPr id="4" name="TextBox 3"/>
           <p:cNvSpPr txBox="1"/>
           <p:nvPr/>
         </p:nvSpPr>
         <p:spPr>
           <a:xfrm>
-            <a:off x="10424160" y="6355080"/>
-            <a:ext cx="1051560" cy="274320"/>
+            <a:off x="685800" y="1828800"/>
+            <a:ext cx="10515600" cy="914400"/>
           </a:xfrm>
           <a:prstGeom prst="rect">
             <a:avLst/>
@@ -12049,6 +13246,274 @@
           </a:bodyPr>
           <a:lstStyle/>
           <a:p>
+            <a:pPr>
+              <a:spcAft>
+                <a:spcPts val="0"/>
+              </a:spcAft>
+            </a:pPr>
+            <a:r>
+              <a:rPr sz="1200" b="0">
+                <a:solidFill>
+                  <a:srgbClr val="4A4F57"/>
+                </a:solidFill>
+                <a:latin typeface="Segoe UI"/>
+                <a:ea typeface="Microsoft YaHei"/>
+                <a:cs typeface="Microsoft YaHei"/>
+              </a:rPr>
+              <a:t>问题是真的、量也很大；但</a:t>
+            </a:r>
+            <a:r>
+              <a:rPr sz="1200" b="1">
+                <a:solidFill>
+                  <a:srgbClr val="2F6B6B"/>
+                </a:solidFill>
+                <a:latin typeface="Segoe UI"/>
+                <a:ea typeface="Microsoft YaHei"/>
+                <a:cs typeface="Microsoft YaHei"/>
+              </a:rPr>
+              <a:t>「真的」不等于「新的」</a:t>
+            </a:r>
+            <a:r>
+              <a:rPr sz="1200" b="0">
+                <a:solidFill>
+                  <a:srgbClr val="4A4F57"/>
+                </a:solidFill>
+                <a:latin typeface="Segoe UI"/>
+                <a:ea typeface="Microsoft YaHei"/>
+                <a:cs typeface="Microsoft YaHei"/>
+              </a:rPr>
+              <a:t>。这台机器停在这一步。</a:t>
+            </a:r>
+          </a:p>
+        </p:txBody>
+      </p:sp>
+      <p:pic>
+        <p:nvPicPr>
+          <p:cNvPr id="5" name="Picture 4" descr="fig_bottleneck.png"/>
+          <p:cNvPicPr>
+            <a:picLocks noChangeAspect="1"/>
+          </p:cNvPicPr>
+          <p:nvPr/>
+        </p:nvPicPr>
+        <p:blipFill>
+          <a:blip r:embed="rId2"/>
+          <a:stretch>
+            <a:fillRect/>
+          </a:stretch>
+        </p:blipFill>
+        <p:spPr>
+          <a:xfrm>
+            <a:off x="2091599" y="2670048"/>
+            <a:ext cx="8005754" cy="2414016"/>
+          </a:xfrm>
+          <a:prstGeom prst="rect">
+            <a:avLst/>
+          </a:prstGeom>
+        </p:spPr>
+      </p:pic>
+      <p:sp>
+        <p:nvSpPr>
+          <p:cNvPr id="6" name="TextBox 5"/>
+          <p:cNvSpPr txBox="1"/>
+          <p:nvPr/>
+        </p:nvSpPr>
+        <p:spPr>
+          <a:xfrm>
+            <a:off x="685800" y="5175504"/>
+            <a:ext cx="10817352" cy="548640"/>
+          </a:xfrm>
+          <a:prstGeom prst="rect">
+            <a:avLst/>
+          </a:prstGeom>
+          <a:noFill/>
+        </p:spPr>
+        <p:txBody>
+          <a:bodyPr wrap="square">
+            <a:spAutoFit/>
+          </a:bodyPr>
+          <a:lstStyle/>
+          <a:p>
+            <a:pPr>
+              <a:spcAft>
+                <a:spcPts val="0"/>
+              </a:spcAft>
+            </a:pPr>
+            <a:r>
+              <a:rPr sz="900" b="0">
+                <a:solidFill>
+                  <a:srgbClr val="6B7078"/>
+                </a:solidFill>
+                <a:latin typeface="Segoe UI"/>
+                <a:ea typeface="Microsoft YaHei"/>
+                <a:cs typeface="Microsoft YaHei"/>
+              </a:rPr>
+              <a:t>「N3 = 0」在账本里被独立记下 11 次，从未改变。各行的单位不同，因此不做同轴对比。</a:t>
+            </a:r>
+          </a:p>
+        </p:txBody>
+      </p:sp>
+      <p:sp>
+        <p:nvSpPr>
+          <p:cNvPr id="7" name="Rectangle 6"/>
+          <p:cNvSpPr/>
+          <p:nvPr/>
+        </p:nvSpPr>
+        <p:spPr>
+          <a:xfrm>
+            <a:off x="685800" y="5815584"/>
+            <a:ext cx="10789920" cy="9525"/>
+          </a:xfrm>
+          <a:prstGeom prst="rect">
+            <a:avLst/>
+          </a:prstGeom>
+          <a:solidFill>
+            <a:srgbClr val="C9C2B4"/>
+          </a:solidFill>
+          <a:ln>
+            <a:noFill/>
+          </a:ln>
+          <a:effectLst/>
+        </p:spPr>
+        <p:style>
+          <a:lnRef idx="1">
+            <a:schemeClr val="accent1"/>
+          </a:lnRef>
+          <a:fillRef idx="3">
+            <a:schemeClr val="accent1"/>
+          </a:fillRef>
+          <a:effectRef idx="2">
+            <a:schemeClr val="accent1"/>
+          </a:effectRef>
+          <a:fontRef idx="minor">
+            <a:schemeClr val="lt1"/>
+          </a:fontRef>
+        </p:style>
+        <p:txBody>
+          <a:bodyPr rtlCol="0" anchor="ctr"/>
+          <a:lstStyle/>
+          <a:p>
+            <a:pPr algn="ctr"/>
+          </a:p>
+        </p:txBody>
+      </p:sp>
+      <p:sp>
+        <p:nvSpPr>
+          <p:cNvPr id="8" name="TextBox 7"/>
+          <p:cNvSpPr txBox="1"/>
+          <p:nvPr/>
+        </p:nvSpPr>
+        <p:spPr>
+          <a:xfrm>
+            <a:off x="685800" y="5897880"/>
+            <a:ext cx="10424160" cy="731520"/>
+          </a:xfrm>
+          <a:prstGeom prst="rect">
+            <a:avLst/>
+          </a:prstGeom>
+          <a:noFill/>
+        </p:spPr>
+        <p:txBody>
+          <a:bodyPr wrap="square">
+            <a:spAutoFit/>
+          </a:bodyPr>
+          <a:lstStyle/>
+          <a:p>
+            <a:pPr>
+              <a:spcAft>
+                <a:spcPts val="0"/>
+              </a:spcAft>
+            </a:pPr>
+            <a:r>
+              <a:rPr sz="1000" b="1">
+                <a:solidFill>
+                  <a:srgbClr val="2F6B6B"/>
+                </a:solidFill>
+                <a:latin typeface="Segoe UI"/>
+                <a:ea typeface="Microsoft YaHei"/>
+                <a:cs typeface="Microsoft YaHei"/>
+              </a:rPr>
+              <a:t>差距的具体位置</a:t>
+            </a:r>
+            <a:r>
+              <a:rPr sz="1000" b="0">
+                <a:solidFill>
+                  <a:srgbClr val="6B7078"/>
+                </a:solidFill>
+                <a:latin typeface="Segoe UI"/>
+                <a:ea typeface="Microsoft YaHei"/>
+                <a:cs typeface="Microsoft YaHei"/>
+              </a:rPr>
+              <a:t>：机器能判的问题里，多数主题</a:t>
+            </a:r>
+            <a:r>
+              <a:rPr sz="1000" b="1">
+                <a:solidFill>
+                  <a:srgbClr val="2F6B6B"/>
+                </a:solidFill>
+                <a:latin typeface="Segoe UI"/>
+                <a:ea typeface="Microsoft YaHei"/>
+                <a:cs typeface="Microsoft YaHei"/>
+              </a:rPr>
+              <a:t>前人已经问过</a:t>
+            </a:r>
+            <a:r>
+              <a:rPr sz="1000" b="0">
+                <a:solidFill>
+                  <a:srgbClr val="6B7078"/>
+                </a:solidFill>
+                <a:latin typeface="Segoe UI"/>
+                <a:ea typeface="Microsoft YaHei"/>
+                <a:cs typeface="Microsoft YaHei"/>
+              </a:rPr>
+              <a:t>；真正缺的不是产能，而是</a:t>
+            </a:r>
+            <a:r>
+              <a:rPr sz="1000" b="1">
+                <a:solidFill>
+                  <a:srgbClr val="2F6B6B"/>
+                </a:solidFill>
+                <a:latin typeface="Segoe UI"/>
+                <a:ea typeface="Microsoft YaHei"/>
+                <a:cs typeface="Microsoft YaHei"/>
+              </a:rPr>
+              <a:t>能穿过显著性证书、且前人没问过</a:t>
+            </a:r>
+            <a:r>
+              <a:rPr sz="1000" b="0">
+                <a:solidFill>
+                  <a:srgbClr val="6B7078"/>
+                </a:solidFill>
+                <a:latin typeface="Segoe UI"/>
+                <a:ea typeface="Microsoft YaHei"/>
+                <a:cs typeface="Microsoft YaHei"/>
+              </a:rPr>
+              <a:t>的那一格。下一步要把力气放在「显著性证书」这道门上，而不是继续加产能。</a:t>
+            </a:r>
+          </a:p>
+        </p:txBody>
+      </p:sp>
+      <p:sp>
+        <p:nvSpPr>
+          <p:cNvPr id="9" name="TextBox 8"/>
+          <p:cNvSpPr txBox="1"/>
+          <p:nvPr/>
+        </p:nvSpPr>
+        <p:spPr>
+          <a:xfrm>
+            <a:off x="10424160" y="6355080"/>
+            <a:ext cx="1051560" cy="274320"/>
+          </a:xfrm>
+          <a:prstGeom prst="rect">
+            <a:avLst/>
+          </a:prstGeom>
+          <a:noFill/>
+        </p:spPr>
+        <p:txBody>
+          <a:bodyPr wrap="square">
+            <a:spAutoFit/>
+          </a:bodyPr>
+          <a:lstStyle/>
+          <a:p>
             <a:pPr algn="r">
               <a:spcAft>
                 <a:spcPts val="0"/>
@@ -12063,7 +13528,441 @@
                 <a:ea typeface="Microsoft YaHei"/>
                 <a:cs typeface="Microsoft YaHei"/>
               </a:rPr>
-              <a:t>24 / 24</a:t>
+              <a:t>25 / 26</a:t>
+            </a:r>
+          </a:p>
+        </p:txBody>
+      </p:sp>
+    </p:spTree>
+  </p:cSld>
+  <p:clrMapOvr>
+    <a:masterClrMapping/>
+  </p:clrMapOvr>
+</p:sld>
+</file>
+
+<file path=ppt/slides/slide26.xml><?xml version="1.0" encoding="utf-8"?>
+<p:sld xmlns:a="http://schemas.openxmlformats.org/drawingml/2006/main" xmlns:p="http://schemas.openxmlformats.org/presentationml/2006/main" xmlns:r="http://schemas.openxmlformats.org/officeDocument/2006/relationships">
+  <p:cSld>
+    <p:bg>
+      <p:bgPr>
+        <a:solidFill>
+          <a:srgbClr val="F6F2E9"/>
+        </a:solidFill>
+        <a:effectLst/>
+      </p:bgPr>
+    </p:bg>
+    <p:spTree>
+      <p:nvGrpSpPr>
+        <p:cNvPr id="1" name=""/>
+        <p:cNvGrpSpPr/>
+        <p:nvPr/>
+      </p:nvGrpSpPr>
+      <p:grpSpPr/>
+      <p:sp>
+        <p:nvSpPr>
+          <p:cNvPr id="2" name="TextBox 1"/>
+          <p:cNvSpPr txBox="1"/>
+          <p:nvPr/>
+        </p:nvSpPr>
+        <p:spPr>
+          <a:xfrm>
+            <a:off x="685800" y="1170432"/>
+            <a:ext cx="10789920" cy="310896"/>
+          </a:xfrm>
+          <a:prstGeom prst="rect">
+            <a:avLst/>
+          </a:prstGeom>
+          <a:noFill/>
+        </p:spPr>
+        <p:txBody>
+          <a:bodyPr wrap="square">
+            <a:spAutoFit/>
+          </a:bodyPr>
+          <a:lstStyle/>
+          <a:p>
+            <a:pPr>
+              <a:spcAft>
+                <a:spcPts val="0"/>
+              </a:spcAft>
+            </a:pPr>
+            <a:r>
+              <a:rPr sz="1050" b="1">
+                <a:solidFill>
+                  <a:srgbClr val="9A7B3F"/>
+                </a:solidFill>
+                <a:latin typeface="Segoe UI"/>
+                <a:ea typeface="Microsoft YaHei"/>
+                <a:cs typeface="Microsoft YaHei"/>
+              </a:rPr>
+              <a:t>ASK-DAO-MACHINE</a:t>
+            </a:r>
+          </a:p>
+        </p:txBody>
+      </p:sp>
+      <p:sp>
+        <p:nvSpPr>
+          <p:cNvPr id="3" name="TextBox 2"/>
+          <p:cNvSpPr txBox="1"/>
+          <p:nvPr/>
+        </p:nvSpPr>
+        <p:spPr>
+          <a:xfrm>
+            <a:off x="685800" y="1600200"/>
+            <a:ext cx="10789920" cy="1554480"/>
+          </a:xfrm>
+          <a:prstGeom prst="rect">
+            <a:avLst/>
+          </a:prstGeom>
+          <a:noFill/>
+        </p:spPr>
+        <p:txBody>
+          <a:bodyPr wrap="square">
+            <a:spAutoFit/>
+          </a:bodyPr>
+          <a:lstStyle/>
+          <a:p>
+            <a:pPr>
+              <a:spcAft>
+                <a:spcPts val="200"/>
+              </a:spcAft>
+            </a:pPr>
+            <a:r>
+              <a:rPr sz="3600" b="1">
+                <a:solidFill>
+                  <a:srgbClr val="16191D"/>
+                </a:solidFill>
+                <a:latin typeface="Source Han Serif SC"/>
+                <a:ea typeface="SimSun"/>
+                <a:cs typeface="SimSun"/>
+              </a:rPr>
+              <a:t>谢谢</a:t>
+            </a:r>
+          </a:p>
+        </p:txBody>
+      </p:sp>
+      <p:sp>
+        <p:nvSpPr>
+          <p:cNvPr id="4" name="TextBox 3"/>
+          <p:cNvSpPr txBox="1"/>
+          <p:nvPr/>
+        </p:nvSpPr>
+        <p:spPr>
+          <a:xfrm>
+            <a:off x="685800" y="3063240"/>
+            <a:ext cx="10515600" cy="914400"/>
+          </a:xfrm>
+          <a:prstGeom prst="rect">
+            <a:avLst/>
+          </a:prstGeom>
+          <a:noFill/>
+        </p:spPr>
+        <p:txBody>
+          <a:bodyPr wrap="square">
+            <a:spAutoFit/>
+          </a:bodyPr>
+          <a:lstStyle/>
+          <a:p>
+            <a:pPr>
+              <a:spcAft>
+                <a:spcPts val="0"/>
+              </a:spcAft>
+            </a:pPr>
+            <a:r>
+              <a:rPr sz="1200" b="0">
+                <a:solidFill>
+                  <a:srgbClr val="4A4F57"/>
+                </a:solidFill>
+                <a:latin typeface="Segoe UI"/>
+                <a:ea typeface="Microsoft YaHei"/>
+                <a:cs typeface="Microsoft YaHei"/>
+              </a:rPr>
+              <a:t>问道 · ask-dao-machine · MIT License · 全部数字可用仓库里的命令复现</a:t>
+            </a:r>
+          </a:p>
+        </p:txBody>
+      </p:sp>
+      <p:sp>
+        <p:nvSpPr>
+          <p:cNvPr id="5" name="TextBox 4"/>
+          <p:cNvSpPr txBox="1"/>
+          <p:nvPr/>
+        </p:nvSpPr>
+        <p:spPr>
+          <a:xfrm>
+            <a:off x="685800" y="3977640"/>
+            <a:ext cx="10607040" cy="2377440"/>
+          </a:xfrm>
+          <a:prstGeom prst="rect">
+            <a:avLst/>
+          </a:prstGeom>
+          <a:noFill/>
+        </p:spPr>
+        <p:txBody>
+          <a:bodyPr wrap="square">
+            <a:spAutoFit/>
+          </a:bodyPr>
+          <a:lstStyle/>
+          <a:p>
+            <a:pPr>
+              <a:spcAft>
+                <a:spcPts val="600"/>
+              </a:spcAft>
+            </a:pPr>
+            <a:r>
+              <a:rPr sz="1150" b="0">
+                <a:solidFill>
+                  <a:srgbClr val="2F6B6B"/>
+                </a:solidFill>
+                <a:latin typeface="Segoe UI"/>
+                <a:ea typeface="Microsoft YaHei"/>
+                <a:cs typeface="Microsoft YaHei"/>
+                <a:hlinkClick r:id="rId2"/>
+              </a:rPr>
+              <a:t>项目站点　</a:t>
+            </a:r>
+            <a:r>
+              <a:rPr sz="1150" b="1">
+                <a:solidFill>
+                  <a:srgbClr val="2F6B6B"/>
+                </a:solidFill>
+                <a:latin typeface="Segoe UI"/>
+                <a:ea typeface="Microsoft YaHei"/>
+                <a:cs typeface="Microsoft YaHei"/>
+              </a:rPr>
+              <a:t>https://shikunpneg.github.io/ask-dao-machine/</a:t>
+            </a:r>
+          </a:p>
+          <a:p>
+            <a:pPr>
+              <a:spcAft>
+                <a:spcPts val="600"/>
+              </a:spcAft>
+            </a:pPr>
+            <a:r>
+              <a:rPr sz="1150" b="0">
+                <a:solidFill>
+                  <a:srgbClr val="2F6B6B"/>
+                </a:solidFill>
+                <a:latin typeface="Segoe UI"/>
+                <a:ea typeface="Microsoft YaHei"/>
+                <a:cs typeface="Microsoft YaHei"/>
+                <a:hlinkClick r:id="rId3"/>
+              </a:rPr>
+              <a:t>命令行文档　</a:t>
+            </a:r>
+            <a:r>
+              <a:rPr sz="1150" b="1">
+                <a:solidFill>
+                  <a:srgbClr val="2F6B6B"/>
+                </a:solidFill>
+                <a:latin typeface="Segoe UI"/>
+                <a:ea typeface="Microsoft YaHei"/>
+                <a:cs typeface="Microsoft YaHei"/>
+              </a:rPr>
+              <a:t>https://shikunpneg.github.io/ask-dao-machine/guide/cli.html</a:t>
+            </a:r>
+          </a:p>
+          <a:p>
+            <a:pPr>
+              <a:spcAft>
+                <a:spcPts val="600"/>
+              </a:spcAft>
+            </a:pPr>
+            <a:r>
+              <a:rPr sz="1150" b="0">
+                <a:solidFill>
+                  <a:srgbClr val="2F6B6B"/>
+                </a:solidFill>
+                <a:latin typeface="Segoe UI"/>
+                <a:ea typeface="Microsoft YaHei"/>
+                <a:cs typeface="Microsoft YaHei"/>
+                <a:hlinkClick r:id="rId4"/>
+              </a:rPr>
+              <a:t>生物医学完整演示　</a:t>
+            </a:r>
+            <a:r>
+              <a:rPr sz="1150" b="1">
+                <a:solidFill>
+                  <a:srgbClr val="2F6B6B"/>
+                </a:solidFill>
+                <a:latin typeface="Segoe UI"/>
+                <a:ea typeface="Microsoft YaHei"/>
+                <a:cs typeface="Microsoft YaHei"/>
+              </a:rPr>
+              <a:t>https://shikunpneg.github.io/ask-dao-machine/guide/demo-biomed.html</a:t>
+            </a:r>
+          </a:p>
+          <a:p>
+            <a:pPr>
+              <a:spcAft>
+                <a:spcPts val="600"/>
+              </a:spcAft>
+            </a:pPr>
+            <a:r>
+              <a:rPr sz="1150" b="0">
+                <a:solidFill>
+                  <a:srgbClr val="2F6B6B"/>
+                </a:solidFill>
+                <a:latin typeface="Segoe UI"/>
+                <a:ea typeface="Microsoft YaHei"/>
+                <a:cs typeface="Microsoft YaHei"/>
+                <a:hlinkClick r:id="rId5"/>
+              </a:rPr>
+              <a:t>结果与证据手册　</a:t>
+            </a:r>
+            <a:r>
+              <a:rPr sz="1150" b="1">
+                <a:solidFill>
+                  <a:srgbClr val="2F6B6B"/>
+                </a:solidFill>
+                <a:latin typeface="Segoe UI"/>
+                <a:ea typeface="Microsoft YaHei"/>
+                <a:cs typeface="Microsoft YaHei"/>
+              </a:rPr>
+              <a:t>https://shikunpneg.github.io/ask-dao-machine/guide/results.html</a:t>
+            </a:r>
+          </a:p>
+          <a:p>
+            <a:pPr>
+              <a:spcAft>
+                <a:spcPts val="600"/>
+              </a:spcAft>
+            </a:pPr>
+            <a:r>
+              <a:rPr sz="1150" b="0">
+                <a:solidFill>
+                  <a:srgbClr val="2F6B6B"/>
+                </a:solidFill>
+                <a:latin typeface="Segoe UI"/>
+                <a:ea typeface="Microsoft YaHei"/>
+                <a:cs typeface="Microsoft YaHei"/>
+                <a:hlinkClick r:id="rId6"/>
+              </a:rPr>
+              <a:t>ModelScope · dao-v-0.3　</a:t>
+            </a:r>
+            <a:r>
+              <a:rPr sz="1150" b="1">
+                <a:solidFill>
+                  <a:srgbClr val="2F6B6B"/>
+                </a:solidFill>
+                <a:latin typeface="Segoe UI"/>
+                <a:ea typeface="Microsoft YaHei"/>
+                <a:cs typeface="Microsoft YaHei"/>
+              </a:rPr>
+              <a:t>https://www.modelscope.cn/studios/skopskp/dao-v-0.3</a:t>
+            </a:r>
+          </a:p>
+          <a:p>
+            <a:pPr>
+              <a:spcAft>
+                <a:spcPts val="600"/>
+              </a:spcAft>
+            </a:pPr>
+            <a:r>
+              <a:rPr sz="1150" b="0">
+                <a:solidFill>
+                  <a:srgbClr val="2F6B6B"/>
+                </a:solidFill>
+                <a:latin typeface="Segoe UI"/>
+                <a:ea typeface="Microsoft YaHei"/>
+                <a:cs typeface="Microsoft YaHei"/>
+                <a:hlinkClick r:id="rId7"/>
+              </a:rPr>
+              <a:t>GitHub　</a:t>
+            </a:r>
+            <a:r>
+              <a:rPr sz="1150" b="1">
+                <a:solidFill>
+                  <a:srgbClr val="2F6B6B"/>
+                </a:solidFill>
+                <a:latin typeface="Segoe UI"/>
+                <a:ea typeface="Microsoft YaHei"/>
+                <a:cs typeface="Microsoft YaHei"/>
+              </a:rPr>
+              <a:t>https://github.com/shikunpneg/ask-dao</a:t>
+            </a:r>
+          </a:p>
+        </p:txBody>
+      </p:sp>
+      <p:sp>
+        <p:nvSpPr>
+          <p:cNvPr id="6" name="TextBox 5"/>
+          <p:cNvSpPr txBox="1"/>
+          <p:nvPr/>
+        </p:nvSpPr>
+        <p:spPr>
+          <a:xfrm>
+            <a:off x="685800" y="5760720"/>
+            <a:ext cx="10607040" cy="365760"/>
+          </a:xfrm>
+          <a:prstGeom prst="rect">
+            <a:avLst/>
+          </a:prstGeom>
+          <a:noFill/>
+        </p:spPr>
+        <p:txBody>
+          <a:bodyPr wrap="square">
+            <a:spAutoFit/>
+          </a:bodyPr>
+          <a:lstStyle/>
+          <a:p>
+            <a:pPr>
+              <a:spcAft>
+                <a:spcPts val="0"/>
+              </a:spcAft>
+            </a:pPr>
+            <a:r>
+              <a:rPr sz="1200" b="0">
+                <a:solidFill>
+                  <a:srgbClr val="2F6B6B"/>
+                </a:solidFill>
+                <a:latin typeface="Source Han Serif SC"/>
+                <a:ea typeface="SimSun"/>
+                <a:cs typeface="SimSun"/>
+              </a:rPr>
+              <a:t>道生一，一生二，二生三，三生万物</a:t>
+            </a:r>
+          </a:p>
+        </p:txBody>
+      </p:sp>
+      <p:sp>
+        <p:nvSpPr>
+          <p:cNvPr id="7" name="TextBox 6"/>
+          <p:cNvSpPr txBox="1"/>
+          <p:nvPr/>
+        </p:nvSpPr>
+        <p:spPr>
+          <a:xfrm>
+            <a:off x="10424160" y="6355080"/>
+            <a:ext cx="1051560" cy="274320"/>
+          </a:xfrm>
+          <a:prstGeom prst="rect">
+            <a:avLst/>
+          </a:prstGeom>
+          <a:noFill/>
+        </p:spPr>
+        <p:txBody>
+          <a:bodyPr wrap="square">
+            <a:spAutoFit/>
+          </a:bodyPr>
+          <a:lstStyle/>
+          <a:p>
+            <a:pPr algn="r">
+              <a:spcAft>
+                <a:spcPts val="0"/>
+              </a:spcAft>
+            </a:pPr>
+            <a:r>
+              <a:rPr sz="950" b="0">
+                <a:solidFill>
+                  <a:srgbClr val="9A7B3F"/>
+                </a:solidFill>
+                <a:latin typeface="Segoe UI"/>
+                <a:ea typeface="Microsoft YaHei"/>
+                <a:cs typeface="Microsoft YaHei"/>
+              </a:rPr>
+              <a:t>26 / 26</a:t>
             </a:r>
           </a:p>
         </p:txBody>
@@ -12724,7 +14623,7 @@
                 <a:ea typeface="Microsoft YaHei"/>
                 <a:cs typeface="Microsoft YaHei"/>
               </a:rPr>
-              <a:t>03 / 24</a:t>
+              <a:t>03 / 26</a:t>
             </a:r>
           </a:p>
         </p:txBody>
@@ -13152,7 +15051,7 @@
                 <a:ea typeface="Microsoft YaHei"/>
                 <a:cs typeface="Microsoft YaHei"/>
               </a:rPr>
-              <a:t>04 / 24</a:t>
+              <a:t>04 / 26</a:t>
             </a:r>
           </a:p>
         </p:txBody>
@@ -13836,7 +15735,7 @@
                 <a:ea typeface="Microsoft YaHei"/>
                 <a:cs typeface="Microsoft YaHei"/>
               </a:rPr>
-              <a:t>05 / 24</a:t>
+              <a:t>05 / 26</a:t>
             </a:r>
           </a:p>
         </p:txBody>
@@ -14487,7 +16386,7 @@
                 <a:ea typeface="Microsoft YaHei"/>
                 <a:cs typeface="Microsoft YaHei"/>
               </a:rPr>
-              <a:t>06 / 24</a:t>
+              <a:t>06 / 26</a:t>
             </a:r>
           </a:p>
         </p:txBody>
@@ -15071,7 +16970,7 @@
                 <a:ea typeface="Microsoft YaHei"/>
                 <a:cs typeface="Microsoft YaHei"/>
               </a:rPr>
-              <a:t>07 / 24</a:t>
+              <a:t>07 / 26</a:t>
             </a:r>
           </a:p>
         </p:txBody>
@@ -15138,7 +17037,7 @@
                 <a:ea typeface="Microsoft YaHei"/>
                 <a:cs typeface="Microsoft YaHei"/>
               </a:rPr>
-              <a:t>二、在生物医学的实践 · 新问题（原句）</a:t>
+              <a:t>二、在生物医学的实践 · 结果 ②</a:t>
             </a:r>
           </a:p>
         </p:txBody>
@@ -15179,7 +17078,7 @@
                 <a:ea typeface="SimSun"/>
                 <a:cs typeface="SimSun"/>
               </a:rPr>
-              <a:t>机器提出的问题，长什么样</a:t>
+              <a:t>③ 结构追问 16 条：4 种问法 × 4 个结论</a:t>
             </a:r>
           </a:p>
         </p:txBody>
@@ -15220,7 +17119,7 @@
                 <a:ea typeface="Microsoft YaHei"/>
                 <a:cs typeface="Microsoft YaHei"/>
               </a:rPr>
-              <a:t>下面是</a:t>
+              <a:t>对论文里的</a:t>
             </a:r>
             <a:r>
               <a:rPr sz="1200" b="1">
@@ -15231,7 +17130,7 @@
                 <a:ea typeface="Microsoft YaHei"/>
                 <a:cs typeface="Microsoft YaHei"/>
               </a:rPr>
-              <a:t>产物里的原句，一字未改</a:t>
+              <a:t>结论句</a:t>
             </a:r>
             <a:r>
               <a:rPr sz="1200" b="0">
@@ -15242,7 +17141,7 @@
                 <a:ea typeface="Microsoft YaHei"/>
                 <a:cs typeface="Microsoft YaHei"/>
               </a:rPr>
-              <a:t>。每条都指回触发它的原文句子，并给出判定方式（</a:t>
+              <a:t>逐条套四问。四种问法是</a:t>
             </a:r>
             <a:r>
               <a:rPr sz="1200" b="1">
@@ -15253,7 +17152,7 @@
                 <a:ea typeface="Microsoft YaHei"/>
                 <a:cs typeface="Microsoft YaHei"/>
               </a:rPr>
-              <a:t>route</a:t>
+              <a:t>固定模板</a:t>
             </a:r>
             <a:r>
               <a:rPr sz="1200" b="0">
@@ -15264,7 +17163,7 @@
                 <a:ea typeface="Microsoft YaHei"/>
                 <a:cs typeface="Microsoft YaHei"/>
               </a:rPr>
-              <a:t>）——</a:t>
+              <a:t>；</a:t>
             </a:r>
             <a:r>
               <a:rPr sz="1200" b="1">
@@ -15275,7 +17174,7 @@
                 <a:ea typeface="Microsoft YaHei"/>
                 <a:cs typeface="Microsoft YaHei"/>
               </a:rPr>
-              <a:t>问题必须写成可判形式，否则不产出</a:t>
+              <a:t>真正因论文而异的是「追问了哪几个结论」</a:t>
             </a:r>
             <a:r>
               <a:rPr sz="1200" b="0">
@@ -15286,7 +17185,7 @@
                 <a:ea typeface="Microsoft YaHei"/>
                 <a:cs typeface="Microsoft YaHei"/>
               </a:rPr>
-              <a:t>。</a:t>
+              <a:t>——所以这里每种问法只列一次。</a:t>
             </a:r>
           </a:p>
         </p:txBody>
@@ -15299,8 +17198,8 @@
         </p:nvSpPr>
         <p:spPr>
           <a:xfrm>
-            <a:off x="685800" y="2670048"/>
-            <a:ext cx="10607040" cy="3474720"/>
+            <a:off x="685800" y="2578608"/>
+            <a:ext cx="5285232" cy="4023360"/>
           </a:xfrm>
           <a:prstGeom prst="rect">
             <a:avLst/>
@@ -15315,160 +17214,147 @@
           <a:p>
             <a:pPr>
               <a:spcAft>
-                <a:spcPts val="100"/>
-              </a:spcAft>
-            </a:pPr>
-            <a:r>
-              <a:rPr sz="1250" b="1">
+                <a:spcPts val="700"/>
+              </a:spcAft>
+            </a:pPr>
+            <a:r>
+              <a:rPr sz="850" b="1">
+                <a:solidFill>
+                  <a:srgbClr val="B03A2E"/>
+                </a:solidFill>
+                <a:latin typeface="Segoe UI"/>
+                <a:ea typeface="Microsoft YaHei"/>
+                <a:cs typeface="Microsoft YaHei"/>
+              </a:rPr>
+              <a:t>范围追问　</a:t>
+            </a:r>
+            <a:r>
+              <a:rPr sz="1000" b="0">
                 <a:solidFill>
                   <a:srgbClr val="16191D"/>
                 </a:solidFill>
-                <a:latin typeface="Source Han Serif SC"/>
-                <a:ea typeface="SimSun"/>
-                <a:cs typeface="SimSun"/>
-              </a:rPr>
-              <a:t>【残余混杂强度】　判定路由：E-value / 敏感性分析（可精确计算）</a:t>
-            </a:r>
-          </a:p>
-          <a:p>
-            <a:pPr>
-              <a:spcAft>
-                <a:spcPts val="900"/>
-              </a:spcAft>
-            </a:pPr>
-            <a:r>
-              <a:rPr sz="1150" b="0">
-                <a:solidFill>
-                  <a:srgbClr val="4A4F57"/>
-                </a:solidFill>
-                <a:latin typeface="Segoe UI"/>
-                <a:ea typeface="Microsoft YaHei"/>
-                <a:cs typeface="Microsoft YaHei"/>
-              </a:rPr>
-              <a:t>该效应是「已调整」之后剩下的：残余混杂要多强才能把它解释掉？把它写成可算的形式：给定效应量与置信区间，算 E-value（未测混杂与暴露、结局的关联强度各自要达到多少，才能把效应推到无效），并给出最小混杂强度数值。</a:t>
-            </a:r>
-          </a:p>
-          <a:p>
-            <a:pPr>
-              <a:spcAft>
-                <a:spcPts val="100"/>
-              </a:spcAft>
-            </a:pPr>
-            <a:r>
-              <a:rPr sz="1250" b="1">
+                <a:latin typeface="Segoe UI"/>
+                <a:ea typeface="Microsoft YaHei"/>
+                <a:cs typeface="Microsoft YaHei"/>
+              </a:rPr>
+              <a:t>该结论的成立范围能否扩展（或收紧）到更一般的对象类？边界在哪里？</a:t>
+            </a:r>
+          </a:p>
+          <a:p>
+            <a:pPr>
+              <a:spcAft>
+                <a:spcPts val="700"/>
+              </a:spcAft>
+            </a:pPr>
+            <a:r>
+              <a:rPr sz="850" b="1">
+                <a:solidFill>
+                  <a:srgbClr val="B03A2E"/>
+                </a:solidFill>
+                <a:latin typeface="Segoe UI"/>
+                <a:ea typeface="Microsoft YaHei"/>
+                <a:cs typeface="Microsoft YaHei"/>
+              </a:rPr>
+              <a:t>反例追问　</a:t>
+            </a:r>
+            <a:r>
+              <a:rPr sz="1000" b="0">
                 <a:solidFill>
                   <a:srgbClr val="16191D"/>
                 </a:solidFill>
-                <a:latin typeface="Source Han Serif SC"/>
-                <a:ea typeface="SimSun"/>
-                <a:cs typeface="SimSun"/>
-              </a:rPr>
-              <a:t>【因果方向】　判定路由：滞后/剔除分析（lag analysis）+ 反向孟德尔随机化</a:t>
-            </a:r>
-          </a:p>
-          <a:p>
-            <a:pPr>
-              <a:spcAft>
-                <a:spcPts val="900"/>
-              </a:spcAft>
-            </a:pPr>
-            <a:r>
-              <a:rPr sz="1150" b="0">
-                <a:solidFill>
-                  <a:srgbClr val="4A4F57"/>
-                </a:solidFill>
-                <a:latin typeface="Segoe UI"/>
-                <a:ea typeface="Microsoft YaHei"/>
-                <a:cs typeface="Microsoft YaHei"/>
-              </a:rPr>
-              <a:t>文中给出的是关联，但设计默认了 X→Y 的方向：反向因果（结局或早期病变改变了暴露）能否解释该效应？用可检验的形式说：把随访前 k 年发生的事件剔除（lag 分析），效应量随 k 如何变化？若 k≥2 年就衰减到 1，说明什么？</a:t>
-            </a:r>
-          </a:p>
-          <a:p>
-            <a:pPr>
-              <a:spcAft>
-                <a:spcPts val="100"/>
-              </a:spcAft>
-            </a:pPr>
-            <a:r>
-              <a:rPr sz="1250" b="1">
+                <a:latin typeface="Segoe UI"/>
+                <a:ea typeface="Microsoft YaHei"/>
+                <a:cs typeface="Microsoft YaHei"/>
+              </a:rPr>
+              <a:t>该结论的例外集有多大、由什么结构刻画？例外是否贴边界（=未收敛）？</a:t>
+            </a:r>
+          </a:p>
+        </p:txBody>
+      </p:sp>
+      <p:sp>
+        <p:nvSpPr>
+          <p:cNvPr id="6" name="TextBox 5"/>
+          <p:cNvSpPr txBox="1"/>
+          <p:nvPr/>
+        </p:nvSpPr>
+        <p:spPr>
+          <a:xfrm>
+            <a:off x="6217920" y="2578608"/>
+            <a:ext cx="5285232" cy="4023360"/>
+          </a:xfrm>
+          <a:prstGeom prst="rect">
+            <a:avLst/>
+          </a:prstGeom>
+          <a:noFill/>
+        </p:spPr>
+        <p:txBody>
+          <a:bodyPr wrap="square">
+            <a:spAutoFit/>
+          </a:bodyPr>
+          <a:lstStyle/>
+          <a:p>
+            <a:pPr>
+              <a:spcAft>
+                <a:spcPts val="700"/>
+              </a:spcAft>
+            </a:pPr>
+            <a:r>
+              <a:rPr sz="850" b="1">
+                <a:solidFill>
+                  <a:srgbClr val="B03A2E"/>
+                </a:solidFill>
+                <a:latin typeface="Segoe UI"/>
+                <a:ea typeface="Microsoft YaHei"/>
+                <a:cs typeface="Microsoft YaHei"/>
+              </a:rPr>
+              <a:t>机制追问　</a:t>
+            </a:r>
+            <a:r>
+              <a:rPr sz="1000" b="0">
                 <a:solidFill>
                   <a:srgbClr val="16191D"/>
                 </a:solidFill>
-                <a:latin typeface="Source Han Serif SC"/>
-                <a:ea typeface="SimSun"/>
-                <a:cs typeface="SimSun"/>
-              </a:rPr>
-              <a:t>【测量误差方向】　判定路由：回归校准 + 重复测量子样本</a:t>
-            </a:r>
-          </a:p>
-          <a:p>
-            <a:pPr>
-              <a:spcAft>
-                <a:spcPts val="900"/>
-              </a:spcAft>
-            </a:pPr>
-            <a:r>
-              <a:rPr sz="1150" b="0">
-                <a:solidFill>
-                  <a:srgbClr val="4A4F57"/>
-                </a:solidFill>
-                <a:latin typeface="Segoe UI"/>
-                <a:ea typeface="Microsoft YaHei"/>
-                <a:cs typeface="Microsoft YaHei"/>
-              </a:rPr>
-              <a:t>暴露/结局是自报或单次测量的：这类误差是</a:t>
-            </a:r>
-            <a:r>
-              <a:rPr sz="1150" b="1">
-                <a:solidFill>
-                  <a:srgbClr val="2F6B6B"/>
-                </a:solidFill>
-                <a:latin typeface="Segoe UI"/>
-                <a:ea typeface="Microsoft YaHei"/>
-                <a:cs typeface="Microsoft YaHei"/>
-              </a:rPr>
-              <a:t>非差异性</a:t>
-            </a:r>
-            <a:r>
-              <a:rPr sz="1150" b="0">
-                <a:solidFill>
-                  <a:srgbClr val="4A4F57"/>
-                </a:solidFill>
-                <a:latin typeface="Segoe UI"/>
-                <a:ea typeface="Microsoft YaHei"/>
-                <a:cs typeface="Microsoft YaHei"/>
-              </a:rPr>
-              <a:t>（把效应推向无效、低估）还是</a:t>
-            </a:r>
-            <a:r>
-              <a:rPr sz="1150" b="1">
-                <a:solidFill>
-                  <a:srgbClr val="2F6B6B"/>
-                </a:solidFill>
-                <a:latin typeface="Segoe UI"/>
-                <a:ea typeface="Microsoft YaHei"/>
-                <a:cs typeface="Microsoft YaHei"/>
-              </a:rPr>
-              <a:t>差异性</a:t>
-            </a:r>
-            <a:r>
-              <a:rPr sz="1150" b="0">
-                <a:solidFill>
-                  <a:srgbClr val="4A4F57"/>
-                </a:solidFill>
-                <a:latin typeface="Segoe UI"/>
-                <a:ea typeface="Microsoft YaHei"/>
-                <a:cs typeface="Microsoft YaHei"/>
-              </a:rPr>
-              <a:t>（可能制造假阳性）？写成可判形式：用重复测量做回归校准，报告校准系数与校准后的效应量；若校准后效应变大，说明原结论被低估。</a:t>
-            </a:r>
-          </a:p>
-        </p:txBody>
-      </p:sp>
-      <p:sp>
-        <p:nvSpPr>
-          <p:cNvPr id="6" name="Rectangle 5"/>
+                <a:latin typeface="Segoe UI"/>
+                <a:ea typeface="Microsoft YaHei"/>
+                <a:cs typeface="Microsoft YaHei"/>
+              </a:rPr>
+              <a:t>该结论背后的机制是什么？在什么条件下（参数、噪声、尺度）会失效？</a:t>
+            </a:r>
+          </a:p>
+          <a:p>
+            <a:pPr>
+              <a:spcAft>
+                <a:spcPts val="700"/>
+              </a:spcAft>
+            </a:pPr>
+            <a:r>
+              <a:rPr sz="850" b="1">
+                <a:solidFill>
+                  <a:srgbClr val="B03A2E"/>
+                </a:solidFill>
+                <a:latin typeface="Segoe UI"/>
+                <a:ea typeface="Microsoft YaHei"/>
+                <a:cs typeface="Microsoft YaHei"/>
+              </a:rPr>
+              <a:t>定量追问　</a:t>
+            </a:r>
+            <a:r>
+              <a:rPr sz="1000" b="0">
+                <a:solidFill>
+                  <a:srgbClr val="16191D"/>
+                </a:solidFill>
+                <a:latin typeface="Segoe UI"/>
+                <a:ea typeface="Microsoft YaHei"/>
+                <a:cs typeface="Microsoft YaHei"/>
+              </a:rPr>
+              <a:t>该结论给出的界是否紧？最坏情形是什么，何时达到？</a:t>
+            </a:r>
+          </a:p>
+        </p:txBody>
+      </p:sp>
+      <p:sp>
+        <p:nvSpPr>
+          <p:cNvPr id="7" name="Rectangle 6"/>
           <p:cNvSpPr/>
           <p:nvPr/>
         </p:nvSpPr>
@@ -15512,7 +17398,7 @@
       </p:sp>
       <p:sp>
         <p:nvSpPr>
-          <p:cNvPr id="7" name="TextBox 6"/>
+          <p:cNvPr id="8" name="TextBox 7"/>
           <p:cNvSpPr txBox="1"/>
           <p:nvPr/>
         </p:nvSpPr>
@@ -15546,7 +17432,7 @@
                 <a:ea typeface="Microsoft YaHei"/>
                 <a:cs typeface="Microsoft YaHei"/>
               </a:rPr>
-              <a:t>另外两类：</a:t>
+              <a:t>16 条 = 这 4 种问法 × </a:t>
             </a:r>
             <a:r>
               <a:rPr sz="1000" b="1">
@@ -15557,7 +17443,7 @@
                 <a:ea typeface="Microsoft YaHei"/>
                 <a:cs typeface="Microsoft YaHei"/>
               </a:rPr>
-              <a:t>③结构追问</a:t>
+              <a:t>4 个被追问的结论</a:t>
             </a:r>
             <a:r>
               <a:rPr sz="1000" b="0">
@@ -15568,7 +17454,7 @@
                 <a:ea typeface="Microsoft YaHei"/>
                 <a:cs typeface="Microsoft YaHei"/>
               </a:rPr>
-              <a:t>（对结论句套范围 / 反例 / 机制 / 定量四问）与</a:t>
+              <a:t>（In substitution analysis, replacin…　·　In model 2, BMI, eGFR, smoking, dr…　·　A substitution analysis was employ…　·　In the substitution analysis, repl…）。四种问法对任何结论句都能套；全部原句见 </a:t>
             </a:r>
             <a:r>
               <a:rPr sz="1000" b="1">
@@ -15579,7 +17465,7 @@
                 <a:ea typeface="Microsoft YaHei"/>
                 <a:cs typeface="Microsoft YaHei"/>
               </a:rPr>
-              <a:t>②文本张力</a:t>
+              <a:t>out/biomed_demo/problems_paper.json</a:t>
             </a:r>
             <a:r>
               <a:rPr sz="1000" b="0">
@@ -15590,28 +17476,6 @@
                 <a:ea typeface="Microsoft YaHei"/>
                 <a:cs typeface="Microsoft YaHei"/>
               </a:rPr>
-              <a:t>（however / yet 处的分歧）。全部 54 条的原句见 </a:t>
-            </a:r>
-            <a:r>
-              <a:rPr sz="1000" b="1">
-                <a:solidFill>
-                  <a:srgbClr val="2F6B6B"/>
-                </a:solidFill>
-                <a:latin typeface="Segoe UI"/>
-                <a:ea typeface="Microsoft YaHei"/>
-                <a:cs typeface="Microsoft YaHei"/>
-              </a:rPr>
-              <a:t>docs/guide/demo-biomed.md</a:t>
-            </a:r>
-            <a:r>
-              <a:rPr sz="1000" b="0">
-                <a:solidFill>
-                  <a:srgbClr val="6B7078"/>
-                </a:solidFill>
-                <a:latin typeface="Segoe UI"/>
-                <a:ea typeface="Microsoft YaHei"/>
-                <a:cs typeface="Microsoft YaHei"/>
-              </a:rPr>
               <a:t>。</a:t>
             </a:r>
           </a:p>
@@ -15619,7 +17483,7 @@
       </p:sp>
       <p:sp>
         <p:nvSpPr>
-          <p:cNvPr id="8" name="TextBox 7"/>
+          <p:cNvPr id="9" name="TextBox 8"/>
           <p:cNvSpPr txBox="1"/>
           <p:nvPr/>
         </p:nvSpPr>
@@ -15653,7 +17517,7 @@
                 <a:ea typeface="Microsoft YaHei"/>
                 <a:cs typeface="Microsoft YaHei"/>
               </a:rPr>
-              <a:t>08 / 24</a:t>
+              <a:t>08 / 26</a:t>
             </a:r>
           </a:p>
         </p:txBody>
@@ -15720,7 +17584,7 @@
                 <a:ea typeface="Microsoft YaHei"/>
                 <a:cs typeface="Microsoft YaHei"/>
               </a:rPr>
-              <a:t>二、在生物医学的实践 · 新知识</a:t>
+              <a:t>二、在生物医学的实践 · 结果 ③</a:t>
             </a:r>
           </a:p>
         </p:txBody>
@@ -15761,7 +17625,7 @@
                 <a:ea typeface="SimSun"/>
                 <a:cs typeface="SimSun"/>
               </a:rPr>
-              <a:t>三个结论，强弱其实差很多</a:t>
+              <a:t>② 文本张力 6 条（原句）</a:t>
             </a:r>
           </a:p>
         </p:txBody>
@@ -15802,7 +17666,7 @@
                 <a:ea typeface="Microsoft YaHei"/>
                 <a:cs typeface="Microsoft YaHei"/>
               </a:rPr>
-              <a:t>观察性研究有个</a:t>
+              <a:t>抓论文里 </a:t>
             </a:r>
             <a:r>
               <a:rPr sz="1200" b="1">
@@ -15813,7 +17677,7 @@
                 <a:ea typeface="Microsoft YaHei"/>
                 <a:cs typeface="Microsoft YaHei"/>
               </a:rPr>
-              <a:t>天生软肋</a:t>
+              <a:t>however / yet / inconsistent</a:t>
             </a:r>
             <a:r>
               <a:rPr sz="1200" b="0">
@@ -15824,7 +17688,7 @@
                 <a:ea typeface="Microsoft YaHei"/>
                 <a:cs typeface="Microsoft YaHei"/>
               </a:rPr>
-              <a:t>：</a:t>
+              <a:t> 处的分歧——这些是作者自己写下的「和前人不一样」的地方，机器把它们</a:t>
             </a:r>
             <a:r>
               <a:rPr sz="1200" b="1">
@@ -15835,7 +17699,7 @@
                 <a:ea typeface="Microsoft YaHei"/>
                 <a:cs typeface="Microsoft YaHei"/>
               </a:rPr>
-              <a:t>没人测过的东西</a:t>
+              <a:t>形式化成一个可判的追问</a:t>
             </a:r>
             <a:r>
               <a:rPr sz="1200" b="0">
@@ -15846,78 +17710,21 @@
                 <a:ea typeface="Microsoft YaHei"/>
                 <a:cs typeface="Microsoft YaHei"/>
               </a:rPr>
-              <a:t>（残余混杂）可能才是真凶——比如「本来肾就不好的人更爱喝零度可乐」。E-value 把「可能存在残余混杂」这句含糊话</a:t>
-            </a:r>
-            <a:r>
-              <a:rPr sz="1200" b="1">
-                <a:solidFill>
-                  <a:srgbClr val="2F6B6B"/>
-                </a:solidFill>
-                <a:latin typeface="Segoe UI"/>
-                <a:ea typeface="Microsoft YaHei"/>
-                <a:cs typeface="Microsoft YaHei"/>
-              </a:rPr>
-              <a:t>变成一个数</a:t>
-            </a:r>
-            <a:r>
-              <a:rPr sz="1200" b="0">
-                <a:solidFill>
-                  <a:srgbClr val="4A4F57"/>
-                </a:solidFill>
-                <a:latin typeface="Segoe UI"/>
-                <a:ea typeface="Microsoft YaHei"/>
-                <a:cs typeface="Microsoft YaHei"/>
-              </a:rPr>
-              <a:t>：</a:t>
-            </a:r>
-            <a:r>
-              <a:rPr sz="1200" b="1">
-                <a:solidFill>
-                  <a:srgbClr val="2F6B6B"/>
-                </a:solidFill>
-                <a:latin typeface="Segoe UI"/>
-                <a:ea typeface="Microsoft YaHei"/>
-                <a:cs typeface="Microsoft YaHei"/>
-              </a:rPr>
-              <a:t>那个东西得多强，才能把这条结论解释掉？</a:t>
-            </a:r>
-          </a:p>
-        </p:txBody>
-      </p:sp>
-      <p:pic>
-        <p:nvPicPr>
-          <p:cNvPr id="5" name="Picture 4" descr="fig_evalue.png"/>
-          <p:cNvPicPr>
-            <a:picLocks noChangeAspect="1"/>
-          </p:cNvPicPr>
-          <p:nvPr/>
-        </p:nvPicPr>
-        <p:blipFill>
-          <a:blip r:embed="rId2"/>
-          <a:stretch>
-            <a:fillRect/>
-          </a:stretch>
-        </p:blipFill>
-        <p:spPr>
-          <a:xfrm>
-            <a:off x="685800" y="2670048"/>
-            <a:ext cx="4853080" cy="2414016"/>
-          </a:xfrm>
-          <a:prstGeom prst="rect">
-            <a:avLst/>
-          </a:prstGeom>
-        </p:spPr>
-      </p:pic>
-      <p:sp>
-        <p:nvSpPr>
-          <p:cNvPr id="6" name="TextBox 5"/>
+              <a:t>。</a:t>
+            </a:r>
+          </a:p>
+        </p:txBody>
+      </p:sp>
+      <p:sp>
+        <p:nvSpPr>
+          <p:cNvPr id="5" name="TextBox 4"/>
           <p:cNvSpPr txBox="1"/>
           <p:nvPr/>
         </p:nvSpPr>
         <p:spPr>
           <a:xfrm>
-            <a:off x="685800" y="5166360"/>
-            <a:ext cx="5623560" cy="548640"/>
+            <a:off x="685800" y="2578608"/>
+            <a:ext cx="5285232" cy="4023360"/>
           </a:xfrm>
           <a:prstGeom prst="rect">
             <a:avLst/>
@@ -15932,55 +17739,159 @@
           <a:p>
             <a:pPr>
               <a:spcAft>
-                <a:spcPts val="0"/>
-              </a:spcAft>
-            </a:pPr>
-            <a:r>
-              <a:rPr sz="900" b="0">
-                <a:solidFill>
-                  <a:srgbClr val="6B7078"/>
-                </a:solidFill>
-                <a:latin typeface="Segoe UI"/>
-                <a:ea typeface="Microsoft YaHei"/>
-                <a:cs typeface="Microsoft YaHei"/>
-              </a:rPr>
-              <a:t>条形越长 = 越难推翻 = 结论越稳；原点 1 表示「隐藏因素毫无作用」。黑色短竖线是按 95% CI </a:t>
-            </a:r>
-            <a:r>
-              <a:rPr sz="900" b="1">
-                <a:solidFill>
-                  <a:srgbClr val="2F6B6B"/>
-                </a:solidFill>
-                <a:latin typeface="Segoe UI"/>
-                <a:ea typeface="Microsoft YaHei"/>
-                <a:cs typeface="Microsoft YaHei"/>
-              </a:rPr>
-              <a:t>下界</a:t>
-            </a:r>
-            <a:r>
-              <a:rPr sz="900" b="0">
-                <a:solidFill>
-                  <a:srgbClr val="6B7078"/>
-                </a:solidFill>
-                <a:latin typeface="Segoe UI"/>
-                <a:ea typeface="Microsoft YaHei"/>
-                <a:cs typeface="Microsoft YaHei"/>
-              </a:rPr>
-              <a:t>重算的保守读数（更低 = 更脆弱）。</a:t>
-            </a:r>
-          </a:p>
-        </p:txBody>
-      </p:sp>
-      <p:sp>
-        <p:nvSpPr>
-          <p:cNvPr id="7" name="TextBox 6"/>
+                <a:spcPts val="700"/>
+              </a:spcAft>
+            </a:pPr>
+            <a:r>
+              <a:rPr sz="850" b="1">
+                <a:solidFill>
+                  <a:srgbClr val="B03A2E"/>
+                </a:solidFill>
+                <a:latin typeface="Segoe UI"/>
+                <a:ea typeface="Microsoft YaHei"/>
+                <a:cs typeface="Microsoft YaHei"/>
+              </a:rPr>
+              <a:t>however　</a:t>
+            </a:r>
+            <a:r>
+              <a:rPr sz="1000" b="0">
+                <a:solidFill>
+                  <a:srgbClr val="16191D"/>
+                </a:solidFill>
+                <a:latin typeface="Segoe UI"/>
+                <a:ea typeface="Microsoft YaHei"/>
+                <a:cs typeface="Microsoft YaHei"/>
+              </a:rPr>
+              <a:t>文中出现「however」处的分歧：However, the results from studies were not entirely consistent.
+→ 追问：这两侧能否在某个前提下统一？冲突落在哪一层（定义 / 前提 / 判定标准 / 尺度）？</a:t>
+            </a:r>
+          </a:p>
+          <a:p>
+            <a:pPr>
+              <a:spcAft>
+                <a:spcPts val="900"/>
+              </a:spcAft>
+            </a:pPr>
+            <a:r>
+              <a:rPr sz="800" b="0">
+                <a:solidFill>
+                  <a:srgbClr val="8A8F96"/>
+                </a:solidFill>
+                <a:latin typeface="Segoe UI"/>
+                <a:ea typeface="Microsoft YaHei"/>
+                <a:cs typeface="Microsoft YaHei"/>
+              </a:rPr>
+              <a:t>触发原文：However, the results from studies were not entirely consis…</a:t>
+            </a:r>
+          </a:p>
+          <a:p>
+            <a:pPr>
+              <a:spcAft>
+                <a:spcPts val="700"/>
+              </a:spcAft>
+            </a:pPr>
+            <a:r>
+              <a:rPr sz="850" b="1">
+                <a:solidFill>
+                  <a:srgbClr val="B03A2E"/>
+                </a:solidFill>
+                <a:latin typeface="Segoe UI"/>
+                <a:ea typeface="Microsoft YaHei"/>
+                <a:cs typeface="Microsoft YaHei"/>
+              </a:rPr>
+              <a:t>yet　</a:t>
+            </a:r>
+            <a:r>
+              <a:rPr sz="1000" b="0">
+                <a:solidFill>
+                  <a:srgbClr val="16191D"/>
+                </a:solidFill>
+                <a:latin typeface="Segoe UI"/>
+                <a:ea typeface="Microsoft YaHei"/>
+                <a:cs typeface="Microsoft YaHei"/>
+              </a:rPr>
+              <a:t>文中出现「yet」处的分歧：Moreover, the potential influence of polygenic risk for CKD on the relationship between AS consumption and the risk of d
+→ 追问：这两侧能否在某个前提下统一？冲突落在哪一层（定义 / 前提 / 判定标准 / 尺度）？</a:t>
+            </a:r>
+          </a:p>
+          <a:p>
+            <a:pPr>
+              <a:spcAft>
+                <a:spcPts val="900"/>
+              </a:spcAft>
+            </a:pPr>
+            <a:r>
+              <a:rPr sz="800" b="0">
+                <a:solidFill>
+                  <a:srgbClr val="8A8F96"/>
+                </a:solidFill>
+                <a:latin typeface="Segoe UI"/>
+                <a:ea typeface="Microsoft YaHei"/>
+                <a:cs typeface="Microsoft YaHei"/>
+              </a:rPr>
+              <a:t>触发原文：Moreover, the potential influence of polygenic risk for CK…</a:t>
+            </a:r>
+          </a:p>
+          <a:p>
+            <a:pPr>
+              <a:spcAft>
+                <a:spcPts val="700"/>
+              </a:spcAft>
+            </a:pPr>
+            <a:r>
+              <a:rPr sz="850" b="1">
+                <a:solidFill>
+                  <a:srgbClr val="B03A2E"/>
+                </a:solidFill>
+                <a:latin typeface="Segoe UI"/>
+                <a:ea typeface="Microsoft YaHei"/>
+                <a:cs typeface="Microsoft YaHei"/>
+              </a:rPr>
+              <a:t>inconsistent　</a:t>
+            </a:r>
+            <a:r>
+              <a:rPr sz="1000" b="0">
+                <a:solidFill>
+                  <a:srgbClr val="16191D"/>
+                </a:solidFill>
+                <a:latin typeface="Segoe UI"/>
+                <a:ea typeface="Microsoft YaHei"/>
+                <a:cs typeface="Microsoft YaHei"/>
+              </a:rPr>
+              <a:t>文中出现「inconsistent」处的分歧：In the genetic risk stratification analysis, we further excluded participants without genomic data (n = 2,928), Particip
+→ 追问：这两侧能否在某个前提下统一？冲突落在哪一层（定义 / 前提 / 判定标准 / 尺度）？</a:t>
+            </a:r>
+          </a:p>
+          <a:p>
+            <a:pPr>
+              <a:spcAft>
+                <a:spcPts val="900"/>
+              </a:spcAft>
+            </a:pPr>
+            <a:r>
+              <a:rPr sz="800" b="0">
+                <a:solidFill>
+                  <a:srgbClr val="8A8F96"/>
+                </a:solidFill>
+                <a:latin typeface="Segoe UI"/>
+                <a:ea typeface="Microsoft YaHei"/>
+                <a:cs typeface="Microsoft YaHei"/>
+              </a:rPr>
+              <a:t>触发原文：In the genetic risk stratification analysis, we further ex…</a:t>
+            </a:r>
+          </a:p>
+        </p:txBody>
+      </p:sp>
+      <p:sp>
+        <p:nvSpPr>
+          <p:cNvPr id="6" name="TextBox 5"/>
           <p:cNvSpPr txBox="1"/>
           <p:nvPr/>
         </p:nvSpPr>
         <p:spPr>
           <a:xfrm>
-            <a:off x="6629400" y="2624328"/>
-            <a:ext cx="4873752" cy="3566160"/>
+            <a:off x="6217920" y="2578608"/>
+            <a:ext cx="5285232" cy="4023360"/>
           </a:xfrm>
           <a:prstGeom prst="rect">
             <a:avLst/>
@@ -15995,328 +17906,152 @@
           <a:p>
             <a:pPr>
               <a:spcAft>
-                <a:spcPts val="100"/>
-              </a:spcAft>
-            </a:pPr>
-            <a:r>
-              <a:rPr sz="1150" b="1">
+                <a:spcPts val="700"/>
+              </a:spcAft>
+            </a:pPr>
+            <a:r>
+              <a:rPr sz="850" b="1">
+                <a:solidFill>
+                  <a:srgbClr val="B03A2E"/>
+                </a:solidFill>
+                <a:latin typeface="Segoe UI"/>
+                <a:ea typeface="Microsoft YaHei"/>
+                <a:cs typeface="Microsoft YaHei"/>
+              </a:rPr>
+              <a:t>however　</a:t>
+            </a:r>
+            <a:r>
+              <a:rPr sz="1000" b="0">
                 <a:solidFill>
                   <a:srgbClr val="16191D"/>
                 </a:solidFill>
-                <a:latin typeface="Source Han Serif SC"/>
-                <a:ea typeface="SimSun"/>
-                <a:cs typeface="SimSun"/>
-              </a:rPr>
-              <a:t>论文自己怎么处理</a:t>
-            </a:r>
-          </a:p>
-          <a:p>
-            <a:pPr>
-              <a:spcAft>
-                <a:spcPts val="800"/>
-              </a:spcAft>
-            </a:pPr>
-            <a:r>
-              <a:rPr sz="1050" b="0">
-                <a:solidFill>
-                  <a:srgbClr val="4A4F57"/>
-                </a:solidFill>
-                <a:latin typeface="Segoe UI"/>
-                <a:ea typeface="Microsoft YaHei"/>
-                <a:cs typeface="Microsoft YaHei"/>
-              </a:rPr>
-              <a:t>只说一句「可能存在残余混杂」就过去了。</a:t>
-            </a:r>
-            <a:r>
-              <a:rPr sz="1050" b="1">
-                <a:solidFill>
-                  <a:srgbClr val="2F6B6B"/>
-                </a:solidFill>
-                <a:latin typeface="Segoe UI"/>
-                <a:ea typeface="Microsoft YaHei"/>
-                <a:cs typeface="Microsoft YaHei"/>
-              </a:rPr>
-              <a:t>原文中 “E-value” 出现 0 次</a:t>
-            </a:r>
-            <a:r>
-              <a:rPr sz="1050" b="0">
-                <a:solidFill>
-                  <a:srgbClr val="4A4F57"/>
-                </a:solidFill>
-                <a:latin typeface="Segoe UI"/>
-                <a:ea typeface="Microsoft YaHei"/>
-                <a:cs typeface="Microsoft YaHei"/>
-              </a:rPr>
-              <a:t>——这三个数是机器算的。</a:t>
-            </a:r>
-          </a:p>
-          <a:p>
-            <a:pPr>
-              <a:spcAft>
-                <a:spcPts val="100"/>
-              </a:spcAft>
-            </a:pPr>
-            <a:r>
-              <a:rPr sz="1150" b="1">
+                <a:latin typeface="Segoe UI"/>
+                <a:ea typeface="Microsoft YaHei"/>
+                <a:cs typeface="Microsoft YaHei"/>
+              </a:rPr>
+              <a:t>文中出现「however」处的分歧：However, several studies have used AS beverage consumption as a proxy for comparison study and meta-analysis [[5], [6], 
+→ 追问：这两侧能否在某个前提下统一？冲突落在哪一层（定义 / 前提 / 判定标准 / 尺度）？</a:t>
+            </a:r>
+          </a:p>
+          <a:p>
+            <a:pPr>
+              <a:spcAft>
+                <a:spcPts val="900"/>
+              </a:spcAft>
+            </a:pPr>
+            <a:r>
+              <a:rPr sz="800" b="0">
+                <a:solidFill>
+                  <a:srgbClr val="8A8F96"/>
+                </a:solidFill>
+                <a:latin typeface="Segoe UI"/>
+                <a:ea typeface="Microsoft YaHei"/>
+                <a:cs typeface="Microsoft YaHei"/>
+              </a:rPr>
+              <a:t>触发原文：However, several studies have used AS beverage consumption…</a:t>
+            </a:r>
+          </a:p>
+          <a:p>
+            <a:pPr>
+              <a:spcAft>
+                <a:spcPts val="700"/>
+              </a:spcAft>
+            </a:pPr>
+            <a:r>
+              <a:rPr sz="850" b="1">
+                <a:solidFill>
+                  <a:srgbClr val="B03A2E"/>
+                </a:solidFill>
+                <a:latin typeface="Segoe UI"/>
+                <a:ea typeface="Microsoft YaHei"/>
+                <a:cs typeface="Microsoft YaHei"/>
+              </a:rPr>
+              <a:t>however　</a:t>
+            </a:r>
+            <a:r>
+              <a:rPr sz="1000" b="0">
                 <a:solidFill>
                   <a:srgbClr val="16191D"/>
                 </a:solidFill>
-                <a:latin typeface="Source Han Serif SC"/>
-                <a:ea typeface="SimSun"/>
-                <a:cs typeface="SimSun"/>
-              </a:rPr>
-              <a:t>① 代糖 vs 不吃</a:t>
-            </a:r>
-          </a:p>
-          <a:p>
-            <a:pPr>
-              <a:spcAft>
-                <a:spcPts val="800"/>
-              </a:spcAft>
-            </a:pPr>
-            <a:r>
-              <a:rPr sz="1050" b="0">
-                <a:solidFill>
-                  <a:srgbClr val="4A4F57"/>
-                </a:solidFill>
-                <a:latin typeface="Segoe UI"/>
-                <a:ea typeface="Microsoft YaHei"/>
-                <a:cs typeface="Microsoft YaHei"/>
-              </a:rPr>
-              <a:t>门槛 </a:t>
-            </a:r>
-            <a:r>
-              <a:rPr sz="1050" b="1">
-                <a:solidFill>
-                  <a:srgbClr val="2F6B6B"/>
-                </a:solidFill>
-                <a:latin typeface="Segoe UI"/>
-                <a:ea typeface="Microsoft YaHei"/>
-                <a:cs typeface="Microsoft YaHei"/>
-              </a:rPr>
-              <a:t>1.67</a:t>
-            </a:r>
-            <a:r>
-              <a:rPr sz="1050" b="0">
-                <a:solidFill>
-                  <a:srgbClr val="4A4F57"/>
-                </a:solidFill>
-                <a:latin typeface="Segoe UI"/>
-                <a:ea typeface="Microsoft YaHei"/>
-                <a:cs typeface="Microsoft YaHei"/>
-              </a:rPr>
-              <a:t>：要有中等强度的隐藏因素才能推翻。不算铁证，但</a:t>
-            </a:r>
-            <a:r>
-              <a:rPr sz="1050" b="1">
-                <a:solidFill>
-                  <a:srgbClr val="2F6B6B"/>
-                </a:solidFill>
-                <a:latin typeface="Segoe UI"/>
-                <a:ea typeface="Microsoft YaHei"/>
-                <a:cs typeface="Microsoft YaHei"/>
-              </a:rPr>
-              <a:t>站得住</a:t>
-            </a:r>
-            <a:r>
-              <a:rPr sz="1050" b="0">
-                <a:solidFill>
-                  <a:srgbClr val="4A4F57"/>
-                </a:solidFill>
-                <a:latin typeface="Segoe UI"/>
-                <a:ea typeface="Microsoft YaHei"/>
-                <a:cs typeface="Microsoft YaHei"/>
-              </a:rPr>
-              <a:t>。</a:t>
-            </a:r>
-          </a:p>
-          <a:p>
-            <a:pPr>
-              <a:spcAft>
-                <a:spcPts val="100"/>
-              </a:spcAft>
-            </a:pPr>
-            <a:r>
-              <a:rPr sz="1150" b="1">
+                <a:latin typeface="Segoe UI"/>
+                <a:ea typeface="Microsoft YaHei"/>
+                <a:cs typeface="Microsoft YaHei"/>
+              </a:rPr>
+              <a:t>文中出现「however」处的分歧：However, a case-control study of 465 patients with CKD and 467 community controls found that artificially sweetened cola
+→ 追问：这两侧能否在某个前提下统一？冲突落在哪一层（定义 / 前提 / 判定标准 / 尺度）？</a:t>
+            </a:r>
+          </a:p>
+          <a:p>
+            <a:pPr>
+              <a:spcAft>
+                <a:spcPts val="900"/>
+              </a:spcAft>
+            </a:pPr>
+            <a:r>
+              <a:rPr sz="800" b="0">
+                <a:solidFill>
+                  <a:srgbClr val="8A8F96"/>
+                </a:solidFill>
+                <a:latin typeface="Segoe UI"/>
+                <a:ea typeface="Microsoft YaHei"/>
+                <a:cs typeface="Microsoft YaHei"/>
+              </a:rPr>
+              <a:t>触发原文：However, a case-control study of 465 patients with CKD and…</a:t>
+            </a:r>
+          </a:p>
+          <a:p>
+            <a:pPr>
+              <a:spcAft>
+                <a:spcPts val="700"/>
+              </a:spcAft>
+            </a:pPr>
+            <a:r>
+              <a:rPr sz="850" b="1">
+                <a:solidFill>
+                  <a:srgbClr val="B03A2E"/>
+                </a:solidFill>
+                <a:latin typeface="Segoe UI"/>
+                <a:ea typeface="Microsoft YaHei"/>
+                <a:cs typeface="Microsoft YaHei"/>
+              </a:rPr>
+              <a:t>however　</a:t>
+            </a:r>
+            <a:r>
+              <a:rPr sz="1000" b="0">
                 <a:solidFill>
                   <a:srgbClr val="16191D"/>
                 </a:solidFill>
-                <a:latin typeface="Source Han Serif SC"/>
-                <a:ea typeface="SimSun"/>
-                <a:cs typeface="SimSun"/>
-              </a:rPr>
-              <a:t>② 代糖多 + 遗传高风险</a:t>
-            </a:r>
-          </a:p>
-          <a:p>
-            <a:pPr>
-              <a:spcAft>
-                <a:spcPts val="800"/>
-              </a:spcAft>
-            </a:pPr>
-            <a:r>
-              <a:rPr sz="1050" b="0">
-                <a:solidFill>
-                  <a:srgbClr val="4A4F57"/>
-                </a:solidFill>
-                <a:latin typeface="Segoe UI"/>
-                <a:ea typeface="Microsoft YaHei"/>
-                <a:cs typeface="Microsoft YaHei"/>
-              </a:rPr>
-              <a:t>门槛 </a:t>
-            </a:r>
-            <a:r>
-              <a:rPr sz="1050" b="1">
-                <a:solidFill>
-                  <a:srgbClr val="2F6B6B"/>
-                </a:solidFill>
-                <a:latin typeface="Segoe UI"/>
-                <a:ea typeface="Microsoft YaHei"/>
-                <a:cs typeface="Microsoft YaHei"/>
-              </a:rPr>
-              <a:t>2.34</a:t>
-            </a:r>
-            <a:r>
-              <a:rPr sz="1050" b="0">
-                <a:solidFill>
-                  <a:srgbClr val="4A4F57"/>
-                </a:solidFill>
-                <a:latin typeface="Segoe UI"/>
-                <a:ea typeface="Microsoft YaHei"/>
-                <a:cs typeface="Microsoft YaHei"/>
-              </a:rPr>
-              <a:t>：现实里很少有这么强的因素。</a:t>
-            </a:r>
-            <a:r>
-              <a:rPr sz="1050" b="1">
-                <a:solidFill>
-                  <a:srgbClr val="2F6B6B"/>
-                </a:solidFill>
-                <a:latin typeface="Segoe UI"/>
-                <a:ea typeface="Microsoft YaHei"/>
-                <a:cs typeface="Microsoft YaHei"/>
-              </a:rPr>
-              <a:t>这是三条里最稳的</a:t>
-            </a:r>
-            <a:r>
-              <a:rPr sz="1050" b="0">
-                <a:solidFill>
-                  <a:srgbClr val="4A4F57"/>
-                </a:solidFill>
-                <a:latin typeface="Segoe UI"/>
-                <a:ea typeface="Microsoft YaHei"/>
-                <a:cs typeface="Microsoft YaHei"/>
-              </a:rPr>
-              <a:t>。</a:t>
-            </a:r>
-          </a:p>
-          <a:p>
-            <a:pPr>
-              <a:spcAft>
-                <a:spcPts val="100"/>
-              </a:spcAft>
-            </a:pPr>
-            <a:r>
-              <a:rPr sz="1150" b="1">
-                <a:solidFill>
-                  <a:srgbClr val="16191D"/>
-                </a:solidFill>
-                <a:latin typeface="Source Han Serif SC"/>
-                <a:ea typeface="SimSun"/>
-                <a:cs typeface="SimSun"/>
-              </a:rPr>
-              <a:t>③ 用代糖替代糖</a:t>
-            </a:r>
-          </a:p>
-          <a:p>
-            <a:pPr>
-              <a:spcAft>
-                <a:spcPts val="800"/>
-              </a:spcAft>
-            </a:pPr>
-            <a:r>
-              <a:rPr sz="1050" b="0">
-                <a:solidFill>
-                  <a:srgbClr val="4A4F57"/>
-                </a:solidFill>
-                <a:latin typeface="Segoe UI"/>
-                <a:ea typeface="Microsoft YaHei"/>
-                <a:cs typeface="Microsoft YaHei"/>
-              </a:rPr>
-              <a:t>门槛只有 </a:t>
-            </a:r>
-            <a:r>
-              <a:rPr sz="1050" b="1">
-                <a:solidFill>
-                  <a:srgbClr val="2F6B6B"/>
-                </a:solidFill>
-                <a:latin typeface="Segoe UI"/>
-                <a:ea typeface="Microsoft YaHei"/>
-                <a:cs typeface="Microsoft YaHei"/>
-              </a:rPr>
-              <a:t>1.16</a:t>
-            </a:r>
-            <a:r>
-              <a:rPr sz="1050" b="0">
-                <a:solidFill>
-                  <a:srgbClr val="4A4F57"/>
-                </a:solidFill>
-                <a:latin typeface="Segoe UI"/>
-                <a:ea typeface="Microsoft YaHei"/>
-                <a:cs typeface="Microsoft YaHei"/>
-              </a:rPr>
-              <a:t>：</a:t>
-            </a:r>
-            <a:r>
-              <a:rPr sz="1050" b="1">
-                <a:solidFill>
-                  <a:srgbClr val="2F6B6B"/>
-                </a:solidFill>
-                <a:latin typeface="Segoe UI"/>
-                <a:ea typeface="Microsoft YaHei"/>
-                <a:cs typeface="Microsoft YaHei"/>
-              </a:rPr>
-              <a:t>微弱偏差就能推翻</a:t>
-            </a:r>
-            <a:r>
-              <a:rPr sz="1050" b="0">
-                <a:solidFill>
-                  <a:srgbClr val="4A4F57"/>
-                </a:solidFill>
-                <a:latin typeface="Segoe UI"/>
-                <a:ea typeface="Microsoft YaHei"/>
-                <a:cs typeface="Microsoft YaHei"/>
-              </a:rPr>
-              <a:t>。论文说「换代糖没有好处」，但</a:t>
-            </a:r>
-            <a:r>
-              <a:rPr sz="1050" b="1">
-                <a:solidFill>
-                  <a:srgbClr val="2F6B6B"/>
-                </a:solidFill>
-                <a:latin typeface="Segoe UI"/>
-                <a:ea typeface="Microsoft YaHei"/>
-                <a:cs typeface="Microsoft YaHei"/>
-              </a:rPr>
-              <a:t>这个数据撑不起这句话</a:t>
-            </a:r>
-            <a:r>
-              <a:rPr sz="1050" b="0">
-                <a:solidFill>
-                  <a:srgbClr val="4A4F57"/>
-                </a:solidFill>
-                <a:latin typeface="Segoe UI"/>
-                <a:ea typeface="Microsoft YaHei"/>
-                <a:cs typeface="Microsoft YaHei"/>
-              </a:rPr>
-              <a:t>。</a:t>
-            </a:r>
-          </a:p>
-        </p:txBody>
-      </p:sp>
-      <p:sp>
-        <p:nvSpPr>
-          <p:cNvPr id="8" name="Rectangle 7"/>
+                <a:latin typeface="Segoe UI"/>
+                <a:ea typeface="Microsoft YaHei"/>
+                <a:cs typeface="Microsoft YaHei"/>
+              </a:rPr>
+              <a:t>文中出现「however」处的分歧：However, several limitations in this study should be acknowledged.
+→ 追问：这两侧能否在某个前提下统一？冲突落在哪一层（定义 / 前提 / 判定标准 / 尺度）？</a:t>
+            </a:r>
+          </a:p>
+          <a:p>
+            <a:pPr>
+              <a:spcAft>
+                <a:spcPts val="900"/>
+              </a:spcAft>
+            </a:pPr>
+            <a:r>
+              <a:rPr sz="800" b="0">
+                <a:solidFill>
+                  <a:srgbClr val="8A8F96"/>
+                </a:solidFill>
+                <a:latin typeface="Segoe UI"/>
+                <a:ea typeface="Microsoft YaHei"/>
+                <a:cs typeface="Microsoft YaHei"/>
+              </a:rPr>
+              <a:t>触发原文：However, several limitations in this study should be ackno…</a:t>
+            </a:r>
+          </a:p>
+        </p:txBody>
+      </p:sp>
+      <p:sp>
+        <p:nvSpPr>
+          <p:cNvPr id="7" name="Rectangle 6"/>
           <p:cNvSpPr/>
           <p:nvPr/>
         </p:nvSpPr>
@@ -16360,7 +18095,7 @@
       </p:sp>
       <p:sp>
         <p:nvSpPr>
-          <p:cNvPr id="9" name="TextBox 8"/>
+          <p:cNvPr id="8" name="TextBox 7"/>
           <p:cNvSpPr txBox="1"/>
           <p:nvPr/>
         </p:nvSpPr>
@@ -16394,36 +18129,14 @@
                 <a:ea typeface="Microsoft YaHei"/>
                 <a:cs typeface="Microsoft YaHei"/>
               </a:rPr>
-              <a:t>纪律：这是</a:t>
-            </a:r>
-            <a:r>
-              <a:rPr sz="1000" b="1">
-                <a:solidFill>
-                  <a:srgbClr val="2F6B6B"/>
-                </a:solidFill>
-                <a:latin typeface="Segoe UI"/>
-                <a:ea typeface="Microsoft YaHei"/>
-                <a:cs typeface="Microsoft YaHei"/>
-              </a:rPr>
-              <a:t>门槛，不是结论</a:t>
-            </a:r>
-            <a:r>
-              <a:rPr sz="1000" b="0">
-                <a:solidFill>
-                  <a:srgbClr val="6B7078"/>
-                </a:solidFill>
-                <a:latin typeface="Segoe UI"/>
-                <a:ea typeface="Microsoft YaHei"/>
-                <a:cs typeface="Microsoft YaHei"/>
-              </a:rPr>
-              <a:t>。1.67 不等于「代糖真的有害」，也推不出任何饮食、用药或诊断建议；任何人都能用论文里的数字复核这三个数。</a:t>
-            </a:r>
-          </a:p>
-        </p:txBody>
-      </p:sp>
-      <p:sp>
-        <p:nvSpPr>
-          <p:cNvPr id="10" name="TextBox 9"/>
+              <a:t>分歧落在哪一层（定义 / 前提 / 判定标准 / 尺度），决定这条追问能不能被判。</a:t>
+            </a:r>
+          </a:p>
+        </p:txBody>
+      </p:sp>
+      <p:sp>
+        <p:nvSpPr>
+          <p:cNvPr id="9" name="TextBox 8"/>
           <p:cNvSpPr txBox="1"/>
           <p:nvPr/>
         </p:nvSpPr>
@@ -16457,7 +18170,7 @@
                 <a:ea typeface="Microsoft YaHei"/>
                 <a:cs typeface="Microsoft YaHei"/>
               </a:rPr>
-              <a:t>09 / 24</a:t>
+              <a:t>09 / 26</a:t>
             </a:r>
           </a:p>
         </p:txBody>
